--- a/AFM/report/images/drawings.pptx
+++ b/AFM/report/images/drawings.pptx
@@ -21,7 +21,8 @@
     <p:sldId id="271" r:id="rId15"/>
     <p:sldId id="274" r:id="rId16"/>
     <p:sldId id="272" r:id="rId17"/>
-    <p:sldId id="276" r:id="rId18"/>
+    <p:sldId id="277" r:id="rId18"/>
+    <p:sldId id="278" r:id="rId19"/>
   </p:sldIdLst>
   <p:sldSz cx="12192000" cy="6858000"/>
   <p:notesSz cx="6858000" cy="9144000"/>
@@ -13757,7 +13758,13 @@
   <p:cSld>
     <p:spTree>
       <p:nvGrpSpPr>
-        <p:cNvPr id="1" name=""/>
+        <p:cNvPr id="1" name="">
+          <a:extLst>
+            <a:ext uri="{FF2B5EF4-FFF2-40B4-BE49-F238E27FC236}">
+              <a16:creationId xmlns:a16="http://schemas.microsoft.com/office/drawing/2014/main" id="{46807F9C-EC5D-6B65-42BB-B3F6594A6EFF}"/>
+            </a:ext>
+          </a:extLst>
+        </p:cNvPr>
         <p:cNvGrpSpPr/>
         <p:nvPr/>
       </p:nvGrpSpPr>
@@ -13769,10 +13776,2312 @@
           <a:chExt cx="0" cy="0"/>
         </a:xfrm>
       </p:grpSpPr>
+      <p:pic>
+        <p:nvPicPr>
+          <p:cNvPr id="5" name="Grafik 4">
+            <a:extLst>
+              <a:ext uri="{FF2B5EF4-FFF2-40B4-BE49-F238E27FC236}">
+                <a16:creationId xmlns:a16="http://schemas.microsoft.com/office/drawing/2014/main" id="{6C872A94-A5E7-3F37-03FD-079251F2F991}"/>
+              </a:ext>
+            </a:extLst>
+          </p:cNvPr>
+          <p:cNvPicPr>
+            <a:picLocks noChangeAspect="1"/>
+          </p:cNvPicPr>
+          <p:nvPr/>
+        </p:nvPicPr>
+        <p:blipFill>
+          <a:blip r:embed="rId2">
+            <a:extLst>
+              <a:ext uri="{28A0092B-C50C-407E-A947-70E740481C1C}">
+                <a14:useLocalDpi xmlns:a14="http://schemas.microsoft.com/office/drawing/2010/main" val="0"/>
+              </a:ext>
+            </a:extLst>
+          </a:blip>
+          <a:stretch>
+            <a:fillRect/>
+          </a:stretch>
+        </p:blipFill>
+        <p:spPr>
+          <a:xfrm>
+            <a:off x="1524000" y="0"/>
+            <a:ext cx="9144000" cy="6858000"/>
+          </a:xfrm>
+          <a:prstGeom prst="rect">
+            <a:avLst/>
+          </a:prstGeom>
+          <a:noFill/>
+          <a:ln>
+            <a:noFill/>
+          </a:ln>
+        </p:spPr>
+      </p:pic>
+      <p:cxnSp>
+        <p:nvCxnSpPr>
+          <p:cNvPr id="61" name="Gerade Verbindung mit Pfeil 60">
+            <a:extLst>
+              <a:ext uri="{FF2B5EF4-FFF2-40B4-BE49-F238E27FC236}">
+                <a16:creationId xmlns:a16="http://schemas.microsoft.com/office/drawing/2014/main" id="{118E75D0-792B-2CCE-FC6F-79031C8B82E5}"/>
+              </a:ext>
+            </a:extLst>
+          </p:cNvPr>
+          <p:cNvCxnSpPr>
+            <a:cxnSpLocks/>
+          </p:cNvCxnSpPr>
+          <p:nvPr/>
+        </p:nvCxnSpPr>
+        <p:spPr>
+          <a:xfrm>
+            <a:off x="2292350" y="2063816"/>
+            <a:ext cx="0" cy="1561338"/>
+          </a:xfrm>
+          <a:prstGeom prst="straightConnector1">
+            <a:avLst/>
+          </a:prstGeom>
+          <a:ln w="38100">
+            <a:solidFill>
+              <a:srgbClr val="C00000"/>
+            </a:solidFill>
+            <a:tailEnd type="triangle"/>
+          </a:ln>
+          <a:scene3d>
+            <a:camera prst="orthographicFront"/>
+            <a:lightRig rig="threePt" dir="t"/>
+          </a:scene3d>
+          <a:sp3d contourW="12700">
+            <a:contourClr>
+              <a:schemeClr val="bg1"/>
+            </a:contourClr>
+          </a:sp3d>
+        </p:spPr>
+        <p:style>
+          <a:lnRef idx="2">
+            <a:schemeClr val="accent1"/>
+          </a:lnRef>
+          <a:fillRef idx="0">
+            <a:schemeClr val="accent1"/>
+          </a:fillRef>
+          <a:effectRef idx="1">
+            <a:schemeClr val="accent1"/>
+          </a:effectRef>
+          <a:fontRef idx="minor">
+            <a:schemeClr val="tx1"/>
+          </a:fontRef>
+        </p:style>
+      </p:cxnSp>
+      <p:cxnSp>
+        <p:nvCxnSpPr>
+          <p:cNvPr id="65" name="Gerade Verbindung mit Pfeil 64">
+            <a:extLst>
+              <a:ext uri="{FF2B5EF4-FFF2-40B4-BE49-F238E27FC236}">
+                <a16:creationId xmlns:a16="http://schemas.microsoft.com/office/drawing/2014/main" id="{7A61BF16-6CB9-C6FA-66C9-0CEF4800F3E6}"/>
+              </a:ext>
+            </a:extLst>
+          </p:cNvPr>
+          <p:cNvCxnSpPr>
+            <a:cxnSpLocks/>
+          </p:cNvCxnSpPr>
+          <p:nvPr/>
+        </p:nvCxnSpPr>
+        <p:spPr>
+          <a:xfrm>
+            <a:off x="2003425" y="993078"/>
+            <a:ext cx="0" cy="2398672"/>
+          </a:xfrm>
+          <a:prstGeom prst="straightConnector1">
+            <a:avLst/>
+          </a:prstGeom>
+          <a:ln w="38100">
+            <a:solidFill>
+              <a:srgbClr val="C00000"/>
+            </a:solidFill>
+            <a:tailEnd type="triangle"/>
+          </a:ln>
+          <a:scene3d>
+            <a:camera prst="orthographicFront"/>
+            <a:lightRig rig="threePt" dir="t"/>
+          </a:scene3d>
+          <a:sp3d contourW="12700">
+            <a:contourClr>
+              <a:schemeClr val="bg1"/>
+            </a:contourClr>
+          </a:sp3d>
+        </p:spPr>
+        <p:style>
+          <a:lnRef idx="2">
+            <a:schemeClr val="accent1"/>
+          </a:lnRef>
+          <a:fillRef idx="0">
+            <a:schemeClr val="accent1"/>
+          </a:fillRef>
+          <a:effectRef idx="1">
+            <a:schemeClr val="accent1"/>
+          </a:effectRef>
+          <a:fontRef idx="minor">
+            <a:schemeClr val="tx1"/>
+          </a:fontRef>
+        </p:style>
+      </p:cxnSp>
+      <p:sp>
+        <p:nvSpPr>
+          <p:cNvPr id="6" name="Rechteck 5">
+            <a:extLst>
+              <a:ext uri="{FF2B5EF4-FFF2-40B4-BE49-F238E27FC236}">
+                <a16:creationId xmlns:a16="http://schemas.microsoft.com/office/drawing/2014/main" id="{DDCF6842-AEC8-D80C-CCA1-E305359FE607}"/>
+              </a:ext>
+            </a:extLst>
+          </p:cNvPr>
+          <p:cNvSpPr/>
+          <p:nvPr/>
+        </p:nvSpPr>
+        <p:spPr>
+          <a:xfrm>
+            <a:off x="2616200" y="2334444"/>
+            <a:ext cx="1727200" cy="369332"/>
+          </a:xfrm>
+          <a:prstGeom prst="rect">
+            <a:avLst/>
+          </a:prstGeom>
+          <a:solidFill>
+            <a:srgbClr val="C00000"/>
+          </a:solidFill>
+          <a:ln>
+            <a:solidFill>
+              <a:srgbClr val="C00000"/>
+            </a:solidFill>
+          </a:ln>
+        </p:spPr>
+        <p:style>
+          <a:lnRef idx="0">
+            <a:scrgbClr r="0" g="0" b="0"/>
+          </a:lnRef>
+          <a:fillRef idx="0">
+            <a:scrgbClr r="0" g="0" b="0"/>
+          </a:fillRef>
+          <a:effectRef idx="0">
+            <a:scrgbClr r="0" g="0" b="0"/>
+          </a:effectRef>
+          <a:fontRef idx="minor">
+            <a:schemeClr val="lt1"/>
+          </a:fontRef>
+        </p:style>
+        <p:txBody>
+          <a:bodyPr rtlCol="0" anchor="ctr">
+            <a:spAutoFit/>
+          </a:bodyPr>
+          <a:lstStyle/>
+          <a:p>
+            <a:pPr algn="ctr"/>
+            <a:r>
+              <a:rPr lang="de-AT" b="1" dirty="0"/>
+              <a:t>Strain </a:t>
+            </a:r>
+            <a:r>
+              <a:rPr lang="de-AT" b="1" dirty="0" err="1"/>
+              <a:t>Gauges</a:t>
+            </a:r>
+            <a:endParaRPr lang="de-DE" b="1" dirty="0"/>
+          </a:p>
+        </p:txBody>
+      </p:sp>
+      <p:cxnSp>
+        <p:nvCxnSpPr>
+          <p:cNvPr id="8" name="Gerade Verbindung mit Pfeil 7">
+            <a:extLst>
+              <a:ext uri="{FF2B5EF4-FFF2-40B4-BE49-F238E27FC236}">
+                <a16:creationId xmlns:a16="http://schemas.microsoft.com/office/drawing/2014/main" id="{B3A41B7C-540C-D685-F9AE-2C0F4C2BC795}"/>
+              </a:ext>
+            </a:extLst>
+          </p:cNvPr>
+          <p:cNvCxnSpPr>
+            <a:cxnSpLocks/>
+          </p:cNvCxnSpPr>
+          <p:nvPr/>
+        </p:nvCxnSpPr>
+        <p:spPr>
+          <a:xfrm>
+            <a:off x="2692400" y="2703776"/>
+            <a:ext cx="0" cy="864924"/>
+          </a:xfrm>
+          <a:prstGeom prst="straightConnector1">
+            <a:avLst/>
+          </a:prstGeom>
+          <a:ln w="38100">
+            <a:solidFill>
+              <a:srgbClr val="C00000"/>
+            </a:solidFill>
+            <a:tailEnd type="triangle"/>
+          </a:ln>
+          <a:scene3d>
+            <a:camera prst="orthographicFront"/>
+            <a:lightRig rig="threePt" dir="t"/>
+          </a:scene3d>
+          <a:sp3d contourW="12700">
+            <a:contourClr>
+              <a:schemeClr val="bg1"/>
+            </a:contourClr>
+          </a:sp3d>
+        </p:spPr>
+        <p:style>
+          <a:lnRef idx="2">
+            <a:schemeClr val="accent1"/>
+          </a:lnRef>
+          <a:fillRef idx="0">
+            <a:schemeClr val="accent1"/>
+          </a:fillRef>
+          <a:effectRef idx="1">
+            <a:schemeClr val="accent1"/>
+          </a:effectRef>
+          <a:fontRef idx="minor">
+            <a:schemeClr val="tx1"/>
+          </a:fontRef>
+        </p:style>
+      </p:cxnSp>
+      <p:sp>
+        <p:nvSpPr>
+          <p:cNvPr id="12" name="Rechteck 11">
+            <a:extLst>
+              <a:ext uri="{FF2B5EF4-FFF2-40B4-BE49-F238E27FC236}">
+                <a16:creationId xmlns:a16="http://schemas.microsoft.com/office/drawing/2014/main" id="{4825DB39-47BE-513C-4990-62973F222CCD}"/>
+              </a:ext>
+            </a:extLst>
+          </p:cNvPr>
+          <p:cNvSpPr/>
+          <p:nvPr/>
+        </p:nvSpPr>
+        <p:spPr>
+          <a:xfrm>
+            <a:off x="2260600" y="4581184"/>
+            <a:ext cx="1168400" cy="646331"/>
+          </a:xfrm>
+          <a:prstGeom prst="rect">
+            <a:avLst/>
+          </a:prstGeom>
+          <a:solidFill>
+            <a:srgbClr val="C00000"/>
+          </a:solidFill>
+          <a:ln>
+            <a:solidFill>
+              <a:srgbClr val="C00000"/>
+            </a:solidFill>
+          </a:ln>
+        </p:spPr>
+        <p:style>
+          <a:lnRef idx="0">
+            <a:scrgbClr r="0" g="0" b="0"/>
+          </a:lnRef>
+          <a:fillRef idx="0">
+            <a:scrgbClr r="0" g="0" b="0"/>
+          </a:fillRef>
+          <a:effectRef idx="0">
+            <a:scrgbClr r="0" g="0" b="0"/>
+          </a:effectRef>
+          <a:fontRef idx="minor">
+            <a:schemeClr val="lt1"/>
+          </a:fontRef>
+        </p:style>
+        <p:txBody>
+          <a:bodyPr wrap="square" rtlCol="0" anchor="ctr">
+            <a:spAutoFit/>
+          </a:bodyPr>
+          <a:lstStyle/>
+          <a:p>
+            <a:pPr algn="ctr"/>
+            <a:r>
+              <a:rPr lang="de-AT" b="1" dirty="0"/>
+              <a:t>Lorentz </a:t>
+            </a:r>
+            <a:r>
+              <a:rPr lang="de-AT" b="1" dirty="0" err="1"/>
+              <a:t>Actuator</a:t>
+            </a:r>
+            <a:endParaRPr lang="de-DE" b="1" dirty="0"/>
+          </a:p>
+        </p:txBody>
+      </p:sp>
+      <p:cxnSp>
+        <p:nvCxnSpPr>
+          <p:cNvPr id="13" name="Gerade Verbindung mit Pfeil 12">
+            <a:extLst>
+              <a:ext uri="{FF2B5EF4-FFF2-40B4-BE49-F238E27FC236}">
+                <a16:creationId xmlns:a16="http://schemas.microsoft.com/office/drawing/2014/main" id="{514DE076-19A2-E503-A835-E373030BB3DD}"/>
+              </a:ext>
+            </a:extLst>
+          </p:cNvPr>
+          <p:cNvCxnSpPr>
+            <a:cxnSpLocks/>
+            <a:stCxn id="12" idx="0"/>
+          </p:cNvCxnSpPr>
+          <p:nvPr/>
+        </p:nvCxnSpPr>
+        <p:spPr>
+          <a:xfrm flipV="1">
+            <a:off x="2844800" y="3810000"/>
+            <a:ext cx="219472" cy="771184"/>
+          </a:xfrm>
+          <a:prstGeom prst="straightConnector1">
+            <a:avLst/>
+          </a:prstGeom>
+          <a:ln w="38100">
+            <a:solidFill>
+              <a:srgbClr val="C00000"/>
+            </a:solidFill>
+            <a:tailEnd type="triangle"/>
+          </a:ln>
+          <a:scene3d>
+            <a:camera prst="orthographicFront"/>
+            <a:lightRig rig="threePt" dir="t"/>
+          </a:scene3d>
+          <a:sp3d contourW="12700">
+            <a:contourClr>
+              <a:schemeClr val="bg1"/>
+            </a:contourClr>
+          </a:sp3d>
+        </p:spPr>
+        <p:style>
+          <a:lnRef idx="2">
+            <a:schemeClr val="accent1"/>
+          </a:lnRef>
+          <a:fillRef idx="0">
+            <a:schemeClr val="accent1"/>
+          </a:fillRef>
+          <a:effectRef idx="1">
+            <a:schemeClr val="accent1"/>
+          </a:effectRef>
+          <a:fontRef idx="minor">
+            <a:schemeClr val="tx1"/>
+          </a:fontRef>
+        </p:style>
+      </p:cxnSp>
+      <p:sp>
+        <p:nvSpPr>
+          <p:cNvPr id="19" name="Rechteck 18">
+            <a:extLst>
+              <a:ext uri="{FF2B5EF4-FFF2-40B4-BE49-F238E27FC236}">
+                <a16:creationId xmlns:a16="http://schemas.microsoft.com/office/drawing/2014/main" id="{456DA733-EA4C-5616-3FCF-41FD8D0C8042}"/>
+              </a:ext>
+            </a:extLst>
+          </p:cNvPr>
+          <p:cNvSpPr/>
+          <p:nvPr/>
+        </p:nvSpPr>
+        <p:spPr>
+          <a:xfrm>
+            <a:off x="1739900" y="5422469"/>
+            <a:ext cx="2540000" cy="1200329"/>
+          </a:xfrm>
+          <a:prstGeom prst="rect">
+            <a:avLst/>
+          </a:prstGeom>
+          <a:solidFill>
+            <a:srgbClr val="C00000"/>
+          </a:solidFill>
+          <a:ln>
+            <a:solidFill>
+              <a:srgbClr val="C00000"/>
+            </a:solidFill>
+          </a:ln>
+        </p:spPr>
+        <p:style>
+          <a:lnRef idx="0">
+            <a:scrgbClr r="0" g="0" b="0"/>
+          </a:lnRef>
+          <a:fillRef idx="0">
+            <a:scrgbClr r="0" g="0" b="0"/>
+          </a:fillRef>
+          <a:effectRef idx="0">
+            <a:scrgbClr r="0" g="0" b="0"/>
+          </a:effectRef>
+          <a:fontRef idx="minor">
+            <a:schemeClr val="lt1"/>
+          </a:fontRef>
+        </p:style>
+        <p:txBody>
+          <a:bodyPr wrap="square" rtlCol="0" anchor="ctr">
+            <a:spAutoFit/>
+          </a:bodyPr>
+          <a:lstStyle/>
+          <a:p>
+            <a:pPr algn="ctr"/>
+            <a:r>
+              <a:rPr lang="de-AT" b="1" dirty="0" err="1"/>
+              <a:t>Deflection</a:t>
+            </a:r>
+            <a:r>
+              <a:rPr lang="de-AT" b="1" dirty="0"/>
+              <a:t> </a:t>
+            </a:r>
+            <a:r>
+              <a:rPr lang="de-AT" b="1" dirty="0" err="1"/>
+              <a:t>Readout</a:t>
+            </a:r>
+            <a:r>
+              <a:rPr lang="de-AT" b="1" dirty="0"/>
+              <a:t> Electronics,</a:t>
+            </a:r>
+          </a:p>
+          <a:p>
+            <a:pPr algn="ctr"/>
+            <a:r>
+              <a:rPr lang="de-AT" b="1" dirty="0"/>
+              <a:t>Offset </a:t>
+            </a:r>
+            <a:r>
+              <a:rPr lang="de-AT" b="1" dirty="0" err="1"/>
+              <a:t>Compensation</a:t>
+            </a:r>
+            <a:r>
+              <a:rPr lang="de-AT" b="1" dirty="0"/>
+              <a:t> Potentiometer</a:t>
+            </a:r>
+            <a:endParaRPr lang="de-DE" b="1" dirty="0"/>
+          </a:p>
+        </p:txBody>
+      </p:sp>
+      <p:cxnSp>
+        <p:nvCxnSpPr>
+          <p:cNvPr id="20" name="Gerade Verbindung mit Pfeil 19">
+            <a:extLst>
+              <a:ext uri="{FF2B5EF4-FFF2-40B4-BE49-F238E27FC236}">
+                <a16:creationId xmlns:a16="http://schemas.microsoft.com/office/drawing/2014/main" id="{C4682906-4CF2-C88C-0761-DDCA131DAB9D}"/>
+              </a:ext>
+            </a:extLst>
+          </p:cNvPr>
+          <p:cNvCxnSpPr>
+            <a:cxnSpLocks/>
+            <a:stCxn id="37" idx="0"/>
+          </p:cNvCxnSpPr>
+          <p:nvPr/>
+        </p:nvCxnSpPr>
+        <p:spPr>
+          <a:xfrm flipH="1" flipV="1">
+            <a:off x="4213225" y="4172419"/>
+            <a:ext cx="1514475" cy="1774993"/>
+          </a:xfrm>
+          <a:prstGeom prst="straightConnector1">
+            <a:avLst/>
+          </a:prstGeom>
+          <a:ln w="38100">
+            <a:solidFill>
+              <a:srgbClr val="C00000"/>
+            </a:solidFill>
+            <a:tailEnd type="triangle"/>
+          </a:ln>
+          <a:scene3d>
+            <a:camera prst="orthographicFront"/>
+            <a:lightRig rig="threePt" dir="t"/>
+          </a:scene3d>
+          <a:sp3d contourW="12700">
+            <a:contourClr>
+              <a:schemeClr val="bg1"/>
+            </a:contourClr>
+          </a:sp3d>
+        </p:spPr>
+        <p:style>
+          <a:lnRef idx="2">
+            <a:schemeClr val="accent1"/>
+          </a:lnRef>
+          <a:fillRef idx="0">
+            <a:schemeClr val="accent1"/>
+          </a:fillRef>
+          <a:effectRef idx="1">
+            <a:schemeClr val="accent1"/>
+          </a:effectRef>
+          <a:fontRef idx="minor">
+            <a:schemeClr val="tx1"/>
+          </a:fontRef>
+        </p:style>
+      </p:cxnSp>
+      <p:sp>
+        <p:nvSpPr>
+          <p:cNvPr id="24" name="Rechteck 23">
+            <a:extLst>
+              <a:ext uri="{FF2B5EF4-FFF2-40B4-BE49-F238E27FC236}">
+                <a16:creationId xmlns:a16="http://schemas.microsoft.com/office/drawing/2014/main" id="{5FD35C47-0FDF-D5C1-C682-68DC931B1001}"/>
+              </a:ext>
+            </a:extLst>
+          </p:cNvPr>
+          <p:cNvSpPr/>
+          <p:nvPr/>
+        </p:nvSpPr>
+        <p:spPr>
+          <a:xfrm>
+            <a:off x="5861050" y="4209618"/>
+            <a:ext cx="1066800" cy="923330"/>
+          </a:xfrm>
+          <a:prstGeom prst="rect">
+            <a:avLst/>
+          </a:prstGeom>
+          <a:solidFill>
+            <a:srgbClr val="C00000"/>
+          </a:solidFill>
+          <a:ln>
+            <a:solidFill>
+              <a:srgbClr val="C00000"/>
+            </a:solidFill>
+          </a:ln>
+        </p:spPr>
+        <p:style>
+          <a:lnRef idx="0">
+            <a:scrgbClr r="0" g="0" b="0"/>
+          </a:lnRef>
+          <a:fillRef idx="0">
+            <a:scrgbClr r="0" g="0" b="0"/>
+          </a:fillRef>
+          <a:effectRef idx="0">
+            <a:scrgbClr r="0" g="0" b="0"/>
+          </a:effectRef>
+          <a:fontRef idx="minor">
+            <a:schemeClr val="lt1"/>
+          </a:fontRef>
+        </p:style>
+        <p:txBody>
+          <a:bodyPr wrap="square" rtlCol="0" anchor="ctr">
+            <a:spAutoFit/>
+          </a:bodyPr>
+          <a:lstStyle/>
+          <a:p>
+            <a:pPr algn="ctr"/>
+            <a:r>
+              <a:rPr lang="de-AT" b="1" dirty="0"/>
+              <a:t>Power Supply (±10V)</a:t>
+            </a:r>
+            <a:endParaRPr lang="de-DE" b="1" dirty="0"/>
+          </a:p>
+        </p:txBody>
+      </p:sp>
+      <p:cxnSp>
+        <p:nvCxnSpPr>
+          <p:cNvPr id="25" name="Gerade Verbindung mit Pfeil 24">
+            <a:extLst>
+              <a:ext uri="{FF2B5EF4-FFF2-40B4-BE49-F238E27FC236}">
+                <a16:creationId xmlns:a16="http://schemas.microsoft.com/office/drawing/2014/main" id="{5599B6CE-2CB5-3AF6-C84B-5D4CBECFFCA7}"/>
+              </a:ext>
+            </a:extLst>
+          </p:cNvPr>
+          <p:cNvCxnSpPr>
+            <a:cxnSpLocks/>
+            <a:stCxn id="24" idx="1"/>
+          </p:cNvCxnSpPr>
+          <p:nvPr/>
+        </p:nvCxnSpPr>
+        <p:spPr>
+          <a:xfrm flipH="1" flipV="1">
+            <a:off x="4970462" y="4172419"/>
+            <a:ext cx="890588" cy="498864"/>
+          </a:xfrm>
+          <a:prstGeom prst="straightConnector1">
+            <a:avLst/>
+          </a:prstGeom>
+          <a:ln w="38100">
+            <a:solidFill>
+              <a:srgbClr val="C00000"/>
+            </a:solidFill>
+            <a:tailEnd type="triangle"/>
+          </a:ln>
+          <a:effectLst/>
+          <a:scene3d>
+            <a:camera prst="orthographicFront"/>
+            <a:lightRig rig="threePt" dir="t"/>
+          </a:scene3d>
+          <a:sp3d contourW="12700">
+            <a:contourClr>
+              <a:schemeClr val="bg1"/>
+            </a:contourClr>
+          </a:sp3d>
+        </p:spPr>
+        <p:style>
+          <a:lnRef idx="2">
+            <a:schemeClr val="accent1"/>
+          </a:lnRef>
+          <a:fillRef idx="0">
+            <a:schemeClr val="accent1"/>
+          </a:fillRef>
+          <a:effectRef idx="1">
+            <a:schemeClr val="accent1"/>
+          </a:effectRef>
+          <a:fontRef idx="minor">
+            <a:schemeClr val="tx1"/>
+          </a:fontRef>
+        </p:style>
+      </p:cxnSp>
+      <p:cxnSp>
+        <p:nvCxnSpPr>
+          <p:cNvPr id="28" name="Gerade Verbindung mit Pfeil 27">
+            <a:extLst>
+              <a:ext uri="{FF2B5EF4-FFF2-40B4-BE49-F238E27FC236}">
+                <a16:creationId xmlns:a16="http://schemas.microsoft.com/office/drawing/2014/main" id="{0BF2BA5D-AF70-6C40-48DB-9FB0E150D765}"/>
+              </a:ext>
+            </a:extLst>
+          </p:cNvPr>
+          <p:cNvCxnSpPr>
+            <a:cxnSpLocks/>
+          </p:cNvCxnSpPr>
+          <p:nvPr/>
+        </p:nvCxnSpPr>
+        <p:spPr>
+          <a:xfrm flipH="1" flipV="1">
+            <a:off x="3632200" y="4140200"/>
+            <a:ext cx="469900" cy="1282269"/>
+          </a:xfrm>
+          <a:prstGeom prst="straightConnector1">
+            <a:avLst/>
+          </a:prstGeom>
+          <a:ln w="38100">
+            <a:solidFill>
+              <a:srgbClr val="C00000"/>
+            </a:solidFill>
+            <a:tailEnd type="triangle"/>
+          </a:ln>
+          <a:scene3d>
+            <a:camera prst="orthographicFront"/>
+            <a:lightRig rig="threePt" dir="t"/>
+          </a:scene3d>
+          <a:sp3d contourW="12700">
+            <a:contourClr>
+              <a:schemeClr val="bg1"/>
+            </a:contourClr>
+          </a:sp3d>
+        </p:spPr>
+        <p:style>
+          <a:lnRef idx="2">
+            <a:schemeClr val="accent1"/>
+          </a:lnRef>
+          <a:fillRef idx="0">
+            <a:schemeClr val="accent1"/>
+          </a:fillRef>
+          <a:effectRef idx="1">
+            <a:schemeClr val="accent1"/>
+          </a:effectRef>
+          <a:fontRef idx="minor">
+            <a:schemeClr val="tx1"/>
+          </a:fontRef>
+        </p:style>
+      </p:cxnSp>
+      <p:sp>
+        <p:nvSpPr>
+          <p:cNvPr id="37" name="Rechteck 36">
+            <a:extLst>
+              <a:ext uri="{FF2B5EF4-FFF2-40B4-BE49-F238E27FC236}">
+                <a16:creationId xmlns:a16="http://schemas.microsoft.com/office/drawing/2014/main" id="{877F8DAB-9A4B-B7B5-3E6E-5518549465E2}"/>
+              </a:ext>
+            </a:extLst>
+          </p:cNvPr>
+          <p:cNvSpPr/>
+          <p:nvPr/>
+        </p:nvSpPr>
+        <p:spPr>
+          <a:xfrm>
+            <a:off x="4457700" y="5947412"/>
+            <a:ext cx="2540000" cy="646331"/>
+          </a:xfrm>
+          <a:prstGeom prst="rect">
+            <a:avLst/>
+          </a:prstGeom>
+          <a:solidFill>
+            <a:srgbClr val="C00000"/>
+          </a:solidFill>
+          <a:ln>
+            <a:solidFill>
+              <a:srgbClr val="C00000"/>
+            </a:solidFill>
+          </a:ln>
+        </p:spPr>
+        <p:style>
+          <a:lnRef idx="0">
+            <a:scrgbClr r="0" g="0" b="0"/>
+          </a:lnRef>
+          <a:fillRef idx="0">
+            <a:scrgbClr r="0" g="0" b="0"/>
+          </a:fillRef>
+          <a:effectRef idx="0">
+            <a:scrgbClr r="0" g="0" b="0"/>
+          </a:effectRef>
+          <a:fontRef idx="minor">
+            <a:schemeClr val="lt1"/>
+          </a:fontRef>
+        </p:style>
+        <p:txBody>
+          <a:bodyPr wrap="square" rtlCol="0" anchor="ctr">
+            <a:spAutoFit/>
+          </a:bodyPr>
+          <a:lstStyle/>
+          <a:p>
+            <a:pPr algn="ctr"/>
+            <a:r>
+              <a:rPr lang="de-AT" b="1" dirty="0" err="1"/>
+              <a:t>Deflection</a:t>
+            </a:r>
+            <a:r>
+              <a:rPr lang="de-AT" b="1" dirty="0"/>
+              <a:t> </a:t>
+            </a:r>
+            <a:r>
+              <a:rPr lang="de-AT" b="1" dirty="0" err="1"/>
+              <a:t>Readout</a:t>
+            </a:r>
+            <a:r>
+              <a:rPr lang="de-AT" b="1" dirty="0"/>
+              <a:t> Signal</a:t>
+            </a:r>
+            <a:endParaRPr lang="de-DE" b="1" dirty="0"/>
+          </a:p>
+        </p:txBody>
+      </p:sp>
+      <p:sp>
+        <p:nvSpPr>
+          <p:cNvPr id="45" name="Rechteck 44">
+            <a:extLst>
+              <a:ext uri="{FF2B5EF4-FFF2-40B4-BE49-F238E27FC236}">
+                <a16:creationId xmlns:a16="http://schemas.microsoft.com/office/drawing/2014/main" id="{86E8B55A-7CA5-4DFD-BBDF-ADD52F83C06C}"/>
+              </a:ext>
+            </a:extLst>
+          </p:cNvPr>
+          <p:cNvSpPr/>
+          <p:nvPr/>
+        </p:nvSpPr>
+        <p:spPr>
+          <a:xfrm>
+            <a:off x="2168525" y="1417485"/>
+            <a:ext cx="1352550" cy="646331"/>
+          </a:xfrm>
+          <a:prstGeom prst="rect">
+            <a:avLst/>
+          </a:prstGeom>
+          <a:solidFill>
+            <a:srgbClr val="C00000"/>
+          </a:solidFill>
+          <a:ln>
+            <a:solidFill>
+              <a:srgbClr val="C00000"/>
+            </a:solidFill>
+          </a:ln>
+        </p:spPr>
+        <p:style>
+          <a:lnRef idx="0">
+            <a:scrgbClr r="0" g="0" b="0"/>
+          </a:lnRef>
+          <a:fillRef idx="0">
+            <a:scrgbClr r="0" g="0" b="0"/>
+          </a:fillRef>
+          <a:effectRef idx="0">
+            <a:scrgbClr r="0" g="0" b="0"/>
+          </a:effectRef>
+          <a:fontRef idx="minor">
+            <a:schemeClr val="lt1"/>
+          </a:fontRef>
+        </p:style>
+        <p:txBody>
+          <a:bodyPr wrap="square" rtlCol="0" anchor="ctr">
+            <a:spAutoFit/>
+          </a:bodyPr>
+          <a:lstStyle/>
+          <a:p>
+            <a:pPr algn="ctr"/>
+            <a:r>
+              <a:rPr lang="de-AT" b="1" dirty="0"/>
+              <a:t>AFM Cantilever</a:t>
+            </a:r>
+            <a:endParaRPr lang="de-DE" b="1" dirty="0"/>
+          </a:p>
+        </p:txBody>
+      </p:sp>
+      <p:sp>
+        <p:nvSpPr>
+          <p:cNvPr id="64" name="Rechteck 63">
+            <a:extLst>
+              <a:ext uri="{FF2B5EF4-FFF2-40B4-BE49-F238E27FC236}">
+                <a16:creationId xmlns:a16="http://schemas.microsoft.com/office/drawing/2014/main" id="{F6C0CCD4-CBD7-8F6B-D687-23B96530F9D8}"/>
+              </a:ext>
+            </a:extLst>
+          </p:cNvPr>
+          <p:cNvSpPr/>
+          <p:nvPr/>
+        </p:nvSpPr>
+        <p:spPr>
+          <a:xfrm>
+            <a:off x="1784350" y="623746"/>
+            <a:ext cx="1352550" cy="369332"/>
+          </a:xfrm>
+          <a:prstGeom prst="rect">
+            <a:avLst/>
+          </a:prstGeom>
+          <a:solidFill>
+            <a:srgbClr val="C00000"/>
+          </a:solidFill>
+          <a:ln>
+            <a:solidFill>
+              <a:srgbClr val="C00000"/>
+            </a:solidFill>
+          </a:ln>
+        </p:spPr>
+        <p:style>
+          <a:lnRef idx="0">
+            <a:scrgbClr r="0" g="0" b="0"/>
+          </a:lnRef>
+          <a:fillRef idx="0">
+            <a:scrgbClr r="0" g="0" b="0"/>
+          </a:fillRef>
+          <a:effectRef idx="0">
+            <a:scrgbClr r="0" g="0" b="0"/>
+          </a:effectRef>
+          <a:fontRef idx="minor">
+            <a:schemeClr val="lt1"/>
+          </a:fontRef>
+        </p:style>
+        <p:txBody>
+          <a:bodyPr wrap="square" rtlCol="0" anchor="ctr">
+            <a:spAutoFit/>
+          </a:bodyPr>
+          <a:lstStyle/>
+          <a:p>
+            <a:pPr algn="ctr"/>
+            <a:r>
+              <a:rPr lang="de-AT" b="1" dirty="0"/>
+              <a:t>Sample</a:t>
+            </a:r>
+            <a:endParaRPr lang="de-DE" b="1" dirty="0"/>
+          </a:p>
+        </p:txBody>
+      </p:sp>
+      <p:sp>
+        <p:nvSpPr>
+          <p:cNvPr id="85" name="Rechteck 84">
+            <a:extLst>
+              <a:ext uri="{FF2B5EF4-FFF2-40B4-BE49-F238E27FC236}">
+                <a16:creationId xmlns:a16="http://schemas.microsoft.com/office/drawing/2014/main" id="{C72060C6-3878-9B27-334D-685C03E85A66}"/>
+              </a:ext>
+            </a:extLst>
+          </p:cNvPr>
+          <p:cNvSpPr/>
+          <p:nvPr/>
+        </p:nvSpPr>
+        <p:spPr>
+          <a:xfrm>
+            <a:off x="5713412" y="3077170"/>
+            <a:ext cx="1371600" cy="923330"/>
+          </a:xfrm>
+          <a:prstGeom prst="rect">
+            <a:avLst/>
+          </a:prstGeom>
+          <a:solidFill>
+            <a:srgbClr val="C00000"/>
+          </a:solidFill>
+          <a:ln>
+            <a:solidFill>
+              <a:srgbClr val="C00000"/>
+            </a:solidFill>
+          </a:ln>
+        </p:spPr>
+        <p:style>
+          <a:lnRef idx="0">
+            <a:scrgbClr r="0" g="0" b="0"/>
+          </a:lnRef>
+          <a:fillRef idx="0">
+            <a:scrgbClr r="0" g="0" b="0"/>
+          </a:fillRef>
+          <a:effectRef idx="0">
+            <a:scrgbClr r="0" g="0" b="0"/>
+          </a:effectRef>
+          <a:fontRef idx="minor">
+            <a:schemeClr val="lt1"/>
+          </a:fontRef>
+        </p:style>
+        <p:txBody>
+          <a:bodyPr wrap="square" rtlCol="0" anchor="ctr">
+            <a:spAutoFit/>
+          </a:bodyPr>
+          <a:lstStyle/>
+          <a:p>
+            <a:pPr algn="ctr"/>
+            <a:r>
+              <a:rPr lang="de-AT" b="1" dirty="0"/>
+              <a:t>Lorentz </a:t>
+            </a:r>
+            <a:r>
+              <a:rPr lang="de-AT" b="1" dirty="0" err="1"/>
+              <a:t>Actuator</a:t>
+            </a:r>
+            <a:r>
+              <a:rPr lang="de-AT" b="1" dirty="0"/>
+              <a:t> Electronics</a:t>
+            </a:r>
+            <a:endParaRPr lang="de-DE" b="1" dirty="0"/>
+          </a:p>
+        </p:txBody>
+      </p:sp>
+      <p:cxnSp>
+        <p:nvCxnSpPr>
+          <p:cNvPr id="86" name="Gerade Verbindung mit Pfeil 85">
+            <a:extLst>
+              <a:ext uri="{FF2B5EF4-FFF2-40B4-BE49-F238E27FC236}">
+                <a16:creationId xmlns:a16="http://schemas.microsoft.com/office/drawing/2014/main" id="{81607B0B-4C52-B4D0-3831-A837B4707EE7}"/>
+              </a:ext>
+            </a:extLst>
+          </p:cNvPr>
+          <p:cNvCxnSpPr>
+            <a:cxnSpLocks/>
+            <a:stCxn id="85" idx="1"/>
+          </p:cNvCxnSpPr>
+          <p:nvPr/>
+        </p:nvCxnSpPr>
+        <p:spPr>
+          <a:xfrm flipH="1" flipV="1">
+            <a:off x="4813299" y="3312058"/>
+            <a:ext cx="900113" cy="226777"/>
+          </a:xfrm>
+          <a:prstGeom prst="straightConnector1">
+            <a:avLst/>
+          </a:prstGeom>
+          <a:ln w="38100">
+            <a:solidFill>
+              <a:srgbClr val="C00000"/>
+            </a:solidFill>
+            <a:tailEnd type="triangle"/>
+          </a:ln>
+          <a:effectLst/>
+          <a:scene3d>
+            <a:camera prst="orthographicFront"/>
+            <a:lightRig rig="threePt" dir="t"/>
+          </a:scene3d>
+          <a:sp3d contourW="12700">
+            <a:contourClr>
+              <a:schemeClr val="bg1"/>
+            </a:contourClr>
+          </a:sp3d>
+        </p:spPr>
+        <p:style>
+          <a:lnRef idx="2">
+            <a:schemeClr val="accent1"/>
+          </a:lnRef>
+          <a:fillRef idx="0">
+            <a:schemeClr val="accent1"/>
+          </a:fillRef>
+          <a:effectRef idx="1">
+            <a:schemeClr val="accent1"/>
+          </a:effectRef>
+          <a:fontRef idx="minor">
+            <a:schemeClr val="tx1"/>
+          </a:fontRef>
+        </p:style>
+      </p:cxnSp>
     </p:spTree>
     <p:extLst>
       <p:ext uri="{BB962C8B-B14F-4D97-AF65-F5344CB8AC3E}">
-        <p14:creationId xmlns:p14="http://schemas.microsoft.com/office/powerpoint/2010/main" val="1458408649"/>
+        <p14:creationId xmlns:p14="http://schemas.microsoft.com/office/powerpoint/2010/main" val="2716759492"/>
+      </p:ext>
+    </p:extLst>
+  </p:cSld>
+  <p:clrMapOvr>
+    <a:masterClrMapping/>
+  </p:clrMapOvr>
+</p:sld>
+</file>
+
+<file path=ppt/slides/slide18.xml><?xml version="1.0" encoding="utf-8"?>
+<p:sld xmlns:a="http://schemas.openxmlformats.org/drawingml/2006/main" xmlns:r="http://schemas.openxmlformats.org/officeDocument/2006/relationships" xmlns:p="http://schemas.openxmlformats.org/presentationml/2006/main">
+  <p:cSld>
+    <p:spTree>
+      <p:nvGrpSpPr>
+        <p:cNvPr id="1" name="">
+          <a:extLst>
+            <a:ext uri="{FF2B5EF4-FFF2-40B4-BE49-F238E27FC236}">
+              <a16:creationId xmlns:a16="http://schemas.microsoft.com/office/drawing/2014/main" id="{CCCE6A1A-AC5B-5265-214C-3AE25A0F929A}"/>
+            </a:ext>
+          </a:extLst>
+        </p:cNvPr>
+        <p:cNvGrpSpPr/>
+        <p:nvPr/>
+      </p:nvGrpSpPr>
+      <p:grpSpPr>
+        <a:xfrm>
+          <a:off x="0" y="0"/>
+          <a:ext cx="0" cy="0"/>
+          <a:chOff x="0" y="0"/>
+          <a:chExt cx="0" cy="0"/>
+        </a:xfrm>
+      </p:grpSpPr>
+      <p:sp>
+        <p:nvSpPr>
+          <p:cNvPr id="4" name="Textfeld 3">
+            <a:extLst>
+              <a:ext uri="{FF2B5EF4-FFF2-40B4-BE49-F238E27FC236}">
+                <a16:creationId xmlns:a16="http://schemas.microsoft.com/office/drawing/2014/main" id="{C8BCD42F-3E76-EF72-3D54-39D97CCF905C}"/>
+              </a:ext>
+            </a:extLst>
+          </p:cNvPr>
+          <p:cNvSpPr txBox="1"/>
+          <p:nvPr/>
+        </p:nvSpPr>
+        <p:spPr>
+          <a:xfrm>
+            <a:off x="1614311" y="1614919"/>
+            <a:ext cx="1397000" cy="680050"/>
+          </a:xfrm>
+          <a:prstGeom prst="rect">
+            <a:avLst/>
+          </a:prstGeom>
+        </p:spPr>
+        <p:style>
+          <a:lnRef idx="2">
+            <a:schemeClr val="dk1"/>
+          </a:lnRef>
+          <a:fillRef idx="1">
+            <a:schemeClr val="lt1"/>
+          </a:fillRef>
+          <a:effectRef idx="0">
+            <a:schemeClr val="dk1"/>
+          </a:effectRef>
+          <a:fontRef idx="minor">
+            <a:schemeClr val="dk1"/>
+          </a:fontRef>
+        </p:style>
+        <p:txBody>
+          <a:bodyPr wrap="square" rtlCol="0" anchor="ctr">
+            <a:noAutofit/>
+          </a:bodyPr>
+          <a:lstStyle/>
+          <a:p>
+            <a:pPr algn="ctr"/>
+            <a:r>
+              <a:rPr lang="de-AT" dirty="0"/>
+              <a:t>Strain </a:t>
+            </a:r>
+            <a:r>
+              <a:rPr lang="de-AT" dirty="0" err="1"/>
+              <a:t>Gauges</a:t>
+            </a:r>
+            <a:endParaRPr lang="de-DE" dirty="0"/>
+          </a:p>
+        </p:txBody>
+      </p:sp>
+      <p:sp>
+        <p:nvSpPr>
+          <p:cNvPr id="5" name="Textfeld 4">
+            <a:extLst>
+              <a:ext uri="{FF2B5EF4-FFF2-40B4-BE49-F238E27FC236}">
+                <a16:creationId xmlns:a16="http://schemas.microsoft.com/office/drawing/2014/main" id="{34DA1015-8426-183C-F5DC-A3CD0821A853}"/>
+              </a:ext>
+            </a:extLst>
+          </p:cNvPr>
+          <p:cNvSpPr txBox="1"/>
+          <p:nvPr/>
+        </p:nvSpPr>
+        <p:spPr>
+          <a:xfrm>
+            <a:off x="4074937" y="1383015"/>
+            <a:ext cx="1614664" cy="1131500"/>
+          </a:xfrm>
+          <a:prstGeom prst="rect">
+            <a:avLst/>
+          </a:prstGeom>
+        </p:spPr>
+        <p:style>
+          <a:lnRef idx="2">
+            <a:schemeClr val="dk1"/>
+          </a:lnRef>
+          <a:fillRef idx="1">
+            <a:schemeClr val="lt1"/>
+          </a:fillRef>
+          <a:effectRef idx="0">
+            <a:schemeClr val="dk1"/>
+          </a:effectRef>
+          <a:fontRef idx="minor">
+            <a:schemeClr val="dk1"/>
+          </a:fontRef>
+        </p:style>
+        <p:txBody>
+          <a:bodyPr wrap="square" rtlCol="0" anchor="ctr">
+            <a:noAutofit/>
+          </a:bodyPr>
+          <a:lstStyle/>
+          <a:p>
+            <a:pPr algn="ctr"/>
+            <a:r>
+              <a:rPr lang="de-AT" dirty="0" err="1"/>
+              <a:t>Deflection</a:t>
+            </a:r>
+            <a:r>
+              <a:rPr lang="de-AT" dirty="0"/>
+              <a:t> </a:t>
+            </a:r>
+            <a:r>
+              <a:rPr lang="de-AT" dirty="0" err="1"/>
+              <a:t>Readout</a:t>
+            </a:r>
+            <a:r>
+              <a:rPr lang="de-AT" dirty="0"/>
+              <a:t> Electronics</a:t>
+            </a:r>
+            <a:endParaRPr lang="de-DE" dirty="0"/>
+          </a:p>
+        </p:txBody>
+      </p:sp>
+      <p:cxnSp>
+        <p:nvCxnSpPr>
+          <p:cNvPr id="9" name="Gerade Verbindung mit Pfeil 8">
+            <a:extLst>
+              <a:ext uri="{FF2B5EF4-FFF2-40B4-BE49-F238E27FC236}">
+                <a16:creationId xmlns:a16="http://schemas.microsoft.com/office/drawing/2014/main" id="{7334E935-CAAD-47F0-AFD7-8F5CC69E2E23}"/>
+              </a:ext>
+            </a:extLst>
+          </p:cNvPr>
+          <p:cNvCxnSpPr>
+            <a:cxnSpLocks/>
+            <a:stCxn id="5" idx="3"/>
+            <a:endCxn id="10" idx="2"/>
+          </p:cNvCxnSpPr>
+          <p:nvPr/>
+        </p:nvCxnSpPr>
+        <p:spPr>
+          <a:xfrm>
+            <a:off x="5689601" y="1948765"/>
+            <a:ext cx="533399" cy="0"/>
+          </a:xfrm>
+          <a:prstGeom prst="straightConnector1">
+            <a:avLst/>
+          </a:prstGeom>
+          <a:ln>
+            <a:tailEnd type="triangle"/>
+          </a:ln>
+        </p:spPr>
+        <p:style>
+          <a:lnRef idx="2">
+            <a:schemeClr val="dk1"/>
+          </a:lnRef>
+          <a:fillRef idx="0">
+            <a:schemeClr val="dk1"/>
+          </a:fillRef>
+          <a:effectRef idx="1">
+            <a:schemeClr val="dk1"/>
+          </a:effectRef>
+          <a:fontRef idx="minor">
+            <a:schemeClr val="tx1"/>
+          </a:fontRef>
+        </p:style>
+      </p:cxnSp>
+      <p:sp>
+        <p:nvSpPr>
+          <p:cNvPr id="10" name="Ellipse 9">
+            <a:extLst>
+              <a:ext uri="{FF2B5EF4-FFF2-40B4-BE49-F238E27FC236}">
+                <a16:creationId xmlns:a16="http://schemas.microsoft.com/office/drawing/2014/main" id="{E4CBE72B-197A-2186-A1DC-EA67123AF808}"/>
+              </a:ext>
+            </a:extLst>
+          </p:cNvPr>
+          <p:cNvSpPr/>
+          <p:nvPr/>
+        </p:nvSpPr>
+        <p:spPr>
+          <a:xfrm>
+            <a:off x="6223000" y="1834465"/>
+            <a:ext cx="228600" cy="228600"/>
+          </a:xfrm>
+          <a:prstGeom prst="ellipse">
+            <a:avLst/>
+          </a:prstGeom>
+        </p:spPr>
+        <p:style>
+          <a:lnRef idx="2">
+            <a:schemeClr val="dk1"/>
+          </a:lnRef>
+          <a:fillRef idx="1">
+            <a:schemeClr val="lt1"/>
+          </a:fillRef>
+          <a:effectRef idx="0">
+            <a:schemeClr val="dk1"/>
+          </a:effectRef>
+          <a:fontRef idx="minor">
+            <a:schemeClr val="dk1"/>
+          </a:fontRef>
+        </p:style>
+        <p:txBody>
+          <a:bodyPr rtlCol="0" anchor="ctr"/>
+          <a:lstStyle/>
+          <a:p>
+            <a:pPr algn="ctr"/>
+            <a:endParaRPr lang="de-DE"/>
+          </a:p>
+        </p:txBody>
+      </p:sp>
+      <p:cxnSp>
+        <p:nvCxnSpPr>
+          <p:cNvPr id="11" name="Gerade Verbindung mit Pfeil 10">
+            <a:extLst>
+              <a:ext uri="{FF2B5EF4-FFF2-40B4-BE49-F238E27FC236}">
+                <a16:creationId xmlns:a16="http://schemas.microsoft.com/office/drawing/2014/main" id="{FA49D5D5-B06A-A010-112D-D5EEA5599892}"/>
+              </a:ext>
+            </a:extLst>
+          </p:cNvPr>
+          <p:cNvCxnSpPr>
+            <a:cxnSpLocks/>
+            <a:stCxn id="4" idx="3"/>
+            <a:endCxn id="5" idx="1"/>
+          </p:cNvCxnSpPr>
+          <p:nvPr/>
+        </p:nvCxnSpPr>
+        <p:spPr>
+          <a:xfrm flipV="1">
+            <a:off x="3011311" y="1948765"/>
+            <a:ext cx="1063626" cy="6179"/>
+          </a:xfrm>
+          <a:prstGeom prst="straightConnector1">
+            <a:avLst/>
+          </a:prstGeom>
+          <a:ln>
+            <a:tailEnd type="triangle"/>
+          </a:ln>
+        </p:spPr>
+        <p:style>
+          <a:lnRef idx="2">
+            <a:schemeClr val="dk1"/>
+          </a:lnRef>
+          <a:fillRef idx="0">
+            <a:schemeClr val="dk1"/>
+          </a:fillRef>
+          <a:effectRef idx="1">
+            <a:schemeClr val="dk1"/>
+          </a:effectRef>
+          <a:fontRef idx="minor">
+            <a:schemeClr val="tx1"/>
+          </a:fontRef>
+        </p:style>
+      </p:cxnSp>
+      <p:cxnSp>
+        <p:nvCxnSpPr>
+          <p:cNvPr id="18" name="Gerade Verbindung mit Pfeil 17">
+            <a:extLst>
+              <a:ext uri="{FF2B5EF4-FFF2-40B4-BE49-F238E27FC236}">
+                <a16:creationId xmlns:a16="http://schemas.microsoft.com/office/drawing/2014/main" id="{684DAABC-7577-47D8-B090-06BD5A62FE06}"/>
+              </a:ext>
+            </a:extLst>
+          </p:cNvPr>
+          <p:cNvCxnSpPr>
+            <a:endCxn id="10" idx="0"/>
+          </p:cNvCxnSpPr>
+          <p:nvPr/>
+        </p:nvCxnSpPr>
+        <p:spPr>
+          <a:xfrm>
+            <a:off x="6337300" y="1206500"/>
+            <a:ext cx="0" cy="627965"/>
+          </a:xfrm>
+          <a:prstGeom prst="straightConnector1">
+            <a:avLst/>
+          </a:prstGeom>
+          <a:ln>
+            <a:tailEnd type="triangle"/>
+          </a:ln>
+        </p:spPr>
+        <p:style>
+          <a:lnRef idx="2">
+            <a:schemeClr val="dk1"/>
+          </a:lnRef>
+          <a:fillRef idx="0">
+            <a:schemeClr val="dk1"/>
+          </a:fillRef>
+          <a:effectRef idx="1">
+            <a:schemeClr val="dk1"/>
+          </a:effectRef>
+          <a:fontRef idx="minor">
+            <a:schemeClr val="tx1"/>
+          </a:fontRef>
+        </p:style>
+      </p:cxnSp>
+      <p:sp>
+        <p:nvSpPr>
+          <p:cNvPr id="19" name="Rechteck 18">
+            <a:extLst>
+              <a:ext uri="{FF2B5EF4-FFF2-40B4-BE49-F238E27FC236}">
+                <a16:creationId xmlns:a16="http://schemas.microsoft.com/office/drawing/2014/main" id="{4DC00CC2-08A9-D69C-1C66-5D3D3F85BF73}"/>
+              </a:ext>
+            </a:extLst>
+          </p:cNvPr>
+          <p:cNvSpPr/>
+          <p:nvPr/>
+        </p:nvSpPr>
+        <p:spPr>
+          <a:xfrm>
+            <a:off x="5467352" y="370533"/>
+            <a:ext cx="1739895" cy="698499"/>
+          </a:xfrm>
+          <a:prstGeom prst="rect">
+            <a:avLst/>
+          </a:prstGeom>
+          <a:noFill/>
+          <a:ln>
+            <a:noFill/>
+          </a:ln>
+        </p:spPr>
+        <p:style>
+          <a:lnRef idx="0">
+            <a:scrgbClr r="0" g="0" b="0"/>
+          </a:lnRef>
+          <a:fillRef idx="0">
+            <a:scrgbClr r="0" g="0" b="0"/>
+          </a:fillRef>
+          <a:effectRef idx="0">
+            <a:scrgbClr r="0" g="0" b="0"/>
+          </a:effectRef>
+          <a:fontRef idx="minor">
+            <a:schemeClr val="dk1"/>
+          </a:fontRef>
+        </p:style>
+        <p:txBody>
+          <a:bodyPr rtlCol="0" anchor="ctr"/>
+          <a:lstStyle/>
+          <a:p>
+            <a:pPr algn="ctr"/>
+            <a:r>
+              <a:rPr lang="de-AT" dirty="0"/>
+              <a:t>Offset </a:t>
+            </a:r>
+            <a:r>
+              <a:rPr lang="de-AT" dirty="0" err="1"/>
+              <a:t>Compensation</a:t>
+            </a:r>
+            <a:endParaRPr lang="de-DE" dirty="0"/>
+          </a:p>
+        </p:txBody>
+      </p:sp>
+      <p:sp>
+        <p:nvSpPr>
+          <p:cNvPr id="20" name="Rechteck 19">
+            <a:extLst>
+              <a:ext uri="{FF2B5EF4-FFF2-40B4-BE49-F238E27FC236}">
+                <a16:creationId xmlns:a16="http://schemas.microsoft.com/office/drawing/2014/main" id="{D1E92E13-D54D-894C-B7BE-DD5C1E59573F}"/>
+              </a:ext>
+            </a:extLst>
+          </p:cNvPr>
+          <p:cNvSpPr/>
+          <p:nvPr/>
+        </p:nvSpPr>
+        <p:spPr>
+          <a:xfrm>
+            <a:off x="5854701" y="1596470"/>
+            <a:ext cx="431799" cy="313983"/>
+          </a:xfrm>
+          <a:prstGeom prst="rect">
+            <a:avLst/>
+          </a:prstGeom>
+          <a:noFill/>
+          <a:ln>
+            <a:noFill/>
+          </a:ln>
+        </p:spPr>
+        <p:style>
+          <a:lnRef idx="0">
+            <a:scrgbClr r="0" g="0" b="0"/>
+          </a:lnRef>
+          <a:fillRef idx="0">
+            <a:scrgbClr r="0" g="0" b="0"/>
+          </a:fillRef>
+          <a:effectRef idx="0">
+            <a:scrgbClr r="0" g="0" b="0"/>
+          </a:effectRef>
+          <a:fontRef idx="minor">
+            <a:schemeClr val="dk1"/>
+          </a:fontRef>
+        </p:style>
+        <p:txBody>
+          <a:bodyPr rtlCol="0" anchor="ctr"/>
+          <a:lstStyle/>
+          <a:p>
+            <a:pPr algn="ctr"/>
+            <a:r>
+              <a:rPr lang="de-AT" dirty="0"/>
+              <a:t>+</a:t>
+            </a:r>
+            <a:endParaRPr lang="de-DE" dirty="0"/>
+          </a:p>
+        </p:txBody>
+      </p:sp>
+      <p:cxnSp>
+        <p:nvCxnSpPr>
+          <p:cNvPr id="23" name="Gerade Verbindung mit Pfeil 22">
+            <a:extLst>
+              <a:ext uri="{FF2B5EF4-FFF2-40B4-BE49-F238E27FC236}">
+                <a16:creationId xmlns:a16="http://schemas.microsoft.com/office/drawing/2014/main" id="{B9C74BE1-323D-9DD9-B402-33ACC43557EF}"/>
+              </a:ext>
+            </a:extLst>
+          </p:cNvPr>
+          <p:cNvCxnSpPr>
+            <a:cxnSpLocks/>
+            <a:stCxn id="10" idx="6"/>
+          </p:cNvCxnSpPr>
+          <p:nvPr/>
+        </p:nvCxnSpPr>
+        <p:spPr>
+          <a:xfrm>
+            <a:off x="6451600" y="1948765"/>
+            <a:ext cx="2406647" cy="0"/>
+          </a:xfrm>
+          <a:prstGeom prst="straightConnector1">
+            <a:avLst/>
+          </a:prstGeom>
+          <a:ln>
+            <a:tailEnd type="triangle"/>
+          </a:ln>
+        </p:spPr>
+        <p:style>
+          <a:lnRef idx="2">
+            <a:schemeClr val="dk1"/>
+          </a:lnRef>
+          <a:fillRef idx="0">
+            <a:schemeClr val="dk1"/>
+          </a:fillRef>
+          <a:effectRef idx="1">
+            <a:schemeClr val="dk1"/>
+          </a:effectRef>
+          <a:fontRef idx="minor">
+            <a:schemeClr val="tx1"/>
+          </a:fontRef>
+        </p:style>
+      </p:cxnSp>
+      <p:sp>
+        <p:nvSpPr>
+          <p:cNvPr id="26" name="Rechteck 25">
+            <a:extLst>
+              <a:ext uri="{FF2B5EF4-FFF2-40B4-BE49-F238E27FC236}">
+                <a16:creationId xmlns:a16="http://schemas.microsoft.com/office/drawing/2014/main" id="{FAED96D9-D435-A112-9AA8-74950B3DEE57}"/>
+              </a:ext>
+            </a:extLst>
+          </p:cNvPr>
+          <p:cNvSpPr/>
+          <p:nvPr/>
+        </p:nvSpPr>
+        <p:spPr>
+          <a:xfrm>
+            <a:off x="8896352" y="1596470"/>
+            <a:ext cx="1739895" cy="698499"/>
+          </a:xfrm>
+          <a:prstGeom prst="rect">
+            <a:avLst/>
+          </a:prstGeom>
+          <a:noFill/>
+          <a:ln>
+            <a:noFill/>
+          </a:ln>
+        </p:spPr>
+        <p:style>
+          <a:lnRef idx="0">
+            <a:scrgbClr r="0" g="0" b="0"/>
+          </a:lnRef>
+          <a:fillRef idx="0">
+            <a:scrgbClr r="0" g="0" b="0"/>
+          </a:fillRef>
+          <a:effectRef idx="0">
+            <a:scrgbClr r="0" g="0" b="0"/>
+          </a:effectRef>
+          <a:fontRef idx="minor">
+            <a:schemeClr val="dk1"/>
+          </a:fontRef>
+        </p:style>
+        <p:txBody>
+          <a:bodyPr rtlCol="0" anchor="ctr"/>
+          <a:lstStyle/>
+          <a:p>
+            <a:pPr algn="ctr"/>
+            <a:r>
+              <a:rPr lang="de-AT" dirty="0"/>
+              <a:t>Sensor Output</a:t>
+            </a:r>
+            <a:endParaRPr lang="de-DE" dirty="0"/>
+          </a:p>
+        </p:txBody>
+      </p:sp>
+      <p:sp>
+        <p:nvSpPr>
+          <p:cNvPr id="48" name="Textfeld 47">
+            <a:extLst>
+              <a:ext uri="{FF2B5EF4-FFF2-40B4-BE49-F238E27FC236}">
+                <a16:creationId xmlns:a16="http://schemas.microsoft.com/office/drawing/2014/main" id="{A4E58016-B4D0-00DB-40A1-6F7DD4E21565}"/>
+              </a:ext>
+            </a:extLst>
+          </p:cNvPr>
+          <p:cNvSpPr txBox="1"/>
+          <p:nvPr/>
+        </p:nvSpPr>
+        <p:spPr>
+          <a:xfrm>
+            <a:off x="4183769" y="4286761"/>
+            <a:ext cx="1397000" cy="698499"/>
+          </a:xfrm>
+          <a:prstGeom prst="rect">
+            <a:avLst/>
+          </a:prstGeom>
+        </p:spPr>
+        <p:style>
+          <a:lnRef idx="2">
+            <a:schemeClr val="dk1"/>
+          </a:lnRef>
+          <a:fillRef idx="1">
+            <a:schemeClr val="lt1"/>
+          </a:fillRef>
+          <a:effectRef idx="0">
+            <a:schemeClr val="dk1"/>
+          </a:effectRef>
+          <a:fontRef idx="minor">
+            <a:schemeClr val="dk1"/>
+          </a:fontRef>
+        </p:style>
+        <p:txBody>
+          <a:bodyPr wrap="square" rtlCol="0" anchor="ctr">
+            <a:noAutofit/>
+          </a:bodyPr>
+          <a:lstStyle/>
+          <a:p>
+            <a:pPr algn="ctr"/>
+            <a:r>
+              <a:rPr lang="de-AT" dirty="0"/>
+              <a:t>Lorentz </a:t>
+            </a:r>
+            <a:r>
+              <a:rPr lang="de-AT" dirty="0" err="1"/>
+              <a:t>Actuator</a:t>
+            </a:r>
+            <a:endParaRPr lang="de-DE" dirty="0"/>
+          </a:p>
+        </p:txBody>
+      </p:sp>
+      <p:sp>
+        <p:nvSpPr>
+          <p:cNvPr id="49" name="Ellipse 48">
+            <a:extLst>
+              <a:ext uri="{FF2B5EF4-FFF2-40B4-BE49-F238E27FC236}">
+                <a16:creationId xmlns:a16="http://schemas.microsoft.com/office/drawing/2014/main" id="{AAE1D6D1-2A9F-9134-DB0D-3810B8F13B69}"/>
+              </a:ext>
+            </a:extLst>
+          </p:cNvPr>
+          <p:cNvSpPr/>
+          <p:nvPr/>
+        </p:nvSpPr>
+        <p:spPr>
+          <a:xfrm>
+            <a:off x="6292850" y="4523643"/>
+            <a:ext cx="228600" cy="228600"/>
+          </a:xfrm>
+          <a:prstGeom prst="ellipse">
+            <a:avLst/>
+          </a:prstGeom>
+        </p:spPr>
+        <p:style>
+          <a:lnRef idx="2">
+            <a:schemeClr val="dk1"/>
+          </a:lnRef>
+          <a:fillRef idx="1">
+            <a:schemeClr val="lt1"/>
+          </a:fillRef>
+          <a:effectRef idx="0">
+            <a:schemeClr val="dk1"/>
+          </a:effectRef>
+          <a:fontRef idx="minor">
+            <a:schemeClr val="dk1"/>
+          </a:fontRef>
+        </p:style>
+        <p:txBody>
+          <a:bodyPr rtlCol="0" anchor="ctr"/>
+          <a:lstStyle/>
+          <a:p>
+            <a:pPr algn="ctr"/>
+            <a:endParaRPr lang="de-DE"/>
+          </a:p>
+        </p:txBody>
+      </p:sp>
+      <p:sp>
+        <p:nvSpPr>
+          <p:cNvPr id="51" name="Rechteck 50">
+            <a:extLst>
+              <a:ext uri="{FF2B5EF4-FFF2-40B4-BE49-F238E27FC236}">
+                <a16:creationId xmlns:a16="http://schemas.microsoft.com/office/drawing/2014/main" id="{2A0C561F-28BC-6B5A-7759-BEC4A54FF85B}"/>
+              </a:ext>
+            </a:extLst>
+          </p:cNvPr>
+          <p:cNvSpPr/>
+          <p:nvPr/>
+        </p:nvSpPr>
+        <p:spPr>
+          <a:xfrm>
+            <a:off x="6407150" y="4707618"/>
+            <a:ext cx="431799" cy="313983"/>
+          </a:xfrm>
+          <a:prstGeom prst="rect">
+            <a:avLst/>
+          </a:prstGeom>
+          <a:noFill/>
+          <a:ln>
+            <a:noFill/>
+          </a:ln>
+        </p:spPr>
+        <p:style>
+          <a:lnRef idx="0">
+            <a:scrgbClr r="0" g="0" b="0"/>
+          </a:lnRef>
+          <a:fillRef idx="0">
+            <a:scrgbClr r="0" g="0" b="0"/>
+          </a:fillRef>
+          <a:effectRef idx="0">
+            <a:scrgbClr r="0" g="0" b="0"/>
+          </a:effectRef>
+          <a:fontRef idx="minor">
+            <a:schemeClr val="dk1"/>
+          </a:fontRef>
+        </p:style>
+        <p:txBody>
+          <a:bodyPr rtlCol="0" anchor="ctr"/>
+          <a:lstStyle/>
+          <a:p>
+            <a:pPr algn="ctr"/>
+            <a:r>
+              <a:rPr lang="de-AT" dirty="0"/>
+              <a:t>+</a:t>
+            </a:r>
+            <a:endParaRPr lang="de-DE" dirty="0"/>
+          </a:p>
+        </p:txBody>
+      </p:sp>
+      <p:cxnSp>
+        <p:nvCxnSpPr>
+          <p:cNvPr id="54" name="Gerade Verbindung mit Pfeil 53">
+            <a:extLst>
+              <a:ext uri="{FF2B5EF4-FFF2-40B4-BE49-F238E27FC236}">
+                <a16:creationId xmlns:a16="http://schemas.microsoft.com/office/drawing/2014/main" id="{28578B15-4E55-AE91-19FB-2B9370E77724}"/>
+              </a:ext>
+            </a:extLst>
+          </p:cNvPr>
+          <p:cNvCxnSpPr>
+            <a:cxnSpLocks/>
+            <a:stCxn id="49" idx="2"/>
+            <a:endCxn id="48" idx="3"/>
+          </p:cNvCxnSpPr>
+          <p:nvPr/>
+        </p:nvCxnSpPr>
+        <p:spPr>
+          <a:xfrm flipH="1" flipV="1">
+            <a:off x="5580769" y="4636011"/>
+            <a:ext cx="712081" cy="1932"/>
+          </a:xfrm>
+          <a:prstGeom prst="straightConnector1">
+            <a:avLst/>
+          </a:prstGeom>
+          <a:ln>
+            <a:tailEnd type="triangle"/>
+          </a:ln>
+        </p:spPr>
+        <p:style>
+          <a:lnRef idx="2">
+            <a:schemeClr val="dk1"/>
+          </a:lnRef>
+          <a:fillRef idx="0">
+            <a:schemeClr val="dk1"/>
+          </a:fillRef>
+          <a:effectRef idx="1">
+            <a:schemeClr val="dk1"/>
+          </a:effectRef>
+          <a:fontRef idx="minor">
+            <a:schemeClr val="tx1"/>
+          </a:fontRef>
+        </p:style>
+      </p:cxnSp>
+      <p:cxnSp>
+        <p:nvCxnSpPr>
+          <p:cNvPr id="57" name="Gerade Verbindung mit Pfeil 56">
+            <a:extLst>
+              <a:ext uri="{FF2B5EF4-FFF2-40B4-BE49-F238E27FC236}">
+                <a16:creationId xmlns:a16="http://schemas.microsoft.com/office/drawing/2014/main" id="{9527F770-298A-E618-3E92-A287C10C3DB4}"/>
+              </a:ext>
+            </a:extLst>
+          </p:cNvPr>
+          <p:cNvCxnSpPr>
+            <a:cxnSpLocks/>
+            <a:endCxn id="49" idx="4"/>
+          </p:cNvCxnSpPr>
+          <p:nvPr/>
+        </p:nvCxnSpPr>
+        <p:spPr>
+          <a:xfrm flipV="1">
+            <a:off x="6407150" y="4752243"/>
+            <a:ext cx="0" cy="509287"/>
+          </a:xfrm>
+          <a:prstGeom prst="straightConnector1">
+            <a:avLst/>
+          </a:prstGeom>
+          <a:ln>
+            <a:tailEnd type="triangle"/>
+          </a:ln>
+        </p:spPr>
+        <p:style>
+          <a:lnRef idx="2">
+            <a:schemeClr val="dk1"/>
+          </a:lnRef>
+          <a:fillRef idx="0">
+            <a:schemeClr val="dk1"/>
+          </a:fillRef>
+          <a:effectRef idx="1">
+            <a:schemeClr val="dk1"/>
+          </a:effectRef>
+          <a:fontRef idx="minor">
+            <a:schemeClr val="tx1"/>
+          </a:fontRef>
+        </p:style>
+      </p:cxnSp>
+      <p:sp>
+        <p:nvSpPr>
+          <p:cNvPr id="60" name="Rechteck 59">
+            <a:extLst>
+              <a:ext uri="{FF2B5EF4-FFF2-40B4-BE49-F238E27FC236}">
+                <a16:creationId xmlns:a16="http://schemas.microsoft.com/office/drawing/2014/main" id="{6EA1D2E7-77D0-F864-D77E-F7A444EF4A07}"/>
+              </a:ext>
+            </a:extLst>
+          </p:cNvPr>
+          <p:cNvSpPr/>
+          <p:nvPr/>
+        </p:nvSpPr>
+        <p:spPr>
+          <a:xfrm>
+            <a:off x="5537202" y="5235949"/>
+            <a:ext cx="1739895" cy="698499"/>
+          </a:xfrm>
+          <a:prstGeom prst="rect">
+            <a:avLst/>
+          </a:prstGeom>
+          <a:noFill/>
+          <a:ln>
+            <a:noFill/>
+          </a:ln>
+        </p:spPr>
+        <p:style>
+          <a:lnRef idx="0">
+            <a:scrgbClr r="0" g="0" b="0"/>
+          </a:lnRef>
+          <a:fillRef idx="0">
+            <a:scrgbClr r="0" g="0" b="0"/>
+          </a:fillRef>
+          <a:effectRef idx="0">
+            <a:scrgbClr r="0" g="0" b="0"/>
+          </a:effectRef>
+          <a:fontRef idx="minor">
+            <a:schemeClr val="dk1"/>
+          </a:fontRef>
+        </p:style>
+        <p:txBody>
+          <a:bodyPr rtlCol="0" anchor="ctr"/>
+          <a:lstStyle/>
+          <a:p>
+            <a:pPr algn="ctr"/>
+            <a:r>
+              <a:rPr lang="de-AT" dirty="0" err="1"/>
+              <a:t>Actuation</a:t>
+            </a:r>
+            <a:r>
+              <a:rPr lang="de-AT" dirty="0"/>
+              <a:t> Signal</a:t>
+            </a:r>
+            <a:endParaRPr lang="de-DE" dirty="0"/>
+          </a:p>
+        </p:txBody>
+      </p:sp>
+      <p:sp>
+        <p:nvSpPr>
+          <p:cNvPr id="62" name="Ellipse 61">
+            <a:extLst>
+              <a:ext uri="{FF2B5EF4-FFF2-40B4-BE49-F238E27FC236}">
+                <a16:creationId xmlns:a16="http://schemas.microsoft.com/office/drawing/2014/main" id="{07D87E08-FB4A-8D07-ACDB-0255992BCA1C}"/>
+              </a:ext>
+            </a:extLst>
+          </p:cNvPr>
+          <p:cNvSpPr/>
+          <p:nvPr/>
+        </p:nvSpPr>
+        <p:spPr>
+          <a:xfrm>
+            <a:off x="2196226" y="4523643"/>
+            <a:ext cx="228600" cy="228600"/>
+          </a:xfrm>
+          <a:prstGeom prst="ellipse">
+            <a:avLst/>
+          </a:prstGeom>
+        </p:spPr>
+        <p:style>
+          <a:lnRef idx="2">
+            <a:schemeClr val="dk1"/>
+          </a:lnRef>
+          <a:fillRef idx="1">
+            <a:schemeClr val="lt1"/>
+          </a:fillRef>
+          <a:effectRef idx="0">
+            <a:schemeClr val="dk1"/>
+          </a:effectRef>
+          <a:fontRef idx="minor">
+            <a:schemeClr val="dk1"/>
+          </a:fontRef>
+        </p:style>
+        <p:txBody>
+          <a:bodyPr rtlCol="0" anchor="ctr"/>
+          <a:lstStyle/>
+          <a:p>
+            <a:pPr algn="ctr"/>
+            <a:endParaRPr lang="de-DE"/>
+          </a:p>
+        </p:txBody>
+      </p:sp>
+      <p:sp>
+        <p:nvSpPr>
+          <p:cNvPr id="63" name="Rechteck 62">
+            <a:extLst>
+              <a:ext uri="{FF2B5EF4-FFF2-40B4-BE49-F238E27FC236}">
+                <a16:creationId xmlns:a16="http://schemas.microsoft.com/office/drawing/2014/main" id="{AD0FC6FB-5680-3449-EAF3-61C03B65455C}"/>
+              </a:ext>
+            </a:extLst>
+          </p:cNvPr>
+          <p:cNvSpPr/>
+          <p:nvPr/>
+        </p:nvSpPr>
+        <p:spPr>
+          <a:xfrm>
+            <a:off x="2310526" y="4707618"/>
+            <a:ext cx="431799" cy="313983"/>
+          </a:xfrm>
+          <a:prstGeom prst="rect">
+            <a:avLst/>
+          </a:prstGeom>
+          <a:noFill/>
+          <a:ln>
+            <a:noFill/>
+          </a:ln>
+        </p:spPr>
+        <p:style>
+          <a:lnRef idx="0">
+            <a:scrgbClr r="0" g="0" b="0"/>
+          </a:lnRef>
+          <a:fillRef idx="0">
+            <a:scrgbClr r="0" g="0" b="0"/>
+          </a:fillRef>
+          <a:effectRef idx="0">
+            <a:scrgbClr r="0" g="0" b="0"/>
+          </a:effectRef>
+          <a:fontRef idx="minor">
+            <a:schemeClr val="dk1"/>
+          </a:fontRef>
+        </p:style>
+        <p:txBody>
+          <a:bodyPr rtlCol="0" anchor="ctr"/>
+          <a:lstStyle/>
+          <a:p>
+            <a:pPr algn="ctr"/>
+            <a:r>
+              <a:rPr lang="de-AT" dirty="0"/>
+              <a:t>+</a:t>
+            </a:r>
+            <a:endParaRPr lang="de-DE" dirty="0"/>
+          </a:p>
+        </p:txBody>
+      </p:sp>
+      <p:cxnSp>
+        <p:nvCxnSpPr>
+          <p:cNvPr id="64" name="Gerade Verbindung mit Pfeil 63">
+            <a:extLst>
+              <a:ext uri="{FF2B5EF4-FFF2-40B4-BE49-F238E27FC236}">
+                <a16:creationId xmlns:a16="http://schemas.microsoft.com/office/drawing/2014/main" id="{C787D00A-3B99-B9CF-9C9D-6E785B0AEE4D}"/>
+              </a:ext>
+            </a:extLst>
+          </p:cNvPr>
+          <p:cNvCxnSpPr>
+            <a:cxnSpLocks/>
+            <a:endCxn id="62" idx="4"/>
+          </p:cNvCxnSpPr>
+          <p:nvPr/>
+        </p:nvCxnSpPr>
+        <p:spPr>
+          <a:xfrm flipV="1">
+            <a:off x="2310526" y="4752243"/>
+            <a:ext cx="0" cy="509287"/>
+          </a:xfrm>
+          <a:prstGeom prst="straightConnector1">
+            <a:avLst/>
+          </a:prstGeom>
+          <a:ln>
+            <a:tailEnd type="triangle"/>
+          </a:ln>
+        </p:spPr>
+        <p:style>
+          <a:lnRef idx="2">
+            <a:schemeClr val="dk1"/>
+          </a:lnRef>
+          <a:fillRef idx="0">
+            <a:schemeClr val="dk1"/>
+          </a:fillRef>
+          <a:effectRef idx="1">
+            <a:schemeClr val="dk1"/>
+          </a:effectRef>
+          <a:fontRef idx="minor">
+            <a:schemeClr val="tx1"/>
+          </a:fontRef>
+        </p:style>
+      </p:cxnSp>
+      <p:sp>
+        <p:nvSpPr>
+          <p:cNvPr id="65" name="Rechteck 64">
+            <a:extLst>
+              <a:ext uri="{FF2B5EF4-FFF2-40B4-BE49-F238E27FC236}">
+                <a16:creationId xmlns:a16="http://schemas.microsoft.com/office/drawing/2014/main" id="{D88B2510-A2FA-C50B-3357-BAB9FC8A9263}"/>
+              </a:ext>
+            </a:extLst>
+          </p:cNvPr>
+          <p:cNvSpPr/>
+          <p:nvPr/>
+        </p:nvSpPr>
+        <p:spPr>
+          <a:xfrm>
+            <a:off x="1440578" y="5235949"/>
+            <a:ext cx="1739895" cy="698499"/>
+          </a:xfrm>
+          <a:prstGeom prst="rect">
+            <a:avLst/>
+          </a:prstGeom>
+          <a:noFill/>
+          <a:ln>
+            <a:noFill/>
+          </a:ln>
+        </p:spPr>
+        <p:style>
+          <a:lnRef idx="0">
+            <a:scrgbClr r="0" g="0" b="0"/>
+          </a:lnRef>
+          <a:fillRef idx="0">
+            <a:scrgbClr r="0" g="0" b="0"/>
+          </a:fillRef>
+          <a:effectRef idx="0">
+            <a:scrgbClr r="0" g="0" b="0"/>
+          </a:effectRef>
+          <a:fontRef idx="minor">
+            <a:schemeClr val="dk1"/>
+          </a:fontRef>
+        </p:style>
+        <p:txBody>
+          <a:bodyPr rtlCol="0" anchor="ctr"/>
+          <a:lstStyle/>
+          <a:p>
+            <a:pPr algn="ctr"/>
+            <a:r>
+              <a:rPr lang="de-AT" dirty="0"/>
+              <a:t>Sample </a:t>
+            </a:r>
+            <a:r>
+              <a:rPr lang="de-AT" dirty="0" err="1"/>
+              <a:t>Topography</a:t>
+            </a:r>
+            <a:endParaRPr lang="de-DE" dirty="0"/>
+          </a:p>
+        </p:txBody>
+      </p:sp>
+      <p:cxnSp>
+        <p:nvCxnSpPr>
+          <p:cNvPr id="66" name="Gerade Verbindung mit Pfeil 65">
+            <a:extLst>
+              <a:ext uri="{FF2B5EF4-FFF2-40B4-BE49-F238E27FC236}">
+                <a16:creationId xmlns:a16="http://schemas.microsoft.com/office/drawing/2014/main" id="{EC9694CD-D243-3677-493C-BE2D8EC826E0}"/>
+              </a:ext>
+            </a:extLst>
+          </p:cNvPr>
+          <p:cNvCxnSpPr>
+            <a:cxnSpLocks/>
+            <a:stCxn id="48" idx="1"/>
+            <a:endCxn id="62" idx="6"/>
+          </p:cNvCxnSpPr>
+          <p:nvPr/>
+        </p:nvCxnSpPr>
+        <p:spPr>
+          <a:xfrm flipH="1">
+            <a:off x="2424826" y="4636011"/>
+            <a:ext cx="1758943" cy="1932"/>
+          </a:xfrm>
+          <a:prstGeom prst="straightConnector1">
+            <a:avLst/>
+          </a:prstGeom>
+          <a:ln>
+            <a:tailEnd type="triangle"/>
+          </a:ln>
+        </p:spPr>
+        <p:style>
+          <a:lnRef idx="2">
+            <a:schemeClr val="dk1"/>
+          </a:lnRef>
+          <a:fillRef idx="0">
+            <a:schemeClr val="dk1"/>
+          </a:fillRef>
+          <a:effectRef idx="1">
+            <a:schemeClr val="dk1"/>
+          </a:effectRef>
+          <a:fontRef idx="minor">
+            <a:schemeClr val="tx1"/>
+          </a:fontRef>
+        </p:style>
+      </p:cxnSp>
+      <p:cxnSp>
+        <p:nvCxnSpPr>
+          <p:cNvPr id="69" name="Gerade Verbindung mit Pfeil 68">
+            <a:extLst>
+              <a:ext uri="{FF2B5EF4-FFF2-40B4-BE49-F238E27FC236}">
+                <a16:creationId xmlns:a16="http://schemas.microsoft.com/office/drawing/2014/main" id="{6367600C-5843-40DA-FBB6-4F4E2ABDF0AA}"/>
+              </a:ext>
+            </a:extLst>
+          </p:cNvPr>
+          <p:cNvCxnSpPr>
+            <a:cxnSpLocks/>
+            <a:stCxn id="62" idx="0"/>
+            <a:endCxn id="73" idx="2"/>
+          </p:cNvCxnSpPr>
+          <p:nvPr/>
+        </p:nvCxnSpPr>
+        <p:spPr>
+          <a:xfrm flipV="1">
+            <a:off x="2310526" y="3816261"/>
+            <a:ext cx="2285" cy="707382"/>
+          </a:xfrm>
+          <a:prstGeom prst="straightConnector1">
+            <a:avLst/>
+          </a:prstGeom>
+          <a:ln>
+            <a:tailEnd type="triangle"/>
+          </a:ln>
+        </p:spPr>
+        <p:style>
+          <a:lnRef idx="2">
+            <a:schemeClr val="dk1"/>
+          </a:lnRef>
+          <a:fillRef idx="0">
+            <a:schemeClr val="dk1"/>
+          </a:fillRef>
+          <a:effectRef idx="1">
+            <a:schemeClr val="dk1"/>
+          </a:effectRef>
+          <a:fontRef idx="minor">
+            <a:schemeClr val="tx1"/>
+          </a:fontRef>
+        </p:style>
+      </p:cxnSp>
+      <p:sp>
+        <p:nvSpPr>
+          <p:cNvPr id="73" name="Textfeld 72">
+            <a:extLst>
+              <a:ext uri="{FF2B5EF4-FFF2-40B4-BE49-F238E27FC236}">
+                <a16:creationId xmlns:a16="http://schemas.microsoft.com/office/drawing/2014/main" id="{7BE08399-579B-B1EA-9AD3-F88E551D642A}"/>
+              </a:ext>
+            </a:extLst>
+          </p:cNvPr>
+          <p:cNvSpPr txBox="1"/>
+          <p:nvPr/>
+        </p:nvSpPr>
+        <p:spPr>
+          <a:xfrm>
+            <a:off x="1614311" y="3117762"/>
+            <a:ext cx="1397000" cy="698499"/>
+          </a:xfrm>
+          <a:prstGeom prst="rect">
+            <a:avLst/>
+          </a:prstGeom>
+        </p:spPr>
+        <p:style>
+          <a:lnRef idx="2">
+            <a:schemeClr val="dk1"/>
+          </a:lnRef>
+          <a:fillRef idx="1">
+            <a:schemeClr val="lt1"/>
+          </a:fillRef>
+          <a:effectRef idx="0">
+            <a:schemeClr val="dk1"/>
+          </a:effectRef>
+          <a:fontRef idx="minor">
+            <a:schemeClr val="dk1"/>
+          </a:fontRef>
+        </p:style>
+        <p:txBody>
+          <a:bodyPr wrap="square" rtlCol="0" anchor="ctr">
+            <a:noAutofit/>
+          </a:bodyPr>
+          <a:lstStyle/>
+          <a:p>
+            <a:pPr algn="ctr"/>
+            <a:r>
+              <a:rPr lang="de-AT" dirty="0"/>
+              <a:t>AFM </a:t>
+            </a:r>
+            <a:r>
+              <a:rPr lang="de-AT" dirty="0" err="1"/>
+              <a:t>Mechanics</a:t>
+            </a:r>
+            <a:endParaRPr lang="de-DE" dirty="0"/>
+          </a:p>
+        </p:txBody>
+      </p:sp>
+      <p:cxnSp>
+        <p:nvCxnSpPr>
+          <p:cNvPr id="75" name="Gerade Verbindung mit Pfeil 74">
+            <a:extLst>
+              <a:ext uri="{FF2B5EF4-FFF2-40B4-BE49-F238E27FC236}">
+                <a16:creationId xmlns:a16="http://schemas.microsoft.com/office/drawing/2014/main" id="{0A8B2B30-0CD9-F45E-ED12-7E9B6E7739FA}"/>
+              </a:ext>
+            </a:extLst>
+          </p:cNvPr>
+          <p:cNvCxnSpPr>
+            <a:cxnSpLocks/>
+            <a:stCxn id="73" idx="0"/>
+            <a:endCxn id="4" idx="2"/>
+          </p:cNvCxnSpPr>
+          <p:nvPr/>
+        </p:nvCxnSpPr>
+        <p:spPr>
+          <a:xfrm flipV="1">
+            <a:off x="2312811" y="2294969"/>
+            <a:ext cx="0" cy="822793"/>
+          </a:xfrm>
+          <a:prstGeom prst="straightConnector1">
+            <a:avLst/>
+          </a:prstGeom>
+          <a:ln>
+            <a:tailEnd type="triangle"/>
+          </a:ln>
+        </p:spPr>
+        <p:style>
+          <a:lnRef idx="2">
+            <a:schemeClr val="dk1"/>
+          </a:lnRef>
+          <a:fillRef idx="0">
+            <a:schemeClr val="dk1"/>
+          </a:fillRef>
+          <a:effectRef idx="1">
+            <a:schemeClr val="dk1"/>
+          </a:effectRef>
+          <a:fontRef idx="minor">
+            <a:schemeClr val="tx1"/>
+          </a:fontRef>
+        </p:style>
+      </p:cxnSp>
+      <p:sp>
+        <p:nvSpPr>
+          <p:cNvPr id="2" name="Rechteck 1">
+            <a:extLst>
+              <a:ext uri="{FF2B5EF4-FFF2-40B4-BE49-F238E27FC236}">
+                <a16:creationId xmlns:a16="http://schemas.microsoft.com/office/drawing/2014/main" id="{4632CD97-7E98-9861-634D-2B225B297703}"/>
+              </a:ext>
+            </a:extLst>
+          </p:cNvPr>
+          <p:cNvSpPr/>
+          <p:nvPr/>
+        </p:nvSpPr>
+        <p:spPr>
+          <a:xfrm>
+            <a:off x="6337299" y="3917131"/>
+            <a:ext cx="1739895" cy="698499"/>
+          </a:xfrm>
+          <a:prstGeom prst="rect">
+            <a:avLst/>
+          </a:prstGeom>
+          <a:noFill/>
+          <a:ln>
+            <a:noFill/>
+          </a:ln>
+        </p:spPr>
+        <p:style>
+          <a:lnRef idx="0">
+            <a:scrgbClr r="0" g="0" b="0"/>
+          </a:lnRef>
+          <a:fillRef idx="0">
+            <a:scrgbClr r="0" g="0" b="0"/>
+          </a:fillRef>
+          <a:effectRef idx="0">
+            <a:scrgbClr r="0" g="0" b="0"/>
+          </a:effectRef>
+          <a:fontRef idx="minor">
+            <a:schemeClr val="dk1"/>
+          </a:fontRef>
+        </p:style>
+        <p:txBody>
+          <a:bodyPr rtlCol="0" anchor="ctr"/>
+          <a:lstStyle/>
+          <a:p>
+            <a:pPr algn="ctr"/>
+            <a:r>
+              <a:rPr lang="de-AT" dirty="0" err="1">
+                <a:solidFill>
+                  <a:srgbClr val="FF0000"/>
+                </a:solidFill>
+              </a:rPr>
+              <a:t>Adder</a:t>
+            </a:r>
+            <a:endParaRPr lang="de-DE" dirty="0">
+              <a:solidFill>
+                <a:srgbClr val="FF0000"/>
+              </a:solidFill>
+            </a:endParaRPr>
+          </a:p>
+        </p:txBody>
+      </p:sp>
+      <p:sp>
+        <p:nvSpPr>
+          <p:cNvPr id="3" name="Rechteck 2">
+            <a:extLst>
+              <a:ext uri="{FF2B5EF4-FFF2-40B4-BE49-F238E27FC236}">
+                <a16:creationId xmlns:a16="http://schemas.microsoft.com/office/drawing/2014/main" id="{A0D5CE90-EF02-0922-F6E3-992E10357C67}"/>
+              </a:ext>
+            </a:extLst>
+          </p:cNvPr>
+          <p:cNvSpPr/>
+          <p:nvPr/>
+        </p:nvSpPr>
+        <p:spPr>
+          <a:xfrm>
+            <a:off x="5547606" y="5788968"/>
+            <a:ext cx="1739895" cy="698499"/>
+          </a:xfrm>
+          <a:prstGeom prst="rect">
+            <a:avLst/>
+          </a:prstGeom>
+          <a:noFill/>
+          <a:ln>
+            <a:noFill/>
+          </a:ln>
+        </p:spPr>
+        <p:style>
+          <a:lnRef idx="0">
+            <a:scrgbClr r="0" g="0" b="0"/>
+          </a:lnRef>
+          <a:fillRef idx="0">
+            <a:scrgbClr r="0" g="0" b="0"/>
+          </a:fillRef>
+          <a:effectRef idx="0">
+            <a:scrgbClr r="0" g="0" b="0"/>
+          </a:effectRef>
+          <a:fontRef idx="minor">
+            <a:schemeClr val="dk1"/>
+          </a:fontRef>
+        </p:style>
+        <p:txBody>
+          <a:bodyPr rtlCol="0" anchor="ctr"/>
+          <a:lstStyle/>
+          <a:p>
+            <a:pPr algn="ctr"/>
+            <a:r>
+              <a:rPr lang="de-AT" dirty="0">
+                <a:solidFill>
+                  <a:srgbClr val="FF0000"/>
+                </a:solidFill>
+              </a:rPr>
+              <a:t>20.4 Hz</a:t>
+            </a:r>
+            <a:endParaRPr lang="de-DE" dirty="0">
+              <a:solidFill>
+                <a:srgbClr val="FF0000"/>
+              </a:solidFill>
+            </a:endParaRPr>
+          </a:p>
+        </p:txBody>
+      </p:sp>
+    </p:spTree>
+    <p:extLst>
+      <p:ext uri="{BB962C8B-B14F-4D97-AF65-F5344CB8AC3E}">
+        <p14:creationId xmlns:p14="http://schemas.microsoft.com/office/powerpoint/2010/main" val="2476621160"/>
       </p:ext>
     </p:extLst>
   </p:cSld>

--- a/AFM/report/images/drawings.pptx
+++ b/AFM/report/images/drawings.pptx
@@ -23,6 +23,10 @@
     <p:sldId id="272" r:id="rId17"/>
     <p:sldId id="277" r:id="rId18"/>
     <p:sldId id="278" r:id="rId19"/>
+    <p:sldId id="279" r:id="rId20"/>
+    <p:sldId id="280" r:id="rId21"/>
+    <p:sldId id="281" r:id="rId22"/>
+    <p:sldId id="282" r:id="rId23"/>
   </p:sldIdLst>
   <p:sldSz cx="12192000" cy="6858000"/>
   <p:notesSz cx="6858000" cy="9144000"/>
@@ -276,7 +280,7 @@
           <a:p>
             <a:fld id="{AB72CF78-164A-411D-9EBB-74859D5ACE2A}" type="datetimeFigureOut">
               <a:rPr lang="de-DE" smtClean="0"/>
-              <a:t>01.05.2026</a:t>
+              <a:t>05.06.2026</a:t>
             </a:fld>
             <a:endParaRPr lang="de-DE"/>
           </a:p>
@@ -474,7 +478,7 @@
           <a:p>
             <a:fld id="{AB72CF78-164A-411D-9EBB-74859D5ACE2A}" type="datetimeFigureOut">
               <a:rPr lang="de-DE" smtClean="0"/>
-              <a:t>01.05.2026</a:t>
+              <a:t>05.06.2026</a:t>
             </a:fld>
             <a:endParaRPr lang="de-DE"/>
           </a:p>
@@ -682,7 +686,7 @@
           <a:p>
             <a:fld id="{AB72CF78-164A-411D-9EBB-74859D5ACE2A}" type="datetimeFigureOut">
               <a:rPr lang="de-DE" smtClean="0"/>
-              <a:t>01.05.2026</a:t>
+              <a:t>05.06.2026</a:t>
             </a:fld>
             <a:endParaRPr lang="de-DE"/>
           </a:p>
@@ -880,7 +884,7 @@
           <a:p>
             <a:fld id="{AB72CF78-164A-411D-9EBB-74859D5ACE2A}" type="datetimeFigureOut">
               <a:rPr lang="de-DE" smtClean="0"/>
-              <a:t>01.05.2026</a:t>
+              <a:t>05.06.2026</a:t>
             </a:fld>
             <a:endParaRPr lang="de-DE"/>
           </a:p>
@@ -1155,7 +1159,7 @@
           <a:p>
             <a:fld id="{AB72CF78-164A-411D-9EBB-74859D5ACE2A}" type="datetimeFigureOut">
               <a:rPr lang="de-DE" smtClean="0"/>
-              <a:t>01.05.2026</a:t>
+              <a:t>05.06.2026</a:t>
             </a:fld>
             <a:endParaRPr lang="de-DE"/>
           </a:p>
@@ -1420,7 +1424,7 @@
           <a:p>
             <a:fld id="{AB72CF78-164A-411D-9EBB-74859D5ACE2A}" type="datetimeFigureOut">
               <a:rPr lang="de-DE" smtClean="0"/>
-              <a:t>01.05.2026</a:t>
+              <a:t>05.06.2026</a:t>
             </a:fld>
             <a:endParaRPr lang="de-DE"/>
           </a:p>
@@ -1832,7 +1836,7 @@
           <a:p>
             <a:fld id="{AB72CF78-164A-411D-9EBB-74859D5ACE2A}" type="datetimeFigureOut">
               <a:rPr lang="de-DE" smtClean="0"/>
-              <a:t>01.05.2026</a:t>
+              <a:t>05.06.2026</a:t>
             </a:fld>
             <a:endParaRPr lang="de-DE"/>
           </a:p>
@@ -1973,7 +1977,7 @@
           <a:p>
             <a:fld id="{AB72CF78-164A-411D-9EBB-74859D5ACE2A}" type="datetimeFigureOut">
               <a:rPr lang="de-DE" smtClean="0"/>
-              <a:t>01.05.2026</a:t>
+              <a:t>05.06.2026</a:t>
             </a:fld>
             <a:endParaRPr lang="de-DE"/>
           </a:p>
@@ -2086,7 +2090,7 @@
           <a:p>
             <a:fld id="{AB72CF78-164A-411D-9EBB-74859D5ACE2A}" type="datetimeFigureOut">
               <a:rPr lang="de-DE" smtClean="0"/>
-              <a:t>01.05.2026</a:t>
+              <a:t>05.06.2026</a:t>
             </a:fld>
             <a:endParaRPr lang="de-DE"/>
           </a:p>
@@ -2397,7 +2401,7 @@
           <a:p>
             <a:fld id="{AB72CF78-164A-411D-9EBB-74859D5ACE2A}" type="datetimeFigureOut">
               <a:rPr lang="de-DE" smtClean="0"/>
-              <a:t>01.05.2026</a:t>
+              <a:t>05.06.2026</a:t>
             </a:fld>
             <a:endParaRPr lang="de-DE"/>
           </a:p>
@@ -2685,7 +2689,7 @@
           <a:p>
             <a:fld id="{AB72CF78-164A-411D-9EBB-74859D5ACE2A}" type="datetimeFigureOut">
               <a:rPr lang="de-DE" smtClean="0"/>
-              <a:t>01.05.2026</a:t>
+              <a:t>05.06.2026</a:t>
             </a:fld>
             <a:endParaRPr lang="de-DE"/>
           </a:p>
@@ -2926,7 +2930,7 @@
           <a:p>
             <a:fld id="{AB72CF78-164A-411D-9EBB-74859D5ACE2A}" type="datetimeFigureOut">
               <a:rPr lang="de-DE" smtClean="0"/>
-              <a:t>01.05.2026</a:t>
+              <a:t>05.06.2026</a:t>
             </a:fld>
             <a:endParaRPr lang="de-DE"/>
           </a:p>
@@ -12722,8 +12726,8 @@
           </a:fontRef>
         </p:style>
       </p:cxnSp>
-      <mc:AlternateContent xmlns:mc="http://schemas.openxmlformats.org/markup-compatibility/2006">
-        <mc:Choice xmlns:a14="http://schemas.microsoft.com/office/drawing/2010/main" Requires="a14">
+      <mc:AlternateContent xmlns:mc="http://schemas.openxmlformats.org/markup-compatibility/2006" xmlns:a14="http://schemas.microsoft.com/office/drawing/2010/main">
+        <mc:Choice Requires="a14">
           <p:sp>
             <p:nvSpPr>
               <p:cNvPr id="7" name="Rechteck 6">
@@ -12825,7 +12829,7 @@
             </p:txBody>
           </p:sp>
         </mc:Choice>
-        <mc:Fallback>
+        <mc:Fallback xmlns="">
           <p:sp>
             <p:nvSpPr>
               <p:cNvPr id="7" name="Rechteck 6">
@@ -12957,8 +12961,8 @@
           </a:fontRef>
         </p:style>
       </p:cxnSp>
-      <mc:AlternateContent xmlns:mc="http://schemas.openxmlformats.org/markup-compatibility/2006">
-        <mc:Choice xmlns:a14="http://schemas.microsoft.com/office/drawing/2010/main" Requires="a14">
+      <mc:AlternateContent xmlns:mc="http://schemas.openxmlformats.org/markup-compatibility/2006" xmlns:a14="http://schemas.microsoft.com/office/drawing/2010/main">
+        <mc:Choice Requires="a14">
           <p:sp>
             <p:nvSpPr>
               <p:cNvPr id="11" name="Rechteck 10">
@@ -13060,7 +13064,7 @@
             </p:txBody>
           </p:sp>
         </mc:Choice>
-        <mc:Fallback>
+        <mc:Fallback xmlns="">
           <p:sp>
             <p:nvSpPr>
               <p:cNvPr id="11" name="Rechteck 10">
@@ -13204,8 +13208,8 @@
           </a:p>
         </p:txBody>
       </p:sp>
-      <mc:AlternateContent xmlns:mc="http://schemas.openxmlformats.org/markup-compatibility/2006">
-        <mc:Choice xmlns:a14="http://schemas.microsoft.com/office/drawing/2010/main" Requires="a14">
+      <mc:AlternateContent xmlns:mc="http://schemas.openxmlformats.org/markup-compatibility/2006" xmlns:a14="http://schemas.microsoft.com/office/drawing/2010/main">
+        <mc:Choice Requires="a14">
           <p:sp>
             <p:nvSpPr>
               <p:cNvPr id="32" name="Rechteck 31">
@@ -13319,7 +13323,7 @@
             </p:txBody>
           </p:sp>
         </mc:Choice>
-        <mc:Fallback>
+        <mc:Fallback xmlns="">
           <p:sp>
             <p:nvSpPr>
               <p:cNvPr id="32" name="Rechteck 31">
@@ -13619,8 +13623,8 @@
           </a:p>
         </p:txBody>
       </p:sp>
-      <mc:AlternateContent xmlns:mc="http://schemas.openxmlformats.org/markup-compatibility/2006">
-        <mc:Choice xmlns:a14="http://schemas.microsoft.com/office/drawing/2010/main" Requires="a14">
+      <mc:AlternateContent xmlns:mc="http://schemas.openxmlformats.org/markup-compatibility/2006" xmlns:a14="http://schemas.microsoft.com/office/drawing/2010/main">
+        <mc:Choice Requires="a14">
           <p:sp>
             <p:nvSpPr>
               <p:cNvPr id="38" name="Rechteck 37">
@@ -13692,7 +13696,7 @@
             </p:txBody>
           </p:sp>
         </mc:Choice>
-        <mc:Fallback>
+        <mc:Fallback xmlns="">
           <p:sp>
             <p:nvSpPr>
               <p:cNvPr id="38" name="Rechteck 37">
@@ -15972,7 +15976,7 @@
         </p:nvSpPr>
         <p:spPr>
           <a:xfrm>
-            <a:off x="6337299" y="3917131"/>
+            <a:off x="5537201" y="3881328"/>
             <a:ext cx="1739895" cy="698499"/>
           </a:xfrm>
           <a:prstGeom prst="rect">
@@ -16082,6 +16086,1389 @@
     <p:extLst>
       <p:ext uri="{BB962C8B-B14F-4D97-AF65-F5344CB8AC3E}">
         <p14:creationId xmlns:p14="http://schemas.microsoft.com/office/powerpoint/2010/main" val="2476621160"/>
+      </p:ext>
+    </p:extLst>
+  </p:cSld>
+  <p:clrMapOvr>
+    <a:masterClrMapping/>
+  </p:clrMapOvr>
+</p:sld>
+</file>
+
+<file path=ppt/slides/slide19.xml><?xml version="1.0" encoding="utf-8"?>
+<p:sld xmlns:a="http://schemas.openxmlformats.org/drawingml/2006/main" xmlns:r="http://schemas.openxmlformats.org/officeDocument/2006/relationships" xmlns:p="http://schemas.openxmlformats.org/presentationml/2006/main">
+  <p:cSld>
+    <p:spTree>
+      <p:nvGrpSpPr>
+        <p:cNvPr id="1" name="">
+          <a:extLst>
+            <a:ext uri="{FF2B5EF4-FFF2-40B4-BE49-F238E27FC236}">
+              <a16:creationId xmlns:a16="http://schemas.microsoft.com/office/drawing/2014/main" id="{CC13F141-33FB-3FAE-6967-B639B8640DC4}"/>
+            </a:ext>
+          </a:extLst>
+        </p:cNvPr>
+        <p:cNvGrpSpPr/>
+        <p:nvPr/>
+      </p:nvGrpSpPr>
+      <p:grpSpPr>
+        <a:xfrm>
+          <a:off x="0" y="0"/>
+          <a:ext cx="0" cy="0"/>
+          <a:chOff x="0" y="0"/>
+          <a:chExt cx="0" cy="0"/>
+        </a:xfrm>
+      </p:grpSpPr>
+      <p:pic>
+        <p:nvPicPr>
+          <p:cNvPr id="5" name="Grafik 4">
+            <a:extLst>
+              <a:ext uri="{FF2B5EF4-FFF2-40B4-BE49-F238E27FC236}">
+                <a16:creationId xmlns:a16="http://schemas.microsoft.com/office/drawing/2014/main" id="{C2980C57-9EBD-6EAA-EBBF-2B475A409CA1}"/>
+              </a:ext>
+            </a:extLst>
+          </p:cNvPr>
+          <p:cNvPicPr>
+            <a:picLocks noChangeAspect="1"/>
+          </p:cNvPicPr>
+          <p:nvPr/>
+        </p:nvPicPr>
+        <p:blipFill>
+          <a:blip r:embed="rId2">
+            <a:extLst>
+              <a:ext uri="{28A0092B-C50C-407E-A947-70E740481C1C}">
+                <a14:useLocalDpi xmlns:a14="http://schemas.microsoft.com/office/drawing/2010/main" val="0"/>
+              </a:ext>
+            </a:extLst>
+          </a:blip>
+          <a:stretch>
+            <a:fillRect/>
+          </a:stretch>
+        </p:blipFill>
+        <p:spPr>
+          <a:xfrm>
+            <a:off x="1524000" y="0"/>
+            <a:ext cx="9144000" cy="6858000"/>
+          </a:xfrm>
+          <a:prstGeom prst="rect">
+            <a:avLst/>
+          </a:prstGeom>
+          <a:noFill/>
+          <a:ln>
+            <a:noFill/>
+          </a:ln>
+        </p:spPr>
+      </p:pic>
+      <p:cxnSp>
+        <p:nvCxnSpPr>
+          <p:cNvPr id="61" name="Gerade Verbindung mit Pfeil 60">
+            <a:extLst>
+              <a:ext uri="{FF2B5EF4-FFF2-40B4-BE49-F238E27FC236}">
+                <a16:creationId xmlns:a16="http://schemas.microsoft.com/office/drawing/2014/main" id="{C58EA3F4-A318-D318-E06F-54731032BBEA}"/>
+              </a:ext>
+            </a:extLst>
+          </p:cNvPr>
+          <p:cNvCxnSpPr>
+            <a:cxnSpLocks/>
+          </p:cNvCxnSpPr>
+          <p:nvPr/>
+        </p:nvCxnSpPr>
+        <p:spPr>
+          <a:xfrm>
+            <a:off x="2292350" y="2063816"/>
+            <a:ext cx="0" cy="1561338"/>
+          </a:xfrm>
+          <a:prstGeom prst="straightConnector1">
+            <a:avLst/>
+          </a:prstGeom>
+          <a:ln w="38100">
+            <a:solidFill>
+              <a:srgbClr val="C00000"/>
+            </a:solidFill>
+            <a:tailEnd type="triangle"/>
+          </a:ln>
+          <a:scene3d>
+            <a:camera prst="orthographicFront"/>
+            <a:lightRig rig="threePt" dir="t"/>
+          </a:scene3d>
+          <a:sp3d contourW="12700">
+            <a:contourClr>
+              <a:schemeClr val="bg1"/>
+            </a:contourClr>
+          </a:sp3d>
+        </p:spPr>
+        <p:style>
+          <a:lnRef idx="2">
+            <a:schemeClr val="accent1"/>
+          </a:lnRef>
+          <a:fillRef idx="0">
+            <a:schemeClr val="accent1"/>
+          </a:fillRef>
+          <a:effectRef idx="1">
+            <a:schemeClr val="accent1"/>
+          </a:effectRef>
+          <a:fontRef idx="minor">
+            <a:schemeClr val="tx1"/>
+          </a:fontRef>
+        </p:style>
+      </p:cxnSp>
+      <p:cxnSp>
+        <p:nvCxnSpPr>
+          <p:cNvPr id="65" name="Gerade Verbindung mit Pfeil 64">
+            <a:extLst>
+              <a:ext uri="{FF2B5EF4-FFF2-40B4-BE49-F238E27FC236}">
+                <a16:creationId xmlns:a16="http://schemas.microsoft.com/office/drawing/2014/main" id="{05256268-B8A1-EAAC-2B7D-B73A1C95DEF3}"/>
+              </a:ext>
+            </a:extLst>
+          </p:cNvPr>
+          <p:cNvCxnSpPr>
+            <a:cxnSpLocks/>
+          </p:cNvCxnSpPr>
+          <p:nvPr/>
+        </p:nvCxnSpPr>
+        <p:spPr>
+          <a:xfrm>
+            <a:off x="2003425" y="993078"/>
+            <a:ext cx="0" cy="2398672"/>
+          </a:xfrm>
+          <a:prstGeom prst="straightConnector1">
+            <a:avLst/>
+          </a:prstGeom>
+          <a:ln w="38100">
+            <a:solidFill>
+              <a:srgbClr val="C00000"/>
+            </a:solidFill>
+            <a:tailEnd type="triangle"/>
+          </a:ln>
+          <a:scene3d>
+            <a:camera prst="orthographicFront"/>
+            <a:lightRig rig="threePt" dir="t"/>
+          </a:scene3d>
+          <a:sp3d contourW="12700">
+            <a:contourClr>
+              <a:schemeClr val="bg1"/>
+            </a:contourClr>
+          </a:sp3d>
+        </p:spPr>
+        <p:style>
+          <a:lnRef idx="2">
+            <a:schemeClr val="accent1"/>
+          </a:lnRef>
+          <a:fillRef idx="0">
+            <a:schemeClr val="accent1"/>
+          </a:fillRef>
+          <a:effectRef idx="1">
+            <a:schemeClr val="accent1"/>
+          </a:effectRef>
+          <a:fontRef idx="minor">
+            <a:schemeClr val="tx1"/>
+          </a:fontRef>
+        </p:style>
+      </p:cxnSp>
+      <p:sp>
+        <p:nvSpPr>
+          <p:cNvPr id="6" name="Rechteck 5">
+            <a:extLst>
+              <a:ext uri="{FF2B5EF4-FFF2-40B4-BE49-F238E27FC236}">
+                <a16:creationId xmlns:a16="http://schemas.microsoft.com/office/drawing/2014/main" id="{5717B811-B47B-32AD-AC1A-6555B8AF032F}"/>
+              </a:ext>
+            </a:extLst>
+          </p:cNvPr>
+          <p:cNvSpPr/>
+          <p:nvPr/>
+        </p:nvSpPr>
+        <p:spPr>
+          <a:xfrm>
+            <a:off x="2616200" y="2334444"/>
+            <a:ext cx="1727200" cy="369332"/>
+          </a:xfrm>
+          <a:prstGeom prst="rect">
+            <a:avLst/>
+          </a:prstGeom>
+          <a:solidFill>
+            <a:srgbClr val="C00000"/>
+          </a:solidFill>
+          <a:ln>
+            <a:solidFill>
+              <a:srgbClr val="C00000"/>
+            </a:solidFill>
+          </a:ln>
+        </p:spPr>
+        <p:style>
+          <a:lnRef idx="0">
+            <a:scrgbClr r="0" g="0" b="0"/>
+          </a:lnRef>
+          <a:fillRef idx="0">
+            <a:scrgbClr r="0" g="0" b="0"/>
+          </a:fillRef>
+          <a:effectRef idx="0">
+            <a:scrgbClr r="0" g="0" b="0"/>
+          </a:effectRef>
+          <a:fontRef idx="minor">
+            <a:schemeClr val="lt1"/>
+          </a:fontRef>
+        </p:style>
+        <p:txBody>
+          <a:bodyPr rtlCol="0" anchor="ctr">
+            <a:spAutoFit/>
+          </a:bodyPr>
+          <a:lstStyle/>
+          <a:p>
+            <a:pPr algn="ctr"/>
+            <a:r>
+              <a:rPr lang="de-AT" b="1" dirty="0"/>
+              <a:t>Strain </a:t>
+            </a:r>
+            <a:r>
+              <a:rPr lang="de-AT" b="1" dirty="0" err="1"/>
+              <a:t>Gauges</a:t>
+            </a:r>
+            <a:endParaRPr lang="de-DE" b="1" dirty="0"/>
+          </a:p>
+        </p:txBody>
+      </p:sp>
+      <p:cxnSp>
+        <p:nvCxnSpPr>
+          <p:cNvPr id="8" name="Gerade Verbindung mit Pfeil 7">
+            <a:extLst>
+              <a:ext uri="{FF2B5EF4-FFF2-40B4-BE49-F238E27FC236}">
+                <a16:creationId xmlns:a16="http://schemas.microsoft.com/office/drawing/2014/main" id="{74E0E35D-8ADC-0FBE-12E5-39E09248D37C}"/>
+              </a:ext>
+            </a:extLst>
+          </p:cNvPr>
+          <p:cNvCxnSpPr>
+            <a:cxnSpLocks/>
+          </p:cNvCxnSpPr>
+          <p:nvPr/>
+        </p:nvCxnSpPr>
+        <p:spPr>
+          <a:xfrm>
+            <a:off x="2692400" y="2703776"/>
+            <a:ext cx="0" cy="864924"/>
+          </a:xfrm>
+          <a:prstGeom prst="straightConnector1">
+            <a:avLst/>
+          </a:prstGeom>
+          <a:ln w="38100">
+            <a:solidFill>
+              <a:srgbClr val="C00000"/>
+            </a:solidFill>
+            <a:tailEnd type="triangle"/>
+          </a:ln>
+          <a:scene3d>
+            <a:camera prst="orthographicFront"/>
+            <a:lightRig rig="threePt" dir="t"/>
+          </a:scene3d>
+          <a:sp3d contourW="12700">
+            <a:contourClr>
+              <a:schemeClr val="bg1"/>
+            </a:contourClr>
+          </a:sp3d>
+        </p:spPr>
+        <p:style>
+          <a:lnRef idx="2">
+            <a:schemeClr val="accent1"/>
+          </a:lnRef>
+          <a:fillRef idx="0">
+            <a:schemeClr val="accent1"/>
+          </a:fillRef>
+          <a:effectRef idx="1">
+            <a:schemeClr val="accent1"/>
+          </a:effectRef>
+          <a:fontRef idx="minor">
+            <a:schemeClr val="tx1"/>
+          </a:fontRef>
+        </p:style>
+      </p:cxnSp>
+      <p:sp>
+        <p:nvSpPr>
+          <p:cNvPr id="12" name="Rechteck 11">
+            <a:extLst>
+              <a:ext uri="{FF2B5EF4-FFF2-40B4-BE49-F238E27FC236}">
+                <a16:creationId xmlns:a16="http://schemas.microsoft.com/office/drawing/2014/main" id="{38E9E1EA-3980-C1E4-8142-B90FB12108C7}"/>
+              </a:ext>
+            </a:extLst>
+          </p:cNvPr>
+          <p:cNvSpPr/>
+          <p:nvPr/>
+        </p:nvSpPr>
+        <p:spPr>
+          <a:xfrm>
+            <a:off x="2260600" y="4581184"/>
+            <a:ext cx="1168400" cy="646331"/>
+          </a:xfrm>
+          <a:prstGeom prst="rect">
+            <a:avLst/>
+          </a:prstGeom>
+          <a:solidFill>
+            <a:srgbClr val="C00000"/>
+          </a:solidFill>
+          <a:ln>
+            <a:solidFill>
+              <a:srgbClr val="C00000"/>
+            </a:solidFill>
+          </a:ln>
+        </p:spPr>
+        <p:style>
+          <a:lnRef idx="0">
+            <a:scrgbClr r="0" g="0" b="0"/>
+          </a:lnRef>
+          <a:fillRef idx="0">
+            <a:scrgbClr r="0" g="0" b="0"/>
+          </a:fillRef>
+          <a:effectRef idx="0">
+            <a:scrgbClr r="0" g="0" b="0"/>
+          </a:effectRef>
+          <a:fontRef idx="minor">
+            <a:schemeClr val="lt1"/>
+          </a:fontRef>
+        </p:style>
+        <p:txBody>
+          <a:bodyPr wrap="square" rtlCol="0" anchor="ctr">
+            <a:spAutoFit/>
+          </a:bodyPr>
+          <a:lstStyle/>
+          <a:p>
+            <a:pPr algn="ctr"/>
+            <a:r>
+              <a:rPr lang="de-AT" b="1" dirty="0"/>
+              <a:t>Lorentz </a:t>
+            </a:r>
+            <a:r>
+              <a:rPr lang="de-AT" b="1" dirty="0" err="1"/>
+              <a:t>Actuator</a:t>
+            </a:r>
+            <a:endParaRPr lang="de-DE" b="1" dirty="0"/>
+          </a:p>
+        </p:txBody>
+      </p:sp>
+      <p:cxnSp>
+        <p:nvCxnSpPr>
+          <p:cNvPr id="13" name="Gerade Verbindung mit Pfeil 12">
+            <a:extLst>
+              <a:ext uri="{FF2B5EF4-FFF2-40B4-BE49-F238E27FC236}">
+                <a16:creationId xmlns:a16="http://schemas.microsoft.com/office/drawing/2014/main" id="{E2B47A33-DB8B-2F6A-E192-7802DFCCAB7F}"/>
+              </a:ext>
+            </a:extLst>
+          </p:cNvPr>
+          <p:cNvCxnSpPr>
+            <a:cxnSpLocks/>
+            <a:stCxn id="12" idx="0"/>
+          </p:cNvCxnSpPr>
+          <p:nvPr/>
+        </p:nvCxnSpPr>
+        <p:spPr>
+          <a:xfrm flipV="1">
+            <a:off x="2844800" y="3810000"/>
+            <a:ext cx="219472" cy="771184"/>
+          </a:xfrm>
+          <a:prstGeom prst="straightConnector1">
+            <a:avLst/>
+          </a:prstGeom>
+          <a:ln w="38100">
+            <a:solidFill>
+              <a:srgbClr val="C00000"/>
+            </a:solidFill>
+            <a:tailEnd type="triangle"/>
+          </a:ln>
+          <a:scene3d>
+            <a:camera prst="orthographicFront"/>
+            <a:lightRig rig="threePt" dir="t"/>
+          </a:scene3d>
+          <a:sp3d contourW="12700">
+            <a:contourClr>
+              <a:schemeClr val="bg1"/>
+            </a:contourClr>
+          </a:sp3d>
+        </p:spPr>
+        <p:style>
+          <a:lnRef idx="2">
+            <a:schemeClr val="accent1"/>
+          </a:lnRef>
+          <a:fillRef idx="0">
+            <a:schemeClr val="accent1"/>
+          </a:fillRef>
+          <a:effectRef idx="1">
+            <a:schemeClr val="accent1"/>
+          </a:effectRef>
+          <a:fontRef idx="minor">
+            <a:schemeClr val="tx1"/>
+          </a:fontRef>
+        </p:style>
+      </p:cxnSp>
+      <p:sp>
+        <p:nvSpPr>
+          <p:cNvPr id="19" name="Rechteck 18">
+            <a:extLst>
+              <a:ext uri="{FF2B5EF4-FFF2-40B4-BE49-F238E27FC236}">
+                <a16:creationId xmlns:a16="http://schemas.microsoft.com/office/drawing/2014/main" id="{76C23129-37AE-43FC-C57C-DA265261FE0F}"/>
+              </a:ext>
+            </a:extLst>
+          </p:cNvPr>
+          <p:cNvSpPr/>
+          <p:nvPr/>
+        </p:nvSpPr>
+        <p:spPr>
+          <a:xfrm>
+            <a:off x="1739900" y="5422469"/>
+            <a:ext cx="2540000" cy="1200329"/>
+          </a:xfrm>
+          <a:prstGeom prst="rect">
+            <a:avLst/>
+          </a:prstGeom>
+          <a:solidFill>
+            <a:srgbClr val="C00000"/>
+          </a:solidFill>
+          <a:ln>
+            <a:solidFill>
+              <a:srgbClr val="C00000"/>
+            </a:solidFill>
+          </a:ln>
+        </p:spPr>
+        <p:style>
+          <a:lnRef idx="0">
+            <a:scrgbClr r="0" g="0" b="0"/>
+          </a:lnRef>
+          <a:fillRef idx="0">
+            <a:scrgbClr r="0" g="0" b="0"/>
+          </a:fillRef>
+          <a:effectRef idx="0">
+            <a:scrgbClr r="0" g="0" b="0"/>
+          </a:effectRef>
+          <a:fontRef idx="minor">
+            <a:schemeClr val="lt1"/>
+          </a:fontRef>
+        </p:style>
+        <p:txBody>
+          <a:bodyPr wrap="square" rtlCol="0" anchor="ctr">
+            <a:spAutoFit/>
+          </a:bodyPr>
+          <a:lstStyle/>
+          <a:p>
+            <a:pPr algn="ctr"/>
+            <a:r>
+              <a:rPr lang="de-AT" b="1" dirty="0" err="1"/>
+              <a:t>Deflection</a:t>
+            </a:r>
+            <a:r>
+              <a:rPr lang="de-AT" b="1" dirty="0"/>
+              <a:t> </a:t>
+            </a:r>
+            <a:r>
+              <a:rPr lang="de-AT" b="1" dirty="0" err="1"/>
+              <a:t>Readout</a:t>
+            </a:r>
+            <a:r>
+              <a:rPr lang="de-AT" b="1" dirty="0"/>
+              <a:t> Electronics,</a:t>
+            </a:r>
+          </a:p>
+          <a:p>
+            <a:pPr algn="ctr"/>
+            <a:r>
+              <a:rPr lang="de-AT" b="1" dirty="0"/>
+              <a:t>Offset </a:t>
+            </a:r>
+            <a:r>
+              <a:rPr lang="de-AT" b="1" dirty="0" err="1"/>
+              <a:t>Compensation</a:t>
+            </a:r>
+            <a:r>
+              <a:rPr lang="de-AT" b="1" dirty="0"/>
+              <a:t> Potentiometer</a:t>
+            </a:r>
+            <a:endParaRPr lang="de-DE" b="1" dirty="0"/>
+          </a:p>
+        </p:txBody>
+      </p:sp>
+      <p:cxnSp>
+        <p:nvCxnSpPr>
+          <p:cNvPr id="20" name="Gerade Verbindung mit Pfeil 19">
+            <a:extLst>
+              <a:ext uri="{FF2B5EF4-FFF2-40B4-BE49-F238E27FC236}">
+                <a16:creationId xmlns:a16="http://schemas.microsoft.com/office/drawing/2014/main" id="{177E34F9-4D22-5449-2DC3-6C62F1A0336A}"/>
+              </a:ext>
+            </a:extLst>
+          </p:cNvPr>
+          <p:cNvCxnSpPr>
+            <a:cxnSpLocks/>
+            <a:stCxn id="37" idx="0"/>
+          </p:cNvCxnSpPr>
+          <p:nvPr/>
+        </p:nvCxnSpPr>
+        <p:spPr>
+          <a:xfrm flipH="1" flipV="1">
+            <a:off x="4213225" y="4172419"/>
+            <a:ext cx="1514475" cy="1774993"/>
+          </a:xfrm>
+          <a:prstGeom prst="straightConnector1">
+            <a:avLst/>
+          </a:prstGeom>
+          <a:ln w="38100">
+            <a:solidFill>
+              <a:srgbClr val="C00000"/>
+            </a:solidFill>
+            <a:tailEnd type="triangle"/>
+          </a:ln>
+          <a:scene3d>
+            <a:camera prst="orthographicFront"/>
+            <a:lightRig rig="threePt" dir="t"/>
+          </a:scene3d>
+          <a:sp3d contourW="12700">
+            <a:contourClr>
+              <a:schemeClr val="bg1"/>
+            </a:contourClr>
+          </a:sp3d>
+        </p:spPr>
+        <p:style>
+          <a:lnRef idx="2">
+            <a:schemeClr val="accent1"/>
+          </a:lnRef>
+          <a:fillRef idx="0">
+            <a:schemeClr val="accent1"/>
+          </a:fillRef>
+          <a:effectRef idx="1">
+            <a:schemeClr val="accent1"/>
+          </a:effectRef>
+          <a:fontRef idx="minor">
+            <a:schemeClr val="tx1"/>
+          </a:fontRef>
+        </p:style>
+      </p:cxnSp>
+      <p:sp>
+        <p:nvSpPr>
+          <p:cNvPr id="24" name="Rechteck 23">
+            <a:extLst>
+              <a:ext uri="{FF2B5EF4-FFF2-40B4-BE49-F238E27FC236}">
+                <a16:creationId xmlns:a16="http://schemas.microsoft.com/office/drawing/2014/main" id="{1EBDB653-A001-D369-6E13-BA2621411B03}"/>
+              </a:ext>
+            </a:extLst>
+          </p:cNvPr>
+          <p:cNvSpPr/>
+          <p:nvPr/>
+        </p:nvSpPr>
+        <p:spPr>
+          <a:xfrm>
+            <a:off x="5861050" y="4209618"/>
+            <a:ext cx="1066800" cy="923330"/>
+          </a:xfrm>
+          <a:prstGeom prst="rect">
+            <a:avLst/>
+          </a:prstGeom>
+          <a:solidFill>
+            <a:srgbClr val="C00000"/>
+          </a:solidFill>
+          <a:ln>
+            <a:solidFill>
+              <a:srgbClr val="C00000"/>
+            </a:solidFill>
+          </a:ln>
+        </p:spPr>
+        <p:style>
+          <a:lnRef idx="0">
+            <a:scrgbClr r="0" g="0" b="0"/>
+          </a:lnRef>
+          <a:fillRef idx="0">
+            <a:scrgbClr r="0" g="0" b="0"/>
+          </a:fillRef>
+          <a:effectRef idx="0">
+            <a:scrgbClr r="0" g="0" b="0"/>
+          </a:effectRef>
+          <a:fontRef idx="minor">
+            <a:schemeClr val="lt1"/>
+          </a:fontRef>
+        </p:style>
+        <p:txBody>
+          <a:bodyPr wrap="square" rtlCol="0" anchor="ctr">
+            <a:spAutoFit/>
+          </a:bodyPr>
+          <a:lstStyle/>
+          <a:p>
+            <a:pPr algn="ctr"/>
+            <a:r>
+              <a:rPr lang="de-AT" b="1" dirty="0"/>
+              <a:t>Power Supply (±10V)</a:t>
+            </a:r>
+            <a:endParaRPr lang="de-DE" b="1" dirty="0"/>
+          </a:p>
+        </p:txBody>
+      </p:sp>
+      <p:cxnSp>
+        <p:nvCxnSpPr>
+          <p:cNvPr id="25" name="Gerade Verbindung mit Pfeil 24">
+            <a:extLst>
+              <a:ext uri="{FF2B5EF4-FFF2-40B4-BE49-F238E27FC236}">
+                <a16:creationId xmlns:a16="http://schemas.microsoft.com/office/drawing/2014/main" id="{4C0CC289-18D2-C356-0E23-8012F915DCA0}"/>
+              </a:ext>
+            </a:extLst>
+          </p:cNvPr>
+          <p:cNvCxnSpPr>
+            <a:cxnSpLocks/>
+            <a:stCxn id="24" idx="1"/>
+          </p:cNvCxnSpPr>
+          <p:nvPr/>
+        </p:nvCxnSpPr>
+        <p:spPr>
+          <a:xfrm flipH="1" flipV="1">
+            <a:off x="4970462" y="4172419"/>
+            <a:ext cx="890588" cy="498864"/>
+          </a:xfrm>
+          <a:prstGeom prst="straightConnector1">
+            <a:avLst/>
+          </a:prstGeom>
+          <a:ln w="38100">
+            <a:solidFill>
+              <a:srgbClr val="C00000"/>
+            </a:solidFill>
+            <a:tailEnd type="triangle"/>
+          </a:ln>
+          <a:effectLst/>
+          <a:scene3d>
+            <a:camera prst="orthographicFront"/>
+            <a:lightRig rig="threePt" dir="t"/>
+          </a:scene3d>
+          <a:sp3d contourW="12700">
+            <a:contourClr>
+              <a:schemeClr val="bg1"/>
+            </a:contourClr>
+          </a:sp3d>
+        </p:spPr>
+        <p:style>
+          <a:lnRef idx="2">
+            <a:schemeClr val="accent1"/>
+          </a:lnRef>
+          <a:fillRef idx="0">
+            <a:schemeClr val="accent1"/>
+          </a:fillRef>
+          <a:effectRef idx="1">
+            <a:schemeClr val="accent1"/>
+          </a:effectRef>
+          <a:fontRef idx="minor">
+            <a:schemeClr val="tx1"/>
+          </a:fontRef>
+        </p:style>
+      </p:cxnSp>
+      <p:cxnSp>
+        <p:nvCxnSpPr>
+          <p:cNvPr id="28" name="Gerade Verbindung mit Pfeil 27">
+            <a:extLst>
+              <a:ext uri="{FF2B5EF4-FFF2-40B4-BE49-F238E27FC236}">
+                <a16:creationId xmlns:a16="http://schemas.microsoft.com/office/drawing/2014/main" id="{79E1B8BB-4CBC-75E0-CF1B-D5F99FDD2417}"/>
+              </a:ext>
+            </a:extLst>
+          </p:cNvPr>
+          <p:cNvCxnSpPr>
+            <a:cxnSpLocks/>
+          </p:cNvCxnSpPr>
+          <p:nvPr/>
+        </p:nvCxnSpPr>
+        <p:spPr>
+          <a:xfrm flipH="1" flipV="1">
+            <a:off x="3632200" y="4140200"/>
+            <a:ext cx="469900" cy="1282269"/>
+          </a:xfrm>
+          <a:prstGeom prst="straightConnector1">
+            <a:avLst/>
+          </a:prstGeom>
+          <a:ln w="38100">
+            <a:solidFill>
+              <a:srgbClr val="C00000"/>
+            </a:solidFill>
+            <a:tailEnd type="triangle"/>
+          </a:ln>
+          <a:scene3d>
+            <a:camera prst="orthographicFront"/>
+            <a:lightRig rig="threePt" dir="t"/>
+          </a:scene3d>
+          <a:sp3d contourW="12700">
+            <a:contourClr>
+              <a:schemeClr val="bg1"/>
+            </a:contourClr>
+          </a:sp3d>
+        </p:spPr>
+        <p:style>
+          <a:lnRef idx="2">
+            <a:schemeClr val="accent1"/>
+          </a:lnRef>
+          <a:fillRef idx="0">
+            <a:schemeClr val="accent1"/>
+          </a:fillRef>
+          <a:effectRef idx="1">
+            <a:schemeClr val="accent1"/>
+          </a:effectRef>
+          <a:fontRef idx="minor">
+            <a:schemeClr val="tx1"/>
+          </a:fontRef>
+        </p:style>
+      </p:cxnSp>
+      <p:sp>
+        <p:nvSpPr>
+          <p:cNvPr id="37" name="Rechteck 36">
+            <a:extLst>
+              <a:ext uri="{FF2B5EF4-FFF2-40B4-BE49-F238E27FC236}">
+                <a16:creationId xmlns:a16="http://schemas.microsoft.com/office/drawing/2014/main" id="{D696AACF-9495-83F3-4F54-A8BD8EF24934}"/>
+              </a:ext>
+            </a:extLst>
+          </p:cNvPr>
+          <p:cNvSpPr/>
+          <p:nvPr/>
+        </p:nvSpPr>
+        <p:spPr>
+          <a:xfrm>
+            <a:off x="4457700" y="5947412"/>
+            <a:ext cx="2540000" cy="646331"/>
+          </a:xfrm>
+          <a:prstGeom prst="rect">
+            <a:avLst/>
+          </a:prstGeom>
+          <a:solidFill>
+            <a:srgbClr val="C00000"/>
+          </a:solidFill>
+          <a:ln>
+            <a:solidFill>
+              <a:srgbClr val="C00000"/>
+            </a:solidFill>
+          </a:ln>
+        </p:spPr>
+        <p:style>
+          <a:lnRef idx="0">
+            <a:scrgbClr r="0" g="0" b="0"/>
+          </a:lnRef>
+          <a:fillRef idx="0">
+            <a:scrgbClr r="0" g="0" b="0"/>
+          </a:fillRef>
+          <a:effectRef idx="0">
+            <a:scrgbClr r="0" g="0" b="0"/>
+          </a:effectRef>
+          <a:fontRef idx="minor">
+            <a:schemeClr val="lt1"/>
+          </a:fontRef>
+        </p:style>
+        <p:txBody>
+          <a:bodyPr wrap="square" rtlCol="0" anchor="ctr">
+            <a:spAutoFit/>
+          </a:bodyPr>
+          <a:lstStyle/>
+          <a:p>
+            <a:pPr algn="ctr"/>
+            <a:r>
+              <a:rPr lang="de-AT" b="1" dirty="0" err="1"/>
+              <a:t>Deflection</a:t>
+            </a:r>
+            <a:r>
+              <a:rPr lang="de-AT" b="1" dirty="0"/>
+              <a:t> </a:t>
+            </a:r>
+            <a:r>
+              <a:rPr lang="de-AT" b="1" dirty="0" err="1"/>
+              <a:t>Readout</a:t>
+            </a:r>
+            <a:r>
+              <a:rPr lang="de-AT" b="1" dirty="0"/>
+              <a:t> Signal</a:t>
+            </a:r>
+            <a:endParaRPr lang="de-DE" b="1" dirty="0"/>
+          </a:p>
+        </p:txBody>
+      </p:sp>
+      <p:sp>
+        <p:nvSpPr>
+          <p:cNvPr id="45" name="Rechteck 44">
+            <a:extLst>
+              <a:ext uri="{FF2B5EF4-FFF2-40B4-BE49-F238E27FC236}">
+                <a16:creationId xmlns:a16="http://schemas.microsoft.com/office/drawing/2014/main" id="{63064DFC-4D71-0ED3-269C-CCAB05A1B1E2}"/>
+              </a:ext>
+            </a:extLst>
+          </p:cNvPr>
+          <p:cNvSpPr/>
+          <p:nvPr/>
+        </p:nvSpPr>
+        <p:spPr>
+          <a:xfrm>
+            <a:off x="2168525" y="1417485"/>
+            <a:ext cx="1352550" cy="646331"/>
+          </a:xfrm>
+          <a:prstGeom prst="rect">
+            <a:avLst/>
+          </a:prstGeom>
+          <a:solidFill>
+            <a:srgbClr val="C00000"/>
+          </a:solidFill>
+          <a:ln>
+            <a:solidFill>
+              <a:srgbClr val="C00000"/>
+            </a:solidFill>
+          </a:ln>
+        </p:spPr>
+        <p:style>
+          <a:lnRef idx="0">
+            <a:scrgbClr r="0" g="0" b="0"/>
+          </a:lnRef>
+          <a:fillRef idx="0">
+            <a:scrgbClr r="0" g="0" b="0"/>
+          </a:fillRef>
+          <a:effectRef idx="0">
+            <a:scrgbClr r="0" g="0" b="0"/>
+          </a:effectRef>
+          <a:fontRef idx="minor">
+            <a:schemeClr val="lt1"/>
+          </a:fontRef>
+        </p:style>
+        <p:txBody>
+          <a:bodyPr wrap="square" rtlCol="0" anchor="ctr">
+            <a:spAutoFit/>
+          </a:bodyPr>
+          <a:lstStyle/>
+          <a:p>
+            <a:pPr algn="ctr"/>
+            <a:r>
+              <a:rPr lang="de-AT" b="1" dirty="0"/>
+              <a:t>AFM Cantilever</a:t>
+            </a:r>
+            <a:endParaRPr lang="de-DE" b="1" dirty="0"/>
+          </a:p>
+        </p:txBody>
+      </p:sp>
+      <p:sp>
+        <p:nvSpPr>
+          <p:cNvPr id="47" name="Rechteck 46">
+            <a:extLst>
+              <a:ext uri="{FF2B5EF4-FFF2-40B4-BE49-F238E27FC236}">
+                <a16:creationId xmlns:a16="http://schemas.microsoft.com/office/drawing/2014/main" id="{A91CF3CA-69E3-2FE4-3C7D-171CBD717C73}"/>
+              </a:ext>
+            </a:extLst>
+          </p:cNvPr>
+          <p:cNvSpPr/>
+          <p:nvPr/>
+        </p:nvSpPr>
+        <p:spPr>
+          <a:xfrm>
+            <a:off x="5162550" y="264257"/>
+            <a:ext cx="1765300" cy="646331"/>
+          </a:xfrm>
+          <a:prstGeom prst="rect">
+            <a:avLst/>
+          </a:prstGeom>
+          <a:solidFill>
+            <a:srgbClr val="C00000"/>
+          </a:solidFill>
+          <a:ln>
+            <a:solidFill>
+              <a:srgbClr val="C00000"/>
+            </a:solidFill>
+          </a:ln>
+        </p:spPr>
+        <p:style>
+          <a:lnRef idx="0">
+            <a:scrgbClr r="0" g="0" b="0"/>
+          </a:lnRef>
+          <a:fillRef idx="0">
+            <a:scrgbClr r="0" g="0" b="0"/>
+          </a:fillRef>
+          <a:effectRef idx="0">
+            <a:scrgbClr r="0" g="0" b="0"/>
+          </a:effectRef>
+          <a:fontRef idx="minor">
+            <a:schemeClr val="lt1"/>
+          </a:fontRef>
+        </p:style>
+        <p:txBody>
+          <a:bodyPr wrap="square" rtlCol="0" anchor="ctr">
+            <a:spAutoFit/>
+          </a:bodyPr>
+          <a:lstStyle/>
+          <a:p>
+            <a:pPr algn="ctr"/>
+            <a:r>
+              <a:rPr lang="de-AT" b="1" dirty="0" err="1"/>
+              <a:t>Lowpass</a:t>
+            </a:r>
+            <a:r>
+              <a:rPr lang="de-AT" b="1" dirty="0"/>
+              <a:t> Filter (not </a:t>
+            </a:r>
+            <a:r>
+              <a:rPr lang="de-AT" b="1" dirty="0" err="1"/>
+              <a:t>shown</a:t>
+            </a:r>
+            <a:r>
+              <a:rPr lang="de-AT" b="1" dirty="0"/>
+              <a:t>)</a:t>
+            </a:r>
+            <a:endParaRPr lang="de-DE" b="1" dirty="0"/>
+          </a:p>
+        </p:txBody>
+      </p:sp>
+      <p:cxnSp>
+        <p:nvCxnSpPr>
+          <p:cNvPr id="51" name="Verbinder: gewinkelt 50">
+            <a:extLst>
+              <a:ext uri="{FF2B5EF4-FFF2-40B4-BE49-F238E27FC236}">
+                <a16:creationId xmlns:a16="http://schemas.microsoft.com/office/drawing/2014/main" id="{D4CF608F-F4AA-A372-CA4E-CA40137DCD75}"/>
+              </a:ext>
+            </a:extLst>
+          </p:cNvPr>
+          <p:cNvCxnSpPr>
+            <a:cxnSpLocks/>
+          </p:cNvCxnSpPr>
+          <p:nvPr/>
+        </p:nvCxnSpPr>
+        <p:spPr>
+          <a:xfrm rot="5400000" flipH="1" flipV="1">
+            <a:off x="6884964" y="42886"/>
+            <a:ext cx="587422" cy="501650"/>
+          </a:xfrm>
+          <a:prstGeom prst="bentConnector3">
+            <a:avLst>
+              <a:gd name="adj1" fmla="val 274"/>
+            </a:avLst>
+          </a:prstGeom>
+          <a:ln w="38100">
+            <a:solidFill>
+              <a:srgbClr val="C00000"/>
+            </a:solidFill>
+            <a:tailEnd type="triangle"/>
+          </a:ln>
+          <a:effectLst/>
+          <a:scene3d>
+            <a:camera prst="orthographicFront"/>
+            <a:lightRig rig="threePt" dir="t"/>
+          </a:scene3d>
+          <a:sp3d contourW="12700">
+            <a:contourClr>
+              <a:schemeClr val="bg1"/>
+            </a:contourClr>
+          </a:sp3d>
+        </p:spPr>
+        <p:style>
+          <a:lnRef idx="2">
+            <a:schemeClr val="accent1"/>
+          </a:lnRef>
+          <a:fillRef idx="0">
+            <a:schemeClr val="accent1"/>
+          </a:fillRef>
+          <a:effectRef idx="1">
+            <a:schemeClr val="accent1"/>
+          </a:effectRef>
+          <a:fontRef idx="minor">
+            <a:schemeClr val="tx1"/>
+          </a:fontRef>
+        </p:style>
+      </p:cxnSp>
+      <p:sp>
+        <p:nvSpPr>
+          <p:cNvPr id="64" name="Rechteck 63">
+            <a:extLst>
+              <a:ext uri="{FF2B5EF4-FFF2-40B4-BE49-F238E27FC236}">
+                <a16:creationId xmlns:a16="http://schemas.microsoft.com/office/drawing/2014/main" id="{A664E3EB-466D-B8E6-BB82-BA0A11B56E0A}"/>
+              </a:ext>
+            </a:extLst>
+          </p:cNvPr>
+          <p:cNvSpPr/>
+          <p:nvPr/>
+        </p:nvSpPr>
+        <p:spPr>
+          <a:xfrm>
+            <a:off x="1784350" y="623746"/>
+            <a:ext cx="1352550" cy="369332"/>
+          </a:xfrm>
+          <a:prstGeom prst="rect">
+            <a:avLst/>
+          </a:prstGeom>
+          <a:solidFill>
+            <a:srgbClr val="C00000"/>
+          </a:solidFill>
+          <a:ln>
+            <a:solidFill>
+              <a:srgbClr val="C00000"/>
+            </a:solidFill>
+          </a:ln>
+        </p:spPr>
+        <p:style>
+          <a:lnRef idx="0">
+            <a:scrgbClr r="0" g="0" b="0"/>
+          </a:lnRef>
+          <a:fillRef idx="0">
+            <a:scrgbClr r="0" g="0" b="0"/>
+          </a:fillRef>
+          <a:effectRef idx="0">
+            <a:scrgbClr r="0" g="0" b="0"/>
+          </a:effectRef>
+          <a:fontRef idx="minor">
+            <a:schemeClr val="lt1"/>
+          </a:fontRef>
+        </p:style>
+        <p:txBody>
+          <a:bodyPr wrap="square" rtlCol="0" anchor="ctr">
+            <a:spAutoFit/>
+          </a:bodyPr>
+          <a:lstStyle/>
+          <a:p>
+            <a:pPr algn="ctr"/>
+            <a:r>
+              <a:rPr lang="de-AT" b="1" dirty="0"/>
+              <a:t>Sample</a:t>
+            </a:r>
+            <a:endParaRPr lang="de-DE" b="1" dirty="0"/>
+          </a:p>
+        </p:txBody>
+      </p:sp>
+      <p:cxnSp>
+        <p:nvCxnSpPr>
+          <p:cNvPr id="77" name="Gerade Verbindung mit Pfeil 76">
+            <a:extLst>
+              <a:ext uri="{FF2B5EF4-FFF2-40B4-BE49-F238E27FC236}">
+                <a16:creationId xmlns:a16="http://schemas.microsoft.com/office/drawing/2014/main" id="{EB245D75-4E41-7CF8-903B-06724EE62416}"/>
+              </a:ext>
+            </a:extLst>
+          </p:cNvPr>
+          <p:cNvCxnSpPr>
+            <a:cxnSpLocks/>
+            <a:stCxn id="78" idx="2"/>
+          </p:cNvCxnSpPr>
+          <p:nvPr/>
+        </p:nvCxnSpPr>
+        <p:spPr>
+          <a:xfrm flipH="1">
+            <a:off x="9037637" y="3026941"/>
+            <a:ext cx="571500" cy="973559"/>
+          </a:xfrm>
+          <a:prstGeom prst="straightConnector1">
+            <a:avLst/>
+          </a:prstGeom>
+          <a:ln w="38100">
+            <a:solidFill>
+              <a:srgbClr val="C00000"/>
+            </a:solidFill>
+            <a:tailEnd type="triangle"/>
+          </a:ln>
+          <a:scene3d>
+            <a:camera prst="orthographicFront"/>
+            <a:lightRig rig="threePt" dir="t"/>
+          </a:scene3d>
+          <a:sp3d contourW="12700">
+            <a:contourClr>
+              <a:schemeClr val="bg1"/>
+            </a:contourClr>
+          </a:sp3d>
+        </p:spPr>
+        <p:style>
+          <a:lnRef idx="2">
+            <a:schemeClr val="accent1"/>
+          </a:lnRef>
+          <a:fillRef idx="0">
+            <a:schemeClr val="accent1"/>
+          </a:fillRef>
+          <a:effectRef idx="1">
+            <a:schemeClr val="accent1"/>
+          </a:effectRef>
+          <a:fontRef idx="minor">
+            <a:schemeClr val="tx1"/>
+          </a:fontRef>
+        </p:style>
+      </p:cxnSp>
+      <p:sp>
+        <p:nvSpPr>
+          <p:cNvPr id="78" name="Rechteck 77">
+            <a:extLst>
+              <a:ext uri="{FF2B5EF4-FFF2-40B4-BE49-F238E27FC236}">
+                <a16:creationId xmlns:a16="http://schemas.microsoft.com/office/drawing/2014/main" id="{6DFFF4A3-6CC3-2AA2-21D6-EC7699259F8F}"/>
+              </a:ext>
+            </a:extLst>
+          </p:cNvPr>
+          <p:cNvSpPr/>
+          <p:nvPr/>
+        </p:nvSpPr>
+        <p:spPr>
+          <a:xfrm>
+            <a:off x="8880475" y="2380610"/>
+            <a:ext cx="1457324" cy="646331"/>
+          </a:xfrm>
+          <a:prstGeom prst="rect">
+            <a:avLst/>
+          </a:prstGeom>
+          <a:solidFill>
+            <a:srgbClr val="C00000"/>
+          </a:solidFill>
+          <a:ln>
+            <a:solidFill>
+              <a:srgbClr val="C00000"/>
+            </a:solidFill>
+          </a:ln>
+        </p:spPr>
+        <p:style>
+          <a:lnRef idx="0">
+            <a:scrgbClr r="0" g="0" b="0"/>
+          </a:lnRef>
+          <a:fillRef idx="0">
+            <a:scrgbClr r="0" g="0" b="0"/>
+          </a:fillRef>
+          <a:effectRef idx="0">
+            <a:scrgbClr r="0" g="0" b="0"/>
+          </a:effectRef>
+          <a:fontRef idx="minor">
+            <a:schemeClr val="lt1"/>
+          </a:fontRef>
+        </p:style>
+        <p:txBody>
+          <a:bodyPr wrap="square" rtlCol="0" anchor="ctr">
+            <a:spAutoFit/>
+          </a:bodyPr>
+          <a:lstStyle/>
+          <a:p>
+            <a:pPr algn="ctr"/>
+            <a:r>
+              <a:rPr lang="de-AT" b="1" dirty="0" err="1"/>
+              <a:t>Setpoint</a:t>
+            </a:r>
+            <a:r>
+              <a:rPr lang="de-AT" b="1" dirty="0"/>
+              <a:t> Signal</a:t>
+            </a:r>
+            <a:endParaRPr lang="de-DE" b="1" dirty="0"/>
+          </a:p>
+        </p:txBody>
+      </p:sp>
+      <p:cxnSp>
+        <p:nvCxnSpPr>
+          <p:cNvPr id="80" name="Gerade Verbindung mit Pfeil 79">
+            <a:extLst>
+              <a:ext uri="{FF2B5EF4-FFF2-40B4-BE49-F238E27FC236}">
+                <a16:creationId xmlns:a16="http://schemas.microsoft.com/office/drawing/2014/main" id="{B31522A2-5B88-16F3-265D-EB9F1CC3C8AF}"/>
+              </a:ext>
+            </a:extLst>
+          </p:cNvPr>
+          <p:cNvCxnSpPr>
+            <a:cxnSpLocks/>
+            <a:stCxn id="81" idx="0"/>
+          </p:cNvCxnSpPr>
+          <p:nvPr/>
+        </p:nvCxnSpPr>
+        <p:spPr>
+          <a:xfrm flipH="1" flipV="1">
+            <a:off x="9013825" y="4581184"/>
+            <a:ext cx="595312" cy="551764"/>
+          </a:xfrm>
+          <a:prstGeom prst="straightConnector1">
+            <a:avLst/>
+          </a:prstGeom>
+          <a:ln w="38100">
+            <a:solidFill>
+              <a:srgbClr val="C00000"/>
+            </a:solidFill>
+            <a:tailEnd type="triangle"/>
+          </a:ln>
+          <a:scene3d>
+            <a:camera prst="orthographicFront"/>
+            <a:lightRig rig="threePt" dir="t"/>
+          </a:scene3d>
+          <a:sp3d contourW="12700">
+            <a:contourClr>
+              <a:schemeClr val="bg1"/>
+            </a:contourClr>
+          </a:sp3d>
+        </p:spPr>
+        <p:style>
+          <a:lnRef idx="2">
+            <a:schemeClr val="accent1"/>
+          </a:lnRef>
+          <a:fillRef idx="0">
+            <a:schemeClr val="accent1"/>
+          </a:fillRef>
+          <a:effectRef idx="1">
+            <a:schemeClr val="accent1"/>
+          </a:effectRef>
+          <a:fontRef idx="minor">
+            <a:schemeClr val="tx1"/>
+          </a:fontRef>
+        </p:style>
+      </p:cxnSp>
+      <p:sp>
+        <p:nvSpPr>
+          <p:cNvPr id="81" name="Rechteck 80">
+            <a:extLst>
+              <a:ext uri="{FF2B5EF4-FFF2-40B4-BE49-F238E27FC236}">
+                <a16:creationId xmlns:a16="http://schemas.microsoft.com/office/drawing/2014/main" id="{BA5EC3A3-B2F6-59E9-CCF3-262C40C0277F}"/>
+              </a:ext>
+            </a:extLst>
+          </p:cNvPr>
+          <p:cNvSpPr/>
+          <p:nvPr/>
+        </p:nvSpPr>
+        <p:spPr>
+          <a:xfrm>
+            <a:off x="8880475" y="5132948"/>
+            <a:ext cx="1457324" cy="646331"/>
+          </a:xfrm>
+          <a:prstGeom prst="rect">
+            <a:avLst/>
+          </a:prstGeom>
+          <a:solidFill>
+            <a:srgbClr val="C00000"/>
+          </a:solidFill>
+          <a:ln>
+            <a:solidFill>
+              <a:srgbClr val="C00000"/>
+            </a:solidFill>
+          </a:ln>
+        </p:spPr>
+        <p:style>
+          <a:lnRef idx="0">
+            <a:scrgbClr r="0" g="0" b="0"/>
+          </a:lnRef>
+          <a:fillRef idx="0">
+            <a:scrgbClr r="0" g="0" b="0"/>
+          </a:fillRef>
+          <a:effectRef idx="0">
+            <a:scrgbClr r="0" g="0" b="0"/>
+          </a:effectRef>
+          <a:fontRef idx="minor">
+            <a:schemeClr val="lt1"/>
+          </a:fontRef>
+        </p:style>
+        <p:txBody>
+          <a:bodyPr wrap="square" rtlCol="0" anchor="ctr">
+            <a:spAutoFit/>
+          </a:bodyPr>
+          <a:lstStyle/>
+          <a:p>
+            <a:pPr algn="ctr"/>
+            <a:r>
+              <a:rPr lang="de-AT" b="1" dirty="0"/>
+              <a:t>Controller </a:t>
+            </a:r>
+            <a:r>
+              <a:rPr lang="de-AT" b="1" dirty="0" err="1"/>
+              <a:t>Reset</a:t>
+            </a:r>
+            <a:endParaRPr lang="de-DE" b="1" dirty="0"/>
+          </a:p>
+        </p:txBody>
+      </p:sp>
+      <p:sp>
+        <p:nvSpPr>
+          <p:cNvPr id="85" name="Rechteck 84">
+            <a:extLst>
+              <a:ext uri="{FF2B5EF4-FFF2-40B4-BE49-F238E27FC236}">
+                <a16:creationId xmlns:a16="http://schemas.microsoft.com/office/drawing/2014/main" id="{3F0EE30D-A4D1-229E-E283-2CBA82240077}"/>
+              </a:ext>
+            </a:extLst>
+          </p:cNvPr>
+          <p:cNvSpPr/>
+          <p:nvPr/>
+        </p:nvSpPr>
+        <p:spPr>
+          <a:xfrm>
+            <a:off x="5713412" y="3077170"/>
+            <a:ext cx="1371600" cy="923330"/>
+          </a:xfrm>
+          <a:prstGeom prst="rect">
+            <a:avLst/>
+          </a:prstGeom>
+          <a:solidFill>
+            <a:srgbClr val="C00000"/>
+          </a:solidFill>
+          <a:ln>
+            <a:solidFill>
+              <a:srgbClr val="C00000"/>
+            </a:solidFill>
+          </a:ln>
+        </p:spPr>
+        <p:style>
+          <a:lnRef idx="0">
+            <a:scrgbClr r="0" g="0" b="0"/>
+          </a:lnRef>
+          <a:fillRef idx="0">
+            <a:scrgbClr r="0" g="0" b="0"/>
+          </a:fillRef>
+          <a:effectRef idx="0">
+            <a:scrgbClr r="0" g="0" b="0"/>
+          </a:effectRef>
+          <a:fontRef idx="minor">
+            <a:schemeClr val="lt1"/>
+          </a:fontRef>
+        </p:style>
+        <p:txBody>
+          <a:bodyPr wrap="square" rtlCol="0" anchor="ctr">
+            <a:spAutoFit/>
+          </a:bodyPr>
+          <a:lstStyle/>
+          <a:p>
+            <a:pPr algn="ctr"/>
+            <a:r>
+              <a:rPr lang="de-AT" b="1" dirty="0"/>
+              <a:t>Lorentz </a:t>
+            </a:r>
+            <a:r>
+              <a:rPr lang="de-AT" b="1" dirty="0" err="1"/>
+              <a:t>Actuator</a:t>
+            </a:r>
+            <a:r>
+              <a:rPr lang="de-AT" b="1" dirty="0"/>
+              <a:t> Electronics</a:t>
+            </a:r>
+            <a:endParaRPr lang="de-DE" b="1" dirty="0"/>
+          </a:p>
+        </p:txBody>
+      </p:sp>
+      <p:cxnSp>
+        <p:nvCxnSpPr>
+          <p:cNvPr id="86" name="Gerade Verbindung mit Pfeil 85">
+            <a:extLst>
+              <a:ext uri="{FF2B5EF4-FFF2-40B4-BE49-F238E27FC236}">
+                <a16:creationId xmlns:a16="http://schemas.microsoft.com/office/drawing/2014/main" id="{866E00D0-4AB3-52B7-1D19-5D2AC41EDC9A}"/>
+              </a:ext>
+            </a:extLst>
+          </p:cNvPr>
+          <p:cNvCxnSpPr>
+            <a:cxnSpLocks/>
+            <a:stCxn id="85" idx="1"/>
+          </p:cNvCxnSpPr>
+          <p:nvPr/>
+        </p:nvCxnSpPr>
+        <p:spPr>
+          <a:xfrm flipH="1" flipV="1">
+            <a:off x="4813299" y="3312058"/>
+            <a:ext cx="900113" cy="226777"/>
+          </a:xfrm>
+          <a:prstGeom prst="straightConnector1">
+            <a:avLst/>
+          </a:prstGeom>
+          <a:ln w="38100">
+            <a:solidFill>
+              <a:srgbClr val="C00000"/>
+            </a:solidFill>
+            <a:tailEnd type="triangle"/>
+          </a:ln>
+          <a:effectLst/>
+          <a:scene3d>
+            <a:camera prst="orthographicFront"/>
+            <a:lightRig rig="threePt" dir="t"/>
+          </a:scene3d>
+          <a:sp3d contourW="12700">
+            <a:contourClr>
+              <a:schemeClr val="bg1"/>
+            </a:contourClr>
+          </a:sp3d>
+        </p:spPr>
+        <p:style>
+          <a:lnRef idx="2">
+            <a:schemeClr val="accent1"/>
+          </a:lnRef>
+          <a:fillRef idx="0">
+            <a:schemeClr val="accent1"/>
+          </a:fillRef>
+          <a:effectRef idx="1">
+            <a:schemeClr val="accent1"/>
+          </a:effectRef>
+          <a:fontRef idx="minor">
+            <a:schemeClr val="tx1"/>
+          </a:fontRef>
+        </p:style>
+      </p:cxnSp>
+    </p:spTree>
+    <p:extLst>
+      <p:ext uri="{BB962C8B-B14F-4D97-AF65-F5344CB8AC3E}">
+        <p14:creationId xmlns:p14="http://schemas.microsoft.com/office/powerpoint/2010/main" val="365931691"/>
       </p:ext>
     </p:extLst>
   </p:cSld>
@@ -17965,6 +19352,5313 @@
     <p:extLst>
       <p:ext uri="{BB962C8B-B14F-4D97-AF65-F5344CB8AC3E}">
         <p14:creationId xmlns:p14="http://schemas.microsoft.com/office/powerpoint/2010/main" val="2692590551"/>
+      </p:ext>
+    </p:extLst>
+  </p:cSld>
+  <p:clrMapOvr>
+    <a:masterClrMapping/>
+  </p:clrMapOvr>
+</p:sld>
+</file>
+
+<file path=ppt/slides/slide20.xml><?xml version="1.0" encoding="utf-8"?>
+<p:sld xmlns:a="http://schemas.openxmlformats.org/drawingml/2006/main" xmlns:r="http://schemas.openxmlformats.org/officeDocument/2006/relationships" xmlns:p="http://schemas.openxmlformats.org/presentationml/2006/main">
+  <p:cSld>
+    <p:spTree>
+      <p:nvGrpSpPr>
+        <p:cNvPr id="1" name="">
+          <a:extLst>
+            <a:ext uri="{FF2B5EF4-FFF2-40B4-BE49-F238E27FC236}">
+              <a16:creationId xmlns:a16="http://schemas.microsoft.com/office/drawing/2014/main" id="{4A32AACC-7092-165A-D777-AF1C1D62C03D}"/>
+            </a:ext>
+          </a:extLst>
+        </p:cNvPr>
+        <p:cNvGrpSpPr/>
+        <p:nvPr/>
+      </p:nvGrpSpPr>
+      <p:grpSpPr>
+        <a:xfrm>
+          <a:off x="0" y="0"/>
+          <a:ext cx="0" cy="0"/>
+          <a:chOff x="0" y="0"/>
+          <a:chExt cx="0" cy="0"/>
+        </a:xfrm>
+      </p:grpSpPr>
+      <p:sp>
+        <p:nvSpPr>
+          <p:cNvPr id="4" name="Textfeld 3">
+            <a:extLst>
+              <a:ext uri="{FF2B5EF4-FFF2-40B4-BE49-F238E27FC236}">
+                <a16:creationId xmlns:a16="http://schemas.microsoft.com/office/drawing/2014/main" id="{902A74F5-9C4F-E354-C136-650B37B41D5C}"/>
+              </a:ext>
+            </a:extLst>
+          </p:cNvPr>
+          <p:cNvSpPr txBox="1"/>
+          <p:nvPr/>
+        </p:nvSpPr>
+        <p:spPr>
+          <a:xfrm>
+            <a:off x="1614311" y="1614919"/>
+            <a:ext cx="1397000" cy="680050"/>
+          </a:xfrm>
+          <a:prstGeom prst="rect">
+            <a:avLst/>
+          </a:prstGeom>
+        </p:spPr>
+        <p:style>
+          <a:lnRef idx="2">
+            <a:schemeClr val="dk1"/>
+          </a:lnRef>
+          <a:fillRef idx="1">
+            <a:schemeClr val="lt1"/>
+          </a:fillRef>
+          <a:effectRef idx="0">
+            <a:schemeClr val="dk1"/>
+          </a:effectRef>
+          <a:fontRef idx="minor">
+            <a:schemeClr val="dk1"/>
+          </a:fontRef>
+        </p:style>
+        <p:txBody>
+          <a:bodyPr wrap="square" rtlCol="0" anchor="ctr">
+            <a:noAutofit/>
+          </a:bodyPr>
+          <a:lstStyle/>
+          <a:p>
+            <a:pPr algn="ctr"/>
+            <a:r>
+              <a:rPr lang="de-AT" dirty="0"/>
+              <a:t>Strain </a:t>
+            </a:r>
+            <a:r>
+              <a:rPr lang="de-AT" dirty="0" err="1"/>
+              <a:t>Gauges</a:t>
+            </a:r>
+            <a:endParaRPr lang="de-DE" dirty="0"/>
+          </a:p>
+        </p:txBody>
+      </p:sp>
+      <p:sp>
+        <p:nvSpPr>
+          <p:cNvPr id="5" name="Textfeld 4">
+            <a:extLst>
+              <a:ext uri="{FF2B5EF4-FFF2-40B4-BE49-F238E27FC236}">
+                <a16:creationId xmlns:a16="http://schemas.microsoft.com/office/drawing/2014/main" id="{5C5B5268-A815-5149-3A6D-FFEE0F22F9F1}"/>
+              </a:ext>
+            </a:extLst>
+          </p:cNvPr>
+          <p:cNvSpPr txBox="1"/>
+          <p:nvPr/>
+        </p:nvSpPr>
+        <p:spPr>
+          <a:xfrm>
+            <a:off x="4074937" y="1383015"/>
+            <a:ext cx="1614664" cy="1131500"/>
+          </a:xfrm>
+          <a:prstGeom prst="rect">
+            <a:avLst/>
+          </a:prstGeom>
+        </p:spPr>
+        <p:style>
+          <a:lnRef idx="2">
+            <a:schemeClr val="dk1"/>
+          </a:lnRef>
+          <a:fillRef idx="1">
+            <a:schemeClr val="lt1"/>
+          </a:fillRef>
+          <a:effectRef idx="0">
+            <a:schemeClr val="dk1"/>
+          </a:effectRef>
+          <a:fontRef idx="minor">
+            <a:schemeClr val="dk1"/>
+          </a:fontRef>
+        </p:style>
+        <p:txBody>
+          <a:bodyPr wrap="square" rtlCol="0" anchor="ctr">
+            <a:noAutofit/>
+          </a:bodyPr>
+          <a:lstStyle/>
+          <a:p>
+            <a:pPr algn="ctr"/>
+            <a:r>
+              <a:rPr lang="de-AT" dirty="0" err="1"/>
+              <a:t>Deflection</a:t>
+            </a:r>
+            <a:r>
+              <a:rPr lang="de-AT" dirty="0"/>
+              <a:t> </a:t>
+            </a:r>
+            <a:r>
+              <a:rPr lang="de-AT" dirty="0" err="1"/>
+              <a:t>Readout</a:t>
+            </a:r>
+            <a:r>
+              <a:rPr lang="de-AT" dirty="0"/>
+              <a:t> Electronics</a:t>
+            </a:r>
+            <a:endParaRPr lang="de-DE" dirty="0"/>
+          </a:p>
+        </p:txBody>
+      </p:sp>
+      <p:cxnSp>
+        <p:nvCxnSpPr>
+          <p:cNvPr id="9" name="Gerade Verbindung mit Pfeil 8">
+            <a:extLst>
+              <a:ext uri="{FF2B5EF4-FFF2-40B4-BE49-F238E27FC236}">
+                <a16:creationId xmlns:a16="http://schemas.microsoft.com/office/drawing/2014/main" id="{AF9D9A38-C53D-C90D-C9BC-C45730B89385}"/>
+              </a:ext>
+            </a:extLst>
+          </p:cNvPr>
+          <p:cNvCxnSpPr>
+            <a:cxnSpLocks/>
+            <a:stCxn id="5" idx="3"/>
+            <a:endCxn id="10" idx="2"/>
+          </p:cNvCxnSpPr>
+          <p:nvPr/>
+        </p:nvCxnSpPr>
+        <p:spPr>
+          <a:xfrm>
+            <a:off x="5689601" y="1948765"/>
+            <a:ext cx="533399" cy="0"/>
+          </a:xfrm>
+          <a:prstGeom prst="straightConnector1">
+            <a:avLst/>
+          </a:prstGeom>
+          <a:ln>
+            <a:tailEnd type="triangle"/>
+          </a:ln>
+        </p:spPr>
+        <p:style>
+          <a:lnRef idx="2">
+            <a:schemeClr val="dk1"/>
+          </a:lnRef>
+          <a:fillRef idx="0">
+            <a:schemeClr val="dk1"/>
+          </a:fillRef>
+          <a:effectRef idx="1">
+            <a:schemeClr val="dk1"/>
+          </a:effectRef>
+          <a:fontRef idx="minor">
+            <a:schemeClr val="tx1"/>
+          </a:fontRef>
+        </p:style>
+      </p:cxnSp>
+      <p:sp>
+        <p:nvSpPr>
+          <p:cNvPr id="10" name="Ellipse 9">
+            <a:extLst>
+              <a:ext uri="{FF2B5EF4-FFF2-40B4-BE49-F238E27FC236}">
+                <a16:creationId xmlns:a16="http://schemas.microsoft.com/office/drawing/2014/main" id="{56168B05-9CC4-1DBF-B811-8B72082BC3AE}"/>
+              </a:ext>
+            </a:extLst>
+          </p:cNvPr>
+          <p:cNvSpPr/>
+          <p:nvPr/>
+        </p:nvSpPr>
+        <p:spPr>
+          <a:xfrm>
+            <a:off x="6223000" y="1834465"/>
+            <a:ext cx="228600" cy="228600"/>
+          </a:xfrm>
+          <a:prstGeom prst="ellipse">
+            <a:avLst/>
+          </a:prstGeom>
+        </p:spPr>
+        <p:style>
+          <a:lnRef idx="2">
+            <a:schemeClr val="dk1"/>
+          </a:lnRef>
+          <a:fillRef idx="1">
+            <a:schemeClr val="lt1"/>
+          </a:fillRef>
+          <a:effectRef idx="0">
+            <a:schemeClr val="dk1"/>
+          </a:effectRef>
+          <a:fontRef idx="minor">
+            <a:schemeClr val="dk1"/>
+          </a:fontRef>
+        </p:style>
+        <p:txBody>
+          <a:bodyPr rtlCol="0" anchor="ctr"/>
+          <a:lstStyle/>
+          <a:p>
+            <a:pPr algn="ctr"/>
+            <a:endParaRPr lang="de-DE"/>
+          </a:p>
+        </p:txBody>
+      </p:sp>
+      <p:cxnSp>
+        <p:nvCxnSpPr>
+          <p:cNvPr id="11" name="Gerade Verbindung mit Pfeil 10">
+            <a:extLst>
+              <a:ext uri="{FF2B5EF4-FFF2-40B4-BE49-F238E27FC236}">
+                <a16:creationId xmlns:a16="http://schemas.microsoft.com/office/drawing/2014/main" id="{38B632EF-DE3C-40E6-6C65-0E26D9793DB2}"/>
+              </a:ext>
+            </a:extLst>
+          </p:cNvPr>
+          <p:cNvCxnSpPr>
+            <a:cxnSpLocks/>
+            <a:stCxn id="4" idx="3"/>
+            <a:endCxn id="5" idx="1"/>
+          </p:cNvCxnSpPr>
+          <p:nvPr/>
+        </p:nvCxnSpPr>
+        <p:spPr>
+          <a:xfrm flipV="1">
+            <a:off x="3011311" y="1948765"/>
+            <a:ext cx="1063626" cy="6179"/>
+          </a:xfrm>
+          <a:prstGeom prst="straightConnector1">
+            <a:avLst/>
+          </a:prstGeom>
+          <a:ln>
+            <a:tailEnd type="triangle"/>
+          </a:ln>
+        </p:spPr>
+        <p:style>
+          <a:lnRef idx="2">
+            <a:schemeClr val="dk1"/>
+          </a:lnRef>
+          <a:fillRef idx="0">
+            <a:schemeClr val="dk1"/>
+          </a:fillRef>
+          <a:effectRef idx="1">
+            <a:schemeClr val="dk1"/>
+          </a:effectRef>
+          <a:fontRef idx="minor">
+            <a:schemeClr val="tx1"/>
+          </a:fontRef>
+        </p:style>
+      </p:cxnSp>
+      <p:cxnSp>
+        <p:nvCxnSpPr>
+          <p:cNvPr id="18" name="Gerade Verbindung mit Pfeil 17">
+            <a:extLst>
+              <a:ext uri="{FF2B5EF4-FFF2-40B4-BE49-F238E27FC236}">
+                <a16:creationId xmlns:a16="http://schemas.microsoft.com/office/drawing/2014/main" id="{0500CB67-C884-D567-1E67-8D9CE7101EF6}"/>
+              </a:ext>
+            </a:extLst>
+          </p:cNvPr>
+          <p:cNvCxnSpPr>
+            <a:endCxn id="10" idx="0"/>
+          </p:cNvCxnSpPr>
+          <p:nvPr/>
+        </p:nvCxnSpPr>
+        <p:spPr>
+          <a:xfrm>
+            <a:off x="6337300" y="1206500"/>
+            <a:ext cx="0" cy="627965"/>
+          </a:xfrm>
+          <a:prstGeom prst="straightConnector1">
+            <a:avLst/>
+          </a:prstGeom>
+          <a:ln>
+            <a:tailEnd type="triangle"/>
+          </a:ln>
+        </p:spPr>
+        <p:style>
+          <a:lnRef idx="2">
+            <a:schemeClr val="dk1"/>
+          </a:lnRef>
+          <a:fillRef idx="0">
+            <a:schemeClr val="dk1"/>
+          </a:fillRef>
+          <a:effectRef idx="1">
+            <a:schemeClr val="dk1"/>
+          </a:effectRef>
+          <a:fontRef idx="minor">
+            <a:schemeClr val="tx1"/>
+          </a:fontRef>
+        </p:style>
+      </p:cxnSp>
+      <p:sp>
+        <p:nvSpPr>
+          <p:cNvPr id="19" name="Rechteck 18">
+            <a:extLst>
+              <a:ext uri="{FF2B5EF4-FFF2-40B4-BE49-F238E27FC236}">
+                <a16:creationId xmlns:a16="http://schemas.microsoft.com/office/drawing/2014/main" id="{918AFD49-A4B5-A462-0984-86527CA9FF36}"/>
+              </a:ext>
+            </a:extLst>
+          </p:cNvPr>
+          <p:cNvSpPr/>
+          <p:nvPr/>
+        </p:nvSpPr>
+        <p:spPr>
+          <a:xfrm>
+            <a:off x="5467352" y="370533"/>
+            <a:ext cx="1739895" cy="698499"/>
+          </a:xfrm>
+          <a:prstGeom prst="rect">
+            <a:avLst/>
+          </a:prstGeom>
+          <a:noFill/>
+          <a:ln>
+            <a:noFill/>
+          </a:ln>
+        </p:spPr>
+        <p:style>
+          <a:lnRef idx="0">
+            <a:scrgbClr r="0" g="0" b="0"/>
+          </a:lnRef>
+          <a:fillRef idx="0">
+            <a:scrgbClr r="0" g="0" b="0"/>
+          </a:fillRef>
+          <a:effectRef idx="0">
+            <a:scrgbClr r="0" g="0" b="0"/>
+          </a:effectRef>
+          <a:fontRef idx="minor">
+            <a:schemeClr val="dk1"/>
+          </a:fontRef>
+        </p:style>
+        <p:txBody>
+          <a:bodyPr rtlCol="0" anchor="ctr"/>
+          <a:lstStyle/>
+          <a:p>
+            <a:pPr algn="ctr"/>
+            <a:r>
+              <a:rPr lang="de-AT" dirty="0"/>
+              <a:t>Offset </a:t>
+            </a:r>
+            <a:r>
+              <a:rPr lang="de-AT" dirty="0" err="1"/>
+              <a:t>Compensation</a:t>
+            </a:r>
+            <a:endParaRPr lang="de-DE" dirty="0"/>
+          </a:p>
+        </p:txBody>
+      </p:sp>
+      <p:sp>
+        <p:nvSpPr>
+          <p:cNvPr id="20" name="Rechteck 19">
+            <a:extLst>
+              <a:ext uri="{FF2B5EF4-FFF2-40B4-BE49-F238E27FC236}">
+                <a16:creationId xmlns:a16="http://schemas.microsoft.com/office/drawing/2014/main" id="{A2971568-C54E-90C7-1D20-A153260A2BAC}"/>
+              </a:ext>
+            </a:extLst>
+          </p:cNvPr>
+          <p:cNvSpPr/>
+          <p:nvPr/>
+        </p:nvSpPr>
+        <p:spPr>
+          <a:xfrm>
+            <a:off x="5854701" y="1596470"/>
+            <a:ext cx="431799" cy="313983"/>
+          </a:xfrm>
+          <a:prstGeom prst="rect">
+            <a:avLst/>
+          </a:prstGeom>
+          <a:noFill/>
+          <a:ln>
+            <a:noFill/>
+          </a:ln>
+        </p:spPr>
+        <p:style>
+          <a:lnRef idx="0">
+            <a:scrgbClr r="0" g="0" b="0"/>
+          </a:lnRef>
+          <a:fillRef idx="0">
+            <a:scrgbClr r="0" g="0" b="0"/>
+          </a:fillRef>
+          <a:effectRef idx="0">
+            <a:scrgbClr r="0" g="0" b="0"/>
+          </a:effectRef>
+          <a:fontRef idx="minor">
+            <a:schemeClr val="dk1"/>
+          </a:fontRef>
+        </p:style>
+        <p:txBody>
+          <a:bodyPr rtlCol="0" anchor="ctr"/>
+          <a:lstStyle/>
+          <a:p>
+            <a:pPr algn="ctr"/>
+            <a:r>
+              <a:rPr lang="de-AT" dirty="0"/>
+              <a:t>+</a:t>
+            </a:r>
+            <a:endParaRPr lang="de-DE" dirty="0"/>
+          </a:p>
+        </p:txBody>
+      </p:sp>
+      <p:cxnSp>
+        <p:nvCxnSpPr>
+          <p:cNvPr id="23" name="Gerade Verbindung mit Pfeil 22">
+            <a:extLst>
+              <a:ext uri="{FF2B5EF4-FFF2-40B4-BE49-F238E27FC236}">
+                <a16:creationId xmlns:a16="http://schemas.microsoft.com/office/drawing/2014/main" id="{3A4F71E2-5770-8FA8-50A5-6E4649990FAD}"/>
+              </a:ext>
+            </a:extLst>
+          </p:cNvPr>
+          <p:cNvCxnSpPr>
+            <a:cxnSpLocks/>
+            <a:stCxn id="10" idx="6"/>
+          </p:cNvCxnSpPr>
+          <p:nvPr/>
+        </p:nvCxnSpPr>
+        <p:spPr>
+          <a:xfrm>
+            <a:off x="6451600" y="1948765"/>
+            <a:ext cx="2406647" cy="0"/>
+          </a:xfrm>
+          <a:prstGeom prst="straightConnector1">
+            <a:avLst/>
+          </a:prstGeom>
+          <a:ln>
+            <a:tailEnd type="triangle"/>
+          </a:ln>
+        </p:spPr>
+        <p:style>
+          <a:lnRef idx="2">
+            <a:schemeClr val="dk1"/>
+          </a:lnRef>
+          <a:fillRef idx="0">
+            <a:schemeClr val="dk1"/>
+          </a:fillRef>
+          <a:effectRef idx="1">
+            <a:schemeClr val="dk1"/>
+          </a:effectRef>
+          <a:fontRef idx="minor">
+            <a:schemeClr val="tx1"/>
+          </a:fontRef>
+        </p:style>
+      </p:cxnSp>
+      <p:sp>
+        <p:nvSpPr>
+          <p:cNvPr id="26" name="Rechteck 25">
+            <a:extLst>
+              <a:ext uri="{FF2B5EF4-FFF2-40B4-BE49-F238E27FC236}">
+                <a16:creationId xmlns:a16="http://schemas.microsoft.com/office/drawing/2014/main" id="{710BE477-1881-00C3-F265-F8678C72A84F}"/>
+              </a:ext>
+            </a:extLst>
+          </p:cNvPr>
+          <p:cNvSpPr/>
+          <p:nvPr/>
+        </p:nvSpPr>
+        <p:spPr>
+          <a:xfrm>
+            <a:off x="8896352" y="1596470"/>
+            <a:ext cx="1739895" cy="698499"/>
+          </a:xfrm>
+          <a:prstGeom prst="rect">
+            <a:avLst/>
+          </a:prstGeom>
+          <a:noFill/>
+          <a:ln>
+            <a:noFill/>
+          </a:ln>
+        </p:spPr>
+        <p:style>
+          <a:lnRef idx="0">
+            <a:scrgbClr r="0" g="0" b="0"/>
+          </a:lnRef>
+          <a:fillRef idx="0">
+            <a:scrgbClr r="0" g="0" b="0"/>
+          </a:fillRef>
+          <a:effectRef idx="0">
+            <a:scrgbClr r="0" g="0" b="0"/>
+          </a:effectRef>
+          <a:fontRef idx="minor">
+            <a:schemeClr val="dk1"/>
+          </a:fontRef>
+        </p:style>
+        <p:txBody>
+          <a:bodyPr rtlCol="0" anchor="ctr"/>
+          <a:lstStyle/>
+          <a:p>
+            <a:pPr algn="ctr"/>
+            <a:r>
+              <a:rPr lang="de-AT" dirty="0"/>
+              <a:t>Sensor Output</a:t>
+            </a:r>
+            <a:endParaRPr lang="de-DE" dirty="0"/>
+          </a:p>
+        </p:txBody>
+      </p:sp>
+      <p:sp>
+        <p:nvSpPr>
+          <p:cNvPr id="28" name="Textfeld 27">
+            <a:extLst>
+              <a:ext uri="{FF2B5EF4-FFF2-40B4-BE49-F238E27FC236}">
+                <a16:creationId xmlns:a16="http://schemas.microsoft.com/office/drawing/2014/main" id="{5BEAFEE3-1A55-6FC8-64B1-A35704A4A4FB}"/>
+              </a:ext>
+            </a:extLst>
+          </p:cNvPr>
+          <p:cNvSpPr txBox="1"/>
+          <p:nvPr/>
+        </p:nvSpPr>
+        <p:spPr>
+          <a:xfrm>
+            <a:off x="7207247" y="2768515"/>
+            <a:ext cx="1397000" cy="698497"/>
+          </a:xfrm>
+          <a:prstGeom prst="rect">
+            <a:avLst/>
+          </a:prstGeom>
+        </p:spPr>
+        <p:style>
+          <a:lnRef idx="2">
+            <a:schemeClr val="dk1"/>
+          </a:lnRef>
+          <a:fillRef idx="1">
+            <a:schemeClr val="lt1"/>
+          </a:fillRef>
+          <a:effectRef idx="0">
+            <a:schemeClr val="dk1"/>
+          </a:effectRef>
+          <a:fontRef idx="minor">
+            <a:schemeClr val="dk1"/>
+          </a:fontRef>
+        </p:style>
+        <p:txBody>
+          <a:bodyPr wrap="square" rtlCol="0" anchor="ctr">
+            <a:noAutofit/>
+          </a:bodyPr>
+          <a:lstStyle/>
+          <a:p>
+            <a:pPr algn="ctr"/>
+            <a:r>
+              <a:rPr lang="de-AT" dirty="0" err="1"/>
+              <a:t>Lowpass</a:t>
+            </a:r>
+            <a:r>
+              <a:rPr lang="de-AT" dirty="0"/>
+              <a:t> Filter</a:t>
+            </a:r>
+            <a:endParaRPr lang="de-DE" dirty="0"/>
+          </a:p>
+        </p:txBody>
+      </p:sp>
+      <p:cxnSp>
+        <p:nvCxnSpPr>
+          <p:cNvPr id="32" name="Gerade Verbindung mit Pfeil 31">
+            <a:extLst>
+              <a:ext uri="{FF2B5EF4-FFF2-40B4-BE49-F238E27FC236}">
+                <a16:creationId xmlns:a16="http://schemas.microsoft.com/office/drawing/2014/main" id="{761D9C94-38BC-0A38-EFF2-EE514A46E6DF}"/>
+              </a:ext>
+            </a:extLst>
+          </p:cNvPr>
+          <p:cNvCxnSpPr>
+            <a:endCxn id="28" idx="0"/>
+          </p:cNvCxnSpPr>
+          <p:nvPr/>
+        </p:nvCxnSpPr>
+        <p:spPr>
+          <a:xfrm>
+            <a:off x="7905747" y="1948765"/>
+            <a:ext cx="0" cy="819750"/>
+          </a:xfrm>
+          <a:prstGeom prst="straightConnector1">
+            <a:avLst/>
+          </a:prstGeom>
+          <a:ln>
+            <a:tailEnd type="triangle"/>
+          </a:ln>
+        </p:spPr>
+        <p:style>
+          <a:lnRef idx="2">
+            <a:schemeClr val="dk1"/>
+          </a:lnRef>
+          <a:fillRef idx="0">
+            <a:schemeClr val="dk1"/>
+          </a:fillRef>
+          <a:effectRef idx="1">
+            <a:schemeClr val="dk1"/>
+          </a:effectRef>
+          <a:fontRef idx="minor">
+            <a:schemeClr val="tx1"/>
+          </a:fontRef>
+        </p:style>
+      </p:cxnSp>
+      <p:cxnSp>
+        <p:nvCxnSpPr>
+          <p:cNvPr id="33" name="Gerade Verbindung mit Pfeil 32">
+            <a:extLst>
+              <a:ext uri="{FF2B5EF4-FFF2-40B4-BE49-F238E27FC236}">
+                <a16:creationId xmlns:a16="http://schemas.microsoft.com/office/drawing/2014/main" id="{52BA0D3D-0A29-62E1-288B-A3C85EB041AC}"/>
+              </a:ext>
+            </a:extLst>
+          </p:cNvPr>
+          <p:cNvCxnSpPr>
+            <a:cxnSpLocks/>
+            <a:stCxn id="38" idx="4"/>
+          </p:cNvCxnSpPr>
+          <p:nvPr/>
+        </p:nvCxnSpPr>
+        <p:spPr>
+          <a:xfrm>
+            <a:off x="7905747" y="3962315"/>
+            <a:ext cx="0" cy="324446"/>
+          </a:xfrm>
+          <a:prstGeom prst="straightConnector1">
+            <a:avLst/>
+          </a:prstGeom>
+          <a:ln>
+            <a:tailEnd type="triangle"/>
+          </a:ln>
+        </p:spPr>
+        <p:style>
+          <a:lnRef idx="2">
+            <a:schemeClr val="dk1"/>
+          </a:lnRef>
+          <a:fillRef idx="0">
+            <a:schemeClr val="dk1"/>
+          </a:fillRef>
+          <a:effectRef idx="1">
+            <a:schemeClr val="dk1"/>
+          </a:effectRef>
+          <a:fontRef idx="minor">
+            <a:schemeClr val="tx1"/>
+          </a:fontRef>
+        </p:style>
+      </p:cxnSp>
+      <p:sp>
+        <p:nvSpPr>
+          <p:cNvPr id="38" name="Ellipse 37">
+            <a:extLst>
+              <a:ext uri="{FF2B5EF4-FFF2-40B4-BE49-F238E27FC236}">
+                <a16:creationId xmlns:a16="http://schemas.microsoft.com/office/drawing/2014/main" id="{8D725B5D-B06F-84B5-2C0A-19C788259415}"/>
+              </a:ext>
+            </a:extLst>
+          </p:cNvPr>
+          <p:cNvSpPr/>
+          <p:nvPr/>
+        </p:nvSpPr>
+        <p:spPr>
+          <a:xfrm>
+            <a:off x="7791447" y="3733715"/>
+            <a:ext cx="228600" cy="228600"/>
+          </a:xfrm>
+          <a:prstGeom prst="ellipse">
+            <a:avLst/>
+          </a:prstGeom>
+        </p:spPr>
+        <p:style>
+          <a:lnRef idx="2">
+            <a:schemeClr val="dk1"/>
+          </a:lnRef>
+          <a:fillRef idx="1">
+            <a:schemeClr val="lt1"/>
+          </a:fillRef>
+          <a:effectRef idx="0">
+            <a:schemeClr val="dk1"/>
+          </a:effectRef>
+          <a:fontRef idx="minor">
+            <a:schemeClr val="dk1"/>
+          </a:fontRef>
+        </p:style>
+        <p:txBody>
+          <a:bodyPr rtlCol="0" anchor="ctr"/>
+          <a:lstStyle/>
+          <a:p>
+            <a:pPr algn="ctr"/>
+            <a:endParaRPr lang="de-DE"/>
+          </a:p>
+        </p:txBody>
+      </p:sp>
+      <p:cxnSp>
+        <p:nvCxnSpPr>
+          <p:cNvPr id="40" name="Gerade Verbindung mit Pfeil 39">
+            <a:extLst>
+              <a:ext uri="{FF2B5EF4-FFF2-40B4-BE49-F238E27FC236}">
+                <a16:creationId xmlns:a16="http://schemas.microsoft.com/office/drawing/2014/main" id="{CFF60D36-C78F-068B-1146-5B2BD015091F}"/>
+              </a:ext>
+            </a:extLst>
+          </p:cNvPr>
+          <p:cNvCxnSpPr>
+            <a:cxnSpLocks/>
+            <a:stCxn id="28" idx="2"/>
+            <a:endCxn id="38" idx="0"/>
+          </p:cNvCxnSpPr>
+          <p:nvPr/>
+        </p:nvCxnSpPr>
+        <p:spPr>
+          <a:xfrm>
+            <a:off x="7905747" y="3467012"/>
+            <a:ext cx="0" cy="266703"/>
+          </a:xfrm>
+          <a:prstGeom prst="straightConnector1">
+            <a:avLst/>
+          </a:prstGeom>
+          <a:ln>
+            <a:tailEnd type="triangle"/>
+          </a:ln>
+        </p:spPr>
+        <p:style>
+          <a:lnRef idx="2">
+            <a:schemeClr val="dk1"/>
+          </a:lnRef>
+          <a:fillRef idx="0">
+            <a:schemeClr val="dk1"/>
+          </a:fillRef>
+          <a:effectRef idx="1">
+            <a:schemeClr val="dk1"/>
+          </a:effectRef>
+          <a:fontRef idx="minor">
+            <a:schemeClr val="tx1"/>
+          </a:fontRef>
+        </p:style>
+      </p:cxnSp>
+      <p:sp>
+        <p:nvSpPr>
+          <p:cNvPr id="43" name="Rechteck 42">
+            <a:extLst>
+              <a:ext uri="{FF2B5EF4-FFF2-40B4-BE49-F238E27FC236}">
+                <a16:creationId xmlns:a16="http://schemas.microsoft.com/office/drawing/2014/main" id="{359F2ED3-B6CE-47E5-D10F-E4E23281D0BB}"/>
+              </a:ext>
+            </a:extLst>
+          </p:cNvPr>
+          <p:cNvSpPr/>
+          <p:nvPr/>
+        </p:nvSpPr>
+        <p:spPr>
+          <a:xfrm>
+            <a:off x="8896352" y="3565484"/>
+            <a:ext cx="1098552" cy="565061"/>
+          </a:xfrm>
+          <a:prstGeom prst="rect">
+            <a:avLst/>
+          </a:prstGeom>
+          <a:noFill/>
+          <a:ln>
+            <a:noFill/>
+          </a:ln>
+        </p:spPr>
+        <p:style>
+          <a:lnRef idx="0">
+            <a:scrgbClr r="0" g="0" b="0"/>
+          </a:lnRef>
+          <a:fillRef idx="0">
+            <a:scrgbClr r="0" g="0" b="0"/>
+          </a:fillRef>
+          <a:effectRef idx="0">
+            <a:scrgbClr r="0" g="0" b="0"/>
+          </a:effectRef>
+          <a:fontRef idx="minor">
+            <a:schemeClr val="dk1"/>
+          </a:fontRef>
+        </p:style>
+        <p:txBody>
+          <a:bodyPr rtlCol="0" anchor="ctr"/>
+          <a:lstStyle/>
+          <a:p>
+            <a:pPr algn="ctr"/>
+            <a:r>
+              <a:rPr lang="de-AT" dirty="0"/>
+              <a:t>Set </a:t>
+            </a:r>
+            <a:r>
+              <a:rPr lang="de-AT" dirty="0" err="1"/>
+              <a:t>point</a:t>
+            </a:r>
+            <a:endParaRPr lang="de-DE" dirty="0"/>
+          </a:p>
+        </p:txBody>
+      </p:sp>
+      <p:cxnSp>
+        <p:nvCxnSpPr>
+          <p:cNvPr id="45" name="Gerade Verbindung mit Pfeil 44">
+            <a:extLst>
+              <a:ext uri="{FF2B5EF4-FFF2-40B4-BE49-F238E27FC236}">
+                <a16:creationId xmlns:a16="http://schemas.microsoft.com/office/drawing/2014/main" id="{10C5297E-50D6-CABE-6C1C-789934C9232B}"/>
+              </a:ext>
+            </a:extLst>
+          </p:cNvPr>
+          <p:cNvCxnSpPr>
+            <a:stCxn id="43" idx="1"/>
+            <a:endCxn id="38" idx="6"/>
+          </p:cNvCxnSpPr>
+          <p:nvPr/>
+        </p:nvCxnSpPr>
+        <p:spPr>
+          <a:xfrm flipH="1">
+            <a:off x="8020047" y="3848015"/>
+            <a:ext cx="876305" cy="0"/>
+          </a:xfrm>
+          <a:prstGeom prst="straightConnector1">
+            <a:avLst/>
+          </a:prstGeom>
+          <a:ln>
+            <a:tailEnd type="triangle"/>
+          </a:ln>
+        </p:spPr>
+        <p:style>
+          <a:lnRef idx="2">
+            <a:schemeClr val="dk1"/>
+          </a:lnRef>
+          <a:fillRef idx="0">
+            <a:schemeClr val="dk1"/>
+          </a:fillRef>
+          <a:effectRef idx="1">
+            <a:schemeClr val="dk1"/>
+          </a:effectRef>
+          <a:fontRef idx="minor">
+            <a:schemeClr val="tx1"/>
+          </a:fontRef>
+        </p:style>
+      </p:cxnSp>
+      <p:sp>
+        <p:nvSpPr>
+          <p:cNvPr id="47" name="Rechteck 46">
+            <a:extLst>
+              <a:ext uri="{FF2B5EF4-FFF2-40B4-BE49-F238E27FC236}">
+                <a16:creationId xmlns:a16="http://schemas.microsoft.com/office/drawing/2014/main" id="{798A14A9-33FE-55DF-307A-2B6DF02DB986}"/>
+              </a:ext>
+            </a:extLst>
+          </p:cNvPr>
+          <p:cNvSpPr/>
+          <p:nvPr/>
+        </p:nvSpPr>
+        <p:spPr>
+          <a:xfrm>
+            <a:off x="7969250" y="3534031"/>
+            <a:ext cx="431799" cy="313983"/>
+          </a:xfrm>
+          <a:prstGeom prst="rect">
+            <a:avLst/>
+          </a:prstGeom>
+          <a:noFill/>
+          <a:ln>
+            <a:noFill/>
+          </a:ln>
+        </p:spPr>
+        <p:style>
+          <a:lnRef idx="0">
+            <a:scrgbClr r="0" g="0" b="0"/>
+          </a:lnRef>
+          <a:fillRef idx="0">
+            <a:scrgbClr r="0" g="0" b="0"/>
+          </a:fillRef>
+          <a:effectRef idx="0">
+            <a:scrgbClr r="0" g="0" b="0"/>
+          </a:effectRef>
+          <a:fontRef idx="minor">
+            <a:schemeClr val="dk1"/>
+          </a:fontRef>
+        </p:style>
+        <p:txBody>
+          <a:bodyPr rtlCol="0" anchor="ctr"/>
+          <a:lstStyle/>
+          <a:p>
+            <a:pPr algn="ctr"/>
+            <a:r>
+              <a:rPr lang="de-AT" dirty="0"/>
+              <a:t>+</a:t>
+            </a:r>
+            <a:endParaRPr lang="de-DE" dirty="0"/>
+          </a:p>
+        </p:txBody>
+      </p:sp>
+      <p:sp>
+        <p:nvSpPr>
+          <p:cNvPr id="48" name="Textfeld 47">
+            <a:extLst>
+              <a:ext uri="{FF2B5EF4-FFF2-40B4-BE49-F238E27FC236}">
+                <a16:creationId xmlns:a16="http://schemas.microsoft.com/office/drawing/2014/main" id="{6C805B80-6B91-438A-57A1-E2F5F6138C89}"/>
+              </a:ext>
+            </a:extLst>
+          </p:cNvPr>
+          <p:cNvSpPr txBox="1"/>
+          <p:nvPr/>
+        </p:nvSpPr>
+        <p:spPr>
+          <a:xfrm>
+            <a:off x="4183769" y="4286761"/>
+            <a:ext cx="1397000" cy="698499"/>
+          </a:xfrm>
+          <a:prstGeom prst="rect">
+            <a:avLst/>
+          </a:prstGeom>
+        </p:spPr>
+        <p:style>
+          <a:lnRef idx="2">
+            <a:schemeClr val="dk1"/>
+          </a:lnRef>
+          <a:fillRef idx="1">
+            <a:schemeClr val="lt1"/>
+          </a:fillRef>
+          <a:effectRef idx="0">
+            <a:schemeClr val="dk1"/>
+          </a:effectRef>
+          <a:fontRef idx="minor">
+            <a:schemeClr val="dk1"/>
+          </a:fontRef>
+        </p:style>
+        <p:txBody>
+          <a:bodyPr wrap="square" rtlCol="0" anchor="ctr">
+            <a:noAutofit/>
+          </a:bodyPr>
+          <a:lstStyle/>
+          <a:p>
+            <a:pPr algn="ctr"/>
+            <a:r>
+              <a:rPr lang="de-AT" dirty="0"/>
+              <a:t>Lorentz </a:t>
+            </a:r>
+            <a:r>
+              <a:rPr lang="de-AT" dirty="0" err="1"/>
+              <a:t>Actuator</a:t>
+            </a:r>
+            <a:endParaRPr lang="de-DE" dirty="0"/>
+          </a:p>
+        </p:txBody>
+      </p:sp>
+      <p:sp>
+        <p:nvSpPr>
+          <p:cNvPr id="49" name="Ellipse 48">
+            <a:extLst>
+              <a:ext uri="{FF2B5EF4-FFF2-40B4-BE49-F238E27FC236}">
+                <a16:creationId xmlns:a16="http://schemas.microsoft.com/office/drawing/2014/main" id="{18AC710E-9664-23DF-AB14-A7D5F737FBB8}"/>
+              </a:ext>
+            </a:extLst>
+          </p:cNvPr>
+          <p:cNvSpPr/>
+          <p:nvPr/>
+        </p:nvSpPr>
+        <p:spPr>
+          <a:xfrm>
+            <a:off x="6292850" y="4523643"/>
+            <a:ext cx="228600" cy="228600"/>
+          </a:xfrm>
+          <a:prstGeom prst="ellipse">
+            <a:avLst/>
+          </a:prstGeom>
+        </p:spPr>
+        <p:style>
+          <a:lnRef idx="2">
+            <a:schemeClr val="dk1"/>
+          </a:lnRef>
+          <a:fillRef idx="1">
+            <a:schemeClr val="lt1"/>
+          </a:fillRef>
+          <a:effectRef idx="0">
+            <a:schemeClr val="dk1"/>
+          </a:effectRef>
+          <a:fontRef idx="minor">
+            <a:schemeClr val="dk1"/>
+          </a:fontRef>
+        </p:style>
+        <p:txBody>
+          <a:bodyPr rtlCol="0" anchor="ctr"/>
+          <a:lstStyle/>
+          <a:p>
+            <a:pPr algn="ctr"/>
+            <a:endParaRPr lang="de-DE"/>
+          </a:p>
+        </p:txBody>
+      </p:sp>
+      <p:sp>
+        <p:nvSpPr>
+          <p:cNvPr id="51" name="Rechteck 50">
+            <a:extLst>
+              <a:ext uri="{FF2B5EF4-FFF2-40B4-BE49-F238E27FC236}">
+                <a16:creationId xmlns:a16="http://schemas.microsoft.com/office/drawing/2014/main" id="{E865A2DF-0222-3A0B-45BA-7910279E6414}"/>
+              </a:ext>
+            </a:extLst>
+          </p:cNvPr>
+          <p:cNvSpPr/>
+          <p:nvPr/>
+        </p:nvSpPr>
+        <p:spPr>
+          <a:xfrm>
+            <a:off x="6407150" y="4707618"/>
+            <a:ext cx="431799" cy="313983"/>
+          </a:xfrm>
+          <a:prstGeom prst="rect">
+            <a:avLst/>
+          </a:prstGeom>
+          <a:noFill/>
+          <a:ln>
+            <a:noFill/>
+          </a:ln>
+        </p:spPr>
+        <p:style>
+          <a:lnRef idx="0">
+            <a:scrgbClr r="0" g="0" b="0"/>
+          </a:lnRef>
+          <a:fillRef idx="0">
+            <a:scrgbClr r="0" g="0" b="0"/>
+          </a:fillRef>
+          <a:effectRef idx="0">
+            <a:scrgbClr r="0" g="0" b="0"/>
+          </a:effectRef>
+          <a:fontRef idx="minor">
+            <a:schemeClr val="dk1"/>
+          </a:fontRef>
+        </p:style>
+        <p:txBody>
+          <a:bodyPr rtlCol="0" anchor="ctr"/>
+          <a:lstStyle/>
+          <a:p>
+            <a:pPr algn="ctr"/>
+            <a:r>
+              <a:rPr lang="de-AT" dirty="0"/>
+              <a:t>+</a:t>
+            </a:r>
+            <a:endParaRPr lang="de-DE" dirty="0"/>
+          </a:p>
+        </p:txBody>
+      </p:sp>
+      <p:cxnSp>
+        <p:nvCxnSpPr>
+          <p:cNvPr id="54" name="Gerade Verbindung mit Pfeil 53">
+            <a:extLst>
+              <a:ext uri="{FF2B5EF4-FFF2-40B4-BE49-F238E27FC236}">
+                <a16:creationId xmlns:a16="http://schemas.microsoft.com/office/drawing/2014/main" id="{58EBAB0F-E45E-201C-88B9-42475186E470}"/>
+              </a:ext>
+            </a:extLst>
+          </p:cNvPr>
+          <p:cNvCxnSpPr>
+            <a:cxnSpLocks/>
+            <a:stCxn id="49" idx="2"/>
+            <a:endCxn id="48" idx="3"/>
+          </p:cNvCxnSpPr>
+          <p:nvPr/>
+        </p:nvCxnSpPr>
+        <p:spPr>
+          <a:xfrm flipH="1" flipV="1">
+            <a:off x="5580769" y="4636011"/>
+            <a:ext cx="712081" cy="1932"/>
+          </a:xfrm>
+          <a:prstGeom prst="straightConnector1">
+            <a:avLst/>
+          </a:prstGeom>
+          <a:ln>
+            <a:tailEnd type="triangle"/>
+          </a:ln>
+        </p:spPr>
+        <p:style>
+          <a:lnRef idx="2">
+            <a:schemeClr val="dk1"/>
+          </a:lnRef>
+          <a:fillRef idx="0">
+            <a:schemeClr val="dk1"/>
+          </a:fillRef>
+          <a:effectRef idx="1">
+            <a:schemeClr val="dk1"/>
+          </a:effectRef>
+          <a:fontRef idx="minor">
+            <a:schemeClr val="tx1"/>
+          </a:fontRef>
+        </p:style>
+      </p:cxnSp>
+      <p:cxnSp>
+        <p:nvCxnSpPr>
+          <p:cNvPr id="57" name="Gerade Verbindung mit Pfeil 56">
+            <a:extLst>
+              <a:ext uri="{FF2B5EF4-FFF2-40B4-BE49-F238E27FC236}">
+                <a16:creationId xmlns:a16="http://schemas.microsoft.com/office/drawing/2014/main" id="{7E6C1CB3-968B-5F3F-43CB-39A13EA08ABC}"/>
+              </a:ext>
+            </a:extLst>
+          </p:cNvPr>
+          <p:cNvCxnSpPr>
+            <a:cxnSpLocks/>
+            <a:endCxn id="49" idx="4"/>
+          </p:cNvCxnSpPr>
+          <p:nvPr/>
+        </p:nvCxnSpPr>
+        <p:spPr>
+          <a:xfrm flipV="1">
+            <a:off x="6407150" y="4752243"/>
+            <a:ext cx="0" cy="509287"/>
+          </a:xfrm>
+          <a:prstGeom prst="straightConnector1">
+            <a:avLst/>
+          </a:prstGeom>
+          <a:ln>
+            <a:tailEnd type="triangle"/>
+          </a:ln>
+        </p:spPr>
+        <p:style>
+          <a:lnRef idx="2">
+            <a:schemeClr val="dk1"/>
+          </a:lnRef>
+          <a:fillRef idx="0">
+            <a:schemeClr val="dk1"/>
+          </a:fillRef>
+          <a:effectRef idx="1">
+            <a:schemeClr val="dk1"/>
+          </a:effectRef>
+          <a:fontRef idx="minor">
+            <a:schemeClr val="tx1"/>
+          </a:fontRef>
+        </p:style>
+      </p:cxnSp>
+      <p:sp>
+        <p:nvSpPr>
+          <p:cNvPr id="60" name="Rechteck 59">
+            <a:extLst>
+              <a:ext uri="{FF2B5EF4-FFF2-40B4-BE49-F238E27FC236}">
+                <a16:creationId xmlns:a16="http://schemas.microsoft.com/office/drawing/2014/main" id="{08920FDF-1FEE-AFD8-95D4-CD69BAE72AC1}"/>
+              </a:ext>
+            </a:extLst>
+          </p:cNvPr>
+          <p:cNvSpPr/>
+          <p:nvPr/>
+        </p:nvSpPr>
+        <p:spPr>
+          <a:xfrm>
+            <a:off x="5537202" y="5235949"/>
+            <a:ext cx="1739895" cy="698499"/>
+          </a:xfrm>
+          <a:prstGeom prst="rect">
+            <a:avLst/>
+          </a:prstGeom>
+          <a:noFill/>
+          <a:ln>
+            <a:noFill/>
+          </a:ln>
+        </p:spPr>
+        <p:style>
+          <a:lnRef idx="0">
+            <a:scrgbClr r="0" g="0" b="0"/>
+          </a:lnRef>
+          <a:fillRef idx="0">
+            <a:scrgbClr r="0" g="0" b="0"/>
+          </a:fillRef>
+          <a:effectRef idx="0">
+            <a:scrgbClr r="0" g="0" b="0"/>
+          </a:effectRef>
+          <a:fontRef idx="minor">
+            <a:schemeClr val="dk1"/>
+          </a:fontRef>
+        </p:style>
+        <p:txBody>
+          <a:bodyPr rtlCol="0" anchor="ctr"/>
+          <a:lstStyle/>
+          <a:p>
+            <a:pPr algn="ctr"/>
+            <a:r>
+              <a:rPr lang="de-AT" dirty="0" err="1"/>
+              <a:t>Actuation</a:t>
+            </a:r>
+            <a:r>
+              <a:rPr lang="de-AT" dirty="0"/>
+              <a:t> Signal</a:t>
+            </a:r>
+            <a:endParaRPr lang="de-DE" dirty="0"/>
+          </a:p>
+        </p:txBody>
+      </p:sp>
+      <p:sp>
+        <p:nvSpPr>
+          <p:cNvPr id="62" name="Ellipse 61">
+            <a:extLst>
+              <a:ext uri="{FF2B5EF4-FFF2-40B4-BE49-F238E27FC236}">
+                <a16:creationId xmlns:a16="http://schemas.microsoft.com/office/drawing/2014/main" id="{C6FD8EA4-5935-80E5-7A36-E08750904E23}"/>
+              </a:ext>
+            </a:extLst>
+          </p:cNvPr>
+          <p:cNvSpPr/>
+          <p:nvPr/>
+        </p:nvSpPr>
+        <p:spPr>
+          <a:xfrm>
+            <a:off x="2196226" y="4523643"/>
+            <a:ext cx="228600" cy="228600"/>
+          </a:xfrm>
+          <a:prstGeom prst="ellipse">
+            <a:avLst/>
+          </a:prstGeom>
+        </p:spPr>
+        <p:style>
+          <a:lnRef idx="2">
+            <a:schemeClr val="dk1"/>
+          </a:lnRef>
+          <a:fillRef idx="1">
+            <a:schemeClr val="lt1"/>
+          </a:fillRef>
+          <a:effectRef idx="0">
+            <a:schemeClr val="dk1"/>
+          </a:effectRef>
+          <a:fontRef idx="minor">
+            <a:schemeClr val="dk1"/>
+          </a:fontRef>
+        </p:style>
+        <p:txBody>
+          <a:bodyPr rtlCol="0" anchor="ctr"/>
+          <a:lstStyle/>
+          <a:p>
+            <a:pPr algn="ctr"/>
+            <a:endParaRPr lang="de-DE"/>
+          </a:p>
+        </p:txBody>
+      </p:sp>
+      <p:sp>
+        <p:nvSpPr>
+          <p:cNvPr id="63" name="Rechteck 62">
+            <a:extLst>
+              <a:ext uri="{FF2B5EF4-FFF2-40B4-BE49-F238E27FC236}">
+                <a16:creationId xmlns:a16="http://schemas.microsoft.com/office/drawing/2014/main" id="{1460B4ED-DB87-EBA4-FCA9-91F90B105351}"/>
+              </a:ext>
+            </a:extLst>
+          </p:cNvPr>
+          <p:cNvSpPr/>
+          <p:nvPr/>
+        </p:nvSpPr>
+        <p:spPr>
+          <a:xfrm>
+            <a:off x="2310526" y="4707618"/>
+            <a:ext cx="431799" cy="313983"/>
+          </a:xfrm>
+          <a:prstGeom prst="rect">
+            <a:avLst/>
+          </a:prstGeom>
+          <a:noFill/>
+          <a:ln>
+            <a:noFill/>
+          </a:ln>
+        </p:spPr>
+        <p:style>
+          <a:lnRef idx="0">
+            <a:scrgbClr r="0" g="0" b="0"/>
+          </a:lnRef>
+          <a:fillRef idx="0">
+            <a:scrgbClr r="0" g="0" b="0"/>
+          </a:fillRef>
+          <a:effectRef idx="0">
+            <a:scrgbClr r="0" g="0" b="0"/>
+          </a:effectRef>
+          <a:fontRef idx="minor">
+            <a:schemeClr val="dk1"/>
+          </a:fontRef>
+        </p:style>
+        <p:txBody>
+          <a:bodyPr rtlCol="0" anchor="ctr"/>
+          <a:lstStyle/>
+          <a:p>
+            <a:pPr algn="ctr"/>
+            <a:r>
+              <a:rPr lang="de-AT" dirty="0"/>
+              <a:t>+</a:t>
+            </a:r>
+            <a:endParaRPr lang="de-DE" dirty="0"/>
+          </a:p>
+        </p:txBody>
+      </p:sp>
+      <p:cxnSp>
+        <p:nvCxnSpPr>
+          <p:cNvPr id="64" name="Gerade Verbindung mit Pfeil 63">
+            <a:extLst>
+              <a:ext uri="{FF2B5EF4-FFF2-40B4-BE49-F238E27FC236}">
+                <a16:creationId xmlns:a16="http://schemas.microsoft.com/office/drawing/2014/main" id="{4ADE2000-64BA-7506-14CD-983EA935A0F8}"/>
+              </a:ext>
+            </a:extLst>
+          </p:cNvPr>
+          <p:cNvCxnSpPr>
+            <a:cxnSpLocks/>
+            <a:endCxn id="62" idx="4"/>
+          </p:cNvCxnSpPr>
+          <p:nvPr/>
+        </p:nvCxnSpPr>
+        <p:spPr>
+          <a:xfrm flipV="1">
+            <a:off x="2310526" y="4752243"/>
+            <a:ext cx="0" cy="509287"/>
+          </a:xfrm>
+          <a:prstGeom prst="straightConnector1">
+            <a:avLst/>
+          </a:prstGeom>
+          <a:ln>
+            <a:tailEnd type="triangle"/>
+          </a:ln>
+        </p:spPr>
+        <p:style>
+          <a:lnRef idx="2">
+            <a:schemeClr val="dk1"/>
+          </a:lnRef>
+          <a:fillRef idx="0">
+            <a:schemeClr val="dk1"/>
+          </a:fillRef>
+          <a:effectRef idx="1">
+            <a:schemeClr val="dk1"/>
+          </a:effectRef>
+          <a:fontRef idx="minor">
+            <a:schemeClr val="tx1"/>
+          </a:fontRef>
+        </p:style>
+      </p:cxnSp>
+      <p:sp>
+        <p:nvSpPr>
+          <p:cNvPr id="65" name="Rechteck 64">
+            <a:extLst>
+              <a:ext uri="{FF2B5EF4-FFF2-40B4-BE49-F238E27FC236}">
+                <a16:creationId xmlns:a16="http://schemas.microsoft.com/office/drawing/2014/main" id="{169C5131-40A4-EA32-2330-9CB861ADCE0F}"/>
+              </a:ext>
+            </a:extLst>
+          </p:cNvPr>
+          <p:cNvSpPr/>
+          <p:nvPr/>
+        </p:nvSpPr>
+        <p:spPr>
+          <a:xfrm>
+            <a:off x="1440578" y="5235949"/>
+            <a:ext cx="1739895" cy="698499"/>
+          </a:xfrm>
+          <a:prstGeom prst="rect">
+            <a:avLst/>
+          </a:prstGeom>
+          <a:noFill/>
+          <a:ln>
+            <a:noFill/>
+          </a:ln>
+        </p:spPr>
+        <p:style>
+          <a:lnRef idx="0">
+            <a:scrgbClr r="0" g="0" b="0"/>
+          </a:lnRef>
+          <a:fillRef idx="0">
+            <a:scrgbClr r="0" g="0" b="0"/>
+          </a:fillRef>
+          <a:effectRef idx="0">
+            <a:scrgbClr r="0" g="0" b="0"/>
+          </a:effectRef>
+          <a:fontRef idx="minor">
+            <a:schemeClr val="dk1"/>
+          </a:fontRef>
+        </p:style>
+        <p:txBody>
+          <a:bodyPr rtlCol="0" anchor="ctr"/>
+          <a:lstStyle/>
+          <a:p>
+            <a:pPr algn="ctr"/>
+            <a:r>
+              <a:rPr lang="de-AT" dirty="0"/>
+              <a:t>Sample </a:t>
+            </a:r>
+            <a:r>
+              <a:rPr lang="de-AT" dirty="0" err="1"/>
+              <a:t>Topography</a:t>
+            </a:r>
+            <a:endParaRPr lang="de-DE" dirty="0"/>
+          </a:p>
+        </p:txBody>
+      </p:sp>
+      <p:cxnSp>
+        <p:nvCxnSpPr>
+          <p:cNvPr id="66" name="Gerade Verbindung mit Pfeil 65">
+            <a:extLst>
+              <a:ext uri="{FF2B5EF4-FFF2-40B4-BE49-F238E27FC236}">
+                <a16:creationId xmlns:a16="http://schemas.microsoft.com/office/drawing/2014/main" id="{2B881D0B-B01C-6869-93B6-06351B064DEB}"/>
+              </a:ext>
+            </a:extLst>
+          </p:cNvPr>
+          <p:cNvCxnSpPr>
+            <a:cxnSpLocks/>
+            <a:stCxn id="48" idx="1"/>
+            <a:endCxn id="62" idx="6"/>
+          </p:cNvCxnSpPr>
+          <p:nvPr/>
+        </p:nvCxnSpPr>
+        <p:spPr>
+          <a:xfrm flipH="1">
+            <a:off x="2424826" y="4636011"/>
+            <a:ext cx="1758943" cy="1932"/>
+          </a:xfrm>
+          <a:prstGeom prst="straightConnector1">
+            <a:avLst/>
+          </a:prstGeom>
+          <a:ln>
+            <a:tailEnd type="triangle"/>
+          </a:ln>
+        </p:spPr>
+        <p:style>
+          <a:lnRef idx="2">
+            <a:schemeClr val="dk1"/>
+          </a:lnRef>
+          <a:fillRef idx="0">
+            <a:schemeClr val="dk1"/>
+          </a:fillRef>
+          <a:effectRef idx="1">
+            <a:schemeClr val="dk1"/>
+          </a:effectRef>
+          <a:fontRef idx="minor">
+            <a:schemeClr val="tx1"/>
+          </a:fontRef>
+        </p:style>
+      </p:cxnSp>
+      <p:cxnSp>
+        <p:nvCxnSpPr>
+          <p:cNvPr id="69" name="Gerade Verbindung mit Pfeil 68">
+            <a:extLst>
+              <a:ext uri="{FF2B5EF4-FFF2-40B4-BE49-F238E27FC236}">
+                <a16:creationId xmlns:a16="http://schemas.microsoft.com/office/drawing/2014/main" id="{A2777838-CCF1-1C20-5D59-F0B2641C1A19}"/>
+              </a:ext>
+            </a:extLst>
+          </p:cNvPr>
+          <p:cNvCxnSpPr>
+            <a:cxnSpLocks/>
+            <a:stCxn id="62" idx="0"/>
+            <a:endCxn id="73" idx="2"/>
+          </p:cNvCxnSpPr>
+          <p:nvPr/>
+        </p:nvCxnSpPr>
+        <p:spPr>
+          <a:xfrm flipV="1">
+            <a:off x="2310526" y="3816261"/>
+            <a:ext cx="2285" cy="707382"/>
+          </a:xfrm>
+          <a:prstGeom prst="straightConnector1">
+            <a:avLst/>
+          </a:prstGeom>
+          <a:ln>
+            <a:tailEnd type="triangle"/>
+          </a:ln>
+        </p:spPr>
+        <p:style>
+          <a:lnRef idx="2">
+            <a:schemeClr val="dk1"/>
+          </a:lnRef>
+          <a:fillRef idx="0">
+            <a:schemeClr val="dk1"/>
+          </a:fillRef>
+          <a:effectRef idx="1">
+            <a:schemeClr val="dk1"/>
+          </a:effectRef>
+          <a:fontRef idx="minor">
+            <a:schemeClr val="tx1"/>
+          </a:fontRef>
+        </p:style>
+      </p:cxnSp>
+      <p:sp>
+        <p:nvSpPr>
+          <p:cNvPr id="73" name="Textfeld 72">
+            <a:extLst>
+              <a:ext uri="{FF2B5EF4-FFF2-40B4-BE49-F238E27FC236}">
+                <a16:creationId xmlns:a16="http://schemas.microsoft.com/office/drawing/2014/main" id="{B11E985E-E26A-19BD-0001-84E95C2CF3C6}"/>
+              </a:ext>
+            </a:extLst>
+          </p:cNvPr>
+          <p:cNvSpPr txBox="1"/>
+          <p:nvPr/>
+        </p:nvSpPr>
+        <p:spPr>
+          <a:xfrm>
+            <a:off x="1614311" y="3117762"/>
+            <a:ext cx="1397000" cy="698499"/>
+          </a:xfrm>
+          <a:prstGeom prst="rect">
+            <a:avLst/>
+          </a:prstGeom>
+        </p:spPr>
+        <p:style>
+          <a:lnRef idx="2">
+            <a:schemeClr val="dk1"/>
+          </a:lnRef>
+          <a:fillRef idx="1">
+            <a:schemeClr val="lt1"/>
+          </a:fillRef>
+          <a:effectRef idx="0">
+            <a:schemeClr val="dk1"/>
+          </a:effectRef>
+          <a:fontRef idx="minor">
+            <a:schemeClr val="dk1"/>
+          </a:fontRef>
+        </p:style>
+        <p:txBody>
+          <a:bodyPr wrap="square" rtlCol="0" anchor="ctr">
+            <a:noAutofit/>
+          </a:bodyPr>
+          <a:lstStyle/>
+          <a:p>
+            <a:pPr algn="ctr"/>
+            <a:r>
+              <a:rPr lang="de-AT" dirty="0"/>
+              <a:t>AFM </a:t>
+            </a:r>
+            <a:r>
+              <a:rPr lang="de-AT" dirty="0" err="1"/>
+              <a:t>Mechanics</a:t>
+            </a:r>
+            <a:endParaRPr lang="de-DE" dirty="0"/>
+          </a:p>
+        </p:txBody>
+      </p:sp>
+      <p:cxnSp>
+        <p:nvCxnSpPr>
+          <p:cNvPr id="75" name="Gerade Verbindung mit Pfeil 74">
+            <a:extLst>
+              <a:ext uri="{FF2B5EF4-FFF2-40B4-BE49-F238E27FC236}">
+                <a16:creationId xmlns:a16="http://schemas.microsoft.com/office/drawing/2014/main" id="{8C070B13-E292-BF01-494B-ED5BDF0D2655}"/>
+              </a:ext>
+            </a:extLst>
+          </p:cNvPr>
+          <p:cNvCxnSpPr>
+            <a:cxnSpLocks/>
+            <a:stCxn id="73" idx="0"/>
+            <a:endCxn id="4" idx="2"/>
+          </p:cNvCxnSpPr>
+          <p:nvPr/>
+        </p:nvCxnSpPr>
+        <p:spPr>
+          <a:xfrm flipV="1">
+            <a:off x="2312811" y="2294969"/>
+            <a:ext cx="0" cy="822793"/>
+          </a:xfrm>
+          <a:prstGeom prst="straightConnector1">
+            <a:avLst/>
+          </a:prstGeom>
+          <a:ln>
+            <a:tailEnd type="triangle"/>
+          </a:ln>
+        </p:spPr>
+        <p:style>
+          <a:lnRef idx="2">
+            <a:schemeClr val="dk1"/>
+          </a:lnRef>
+          <a:fillRef idx="0">
+            <a:schemeClr val="dk1"/>
+          </a:fillRef>
+          <a:effectRef idx="1">
+            <a:schemeClr val="dk1"/>
+          </a:effectRef>
+          <a:fontRef idx="minor">
+            <a:schemeClr val="tx1"/>
+          </a:fontRef>
+        </p:style>
+      </p:cxnSp>
+      <p:sp>
+        <p:nvSpPr>
+          <p:cNvPr id="2" name="Rechteck 1">
+            <a:extLst>
+              <a:ext uri="{FF2B5EF4-FFF2-40B4-BE49-F238E27FC236}">
+                <a16:creationId xmlns:a16="http://schemas.microsoft.com/office/drawing/2014/main" id="{9D1B3DFA-7722-FA12-A09D-EFB801FF492B}"/>
+              </a:ext>
+            </a:extLst>
+          </p:cNvPr>
+          <p:cNvSpPr/>
+          <p:nvPr/>
+        </p:nvSpPr>
+        <p:spPr>
+          <a:xfrm>
+            <a:off x="5547606" y="5788968"/>
+            <a:ext cx="1739895" cy="698499"/>
+          </a:xfrm>
+          <a:prstGeom prst="rect">
+            <a:avLst/>
+          </a:prstGeom>
+          <a:noFill/>
+          <a:ln>
+            <a:noFill/>
+          </a:ln>
+        </p:spPr>
+        <p:style>
+          <a:lnRef idx="0">
+            <a:scrgbClr r="0" g="0" b="0"/>
+          </a:lnRef>
+          <a:fillRef idx="0">
+            <a:scrgbClr r="0" g="0" b="0"/>
+          </a:fillRef>
+          <a:effectRef idx="0">
+            <a:scrgbClr r="0" g="0" b="0"/>
+          </a:effectRef>
+          <a:fontRef idx="minor">
+            <a:schemeClr val="dk1"/>
+          </a:fontRef>
+        </p:style>
+        <p:txBody>
+          <a:bodyPr rtlCol="0" anchor="ctr"/>
+          <a:lstStyle/>
+          <a:p>
+            <a:pPr algn="ctr"/>
+            <a:r>
+              <a:rPr lang="de-AT" dirty="0">
+                <a:solidFill>
+                  <a:srgbClr val="FF0000"/>
+                </a:solidFill>
+              </a:rPr>
+              <a:t>20.4 Hz</a:t>
+            </a:r>
+            <a:endParaRPr lang="de-DE" dirty="0">
+              <a:solidFill>
+                <a:srgbClr val="FF0000"/>
+              </a:solidFill>
+            </a:endParaRPr>
+          </a:p>
+        </p:txBody>
+      </p:sp>
+      <p:sp>
+        <p:nvSpPr>
+          <p:cNvPr id="3" name="Rechteck 2">
+            <a:extLst>
+              <a:ext uri="{FF2B5EF4-FFF2-40B4-BE49-F238E27FC236}">
+                <a16:creationId xmlns:a16="http://schemas.microsoft.com/office/drawing/2014/main" id="{7F3F5585-B823-A7CC-4695-00A83A88C6AF}"/>
+              </a:ext>
+            </a:extLst>
+          </p:cNvPr>
+          <p:cNvSpPr/>
+          <p:nvPr/>
+        </p:nvSpPr>
+        <p:spPr>
+          <a:xfrm>
+            <a:off x="8687651" y="2722243"/>
+            <a:ext cx="876304" cy="698499"/>
+          </a:xfrm>
+          <a:prstGeom prst="rect">
+            <a:avLst/>
+          </a:prstGeom>
+          <a:noFill/>
+          <a:ln>
+            <a:noFill/>
+          </a:ln>
+        </p:spPr>
+        <p:style>
+          <a:lnRef idx="0">
+            <a:scrgbClr r="0" g="0" b="0"/>
+          </a:lnRef>
+          <a:fillRef idx="0">
+            <a:scrgbClr r="0" g="0" b="0"/>
+          </a:fillRef>
+          <a:effectRef idx="0">
+            <a:scrgbClr r="0" g="0" b="0"/>
+          </a:effectRef>
+          <a:fontRef idx="minor">
+            <a:schemeClr val="dk1"/>
+          </a:fontRef>
+        </p:style>
+        <p:txBody>
+          <a:bodyPr rtlCol="0" anchor="ctr"/>
+          <a:lstStyle/>
+          <a:p>
+            <a:pPr algn="ctr"/>
+            <a:r>
+              <a:rPr lang="de-AT" dirty="0">
+                <a:solidFill>
+                  <a:srgbClr val="FF0000"/>
+                </a:solidFill>
+              </a:rPr>
+              <a:t>14 Hz</a:t>
+            </a:r>
+          </a:p>
+          <a:p>
+            <a:pPr algn="ctr"/>
+            <a:r>
+              <a:rPr lang="de-AT" dirty="0">
+                <a:solidFill>
+                  <a:srgbClr val="FF0000"/>
+                </a:solidFill>
+              </a:rPr>
+              <a:t>0 dB</a:t>
+            </a:r>
+            <a:endParaRPr lang="de-DE" dirty="0">
+              <a:solidFill>
+                <a:srgbClr val="FF0000"/>
+              </a:solidFill>
+            </a:endParaRPr>
+          </a:p>
+        </p:txBody>
+      </p:sp>
+      <p:sp>
+        <p:nvSpPr>
+          <p:cNvPr id="6" name="Rechteck 5">
+            <a:extLst>
+              <a:ext uri="{FF2B5EF4-FFF2-40B4-BE49-F238E27FC236}">
+                <a16:creationId xmlns:a16="http://schemas.microsoft.com/office/drawing/2014/main" id="{B549E32B-6215-6996-8A2F-10D509C34743}"/>
+              </a:ext>
+            </a:extLst>
+          </p:cNvPr>
+          <p:cNvSpPr/>
+          <p:nvPr/>
+        </p:nvSpPr>
+        <p:spPr>
+          <a:xfrm>
+            <a:off x="5524061" y="3936124"/>
+            <a:ext cx="1739895" cy="698499"/>
+          </a:xfrm>
+          <a:prstGeom prst="rect">
+            <a:avLst/>
+          </a:prstGeom>
+          <a:noFill/>
+          <a:ln>
+            <a:noFill/>
+          </a:ln>
+        </p:spPr>
+        <p:style>
+          <a:lnRef idx="0">
+            <a:scrgbClr r="0" g="0" b="0"/>
+          </a:lnRef>
+          <a:fillRef idx="0">
+            <a:scrgbClr r="0" g="0" b="0"/>
+          </a:fillRef>
+          <a:effectRef idx="0">
+            <a:scrgbClr r="0" g="0" b="0"/>
+          </a:effectRef>
+          <a:fontRef idx="minor">
+            <a:schemeClr val="dk1"/>
+          </a:fontRef>
+        </p:style>
+        <p:txBody>
+          <a:bodyPr rtlCol="0" anchor="ctr"/>
+          <a:lstStyle/>
+          <a:p>
+            <a:pPr algn="ctr"/>
+            <a:r>
+              <a:rPr lang="de-AT" dirty="0" err="1">
+                <a:solidFill>
+                  <a:srgbClr val="FF0000"/>
+                </a:solidFill>
+              </a:rPr>
+              <a:t>Adder</a:t>
+            </a:r>
+            <a:endParaRPr lang="de-DE" dirty="0">
+              <a:solidFill>
+                <a:srgbClr val="FF0000"/>
+              </a:solidFill>
+            </a:endParaRPr>
+          </a:p>
+        </p:txBody>
+      </p:sp>
+      <p:sp>
+        <p:nvSpPr>
+          <p:cNvPr id="7" name="Rechteck 6">
+            <a:extLst>
+              <a:ext uri="{FF2B5EF4-FFF2-40B4-BE49-F238E27FC236}">
+                <a16:creationId xmlns:a16="http://schemas.microsoft.com/office/drawing/2014/main" id="{2518BDB1-7AC8-4218-3142-CB8D02934AD9}"/>
+              </a:ext>
+            </a:extLst>
+          </p:cNvPr>
+          <p:cNvSpPr/>
+          <p:nvPr/>
+        </p:nvSpPr>
+        <p:spPr>
+          <a:xfrm>
+            <a:off x="1439695" y="854273"/>
+            <a:ext cx="1739895" cy="698499"/>
+          </a:xfrm>
+          <a:prstGeom prst="rect">
+            <a:avLst/>
+          </a:prstGeom>
+          <a:noFill/>
+          <a:ln>
+            <a:noFill/>
+          </a:ln>
+        </p:spPr>
+        <p:style>
+          <a:lnRef idx="0">
+            <a:scrgbClr r="0" g="0" b="0"/>
+          </a:lnRef>
+          <a:fillRef idx="0">
+            <a:scrgbClr r="0" g="0" b="0"/>
+          </a:fillRef>
+          <a:effectRef idx="0">
+            <a:scrgbClr r="0" g="0" b="0"/>
+          </a:effectRef>
+          <a:fontRef idx="minor">
+            <a:schemeClr val="dk1"/>
+          </a:fontRef>
+        </p:style>
+        <p:txBody>
+          <a:bodyPr rtlCol="0" anchor="ctr"/>
+          <a:lstStyle/>
+          <a:p>
+            <a:pPr algn="ctr"/>
+            <a:r>
+              <a:rPr lang="de-AT" dirty="0">
+                <a:solidFill>
+                  <a:srgbClr val="FF0000"/>
+                </a:solidFill>
+              </a:rPr>
+              <a:t>20.4 Hz</a:t>
+            </a:r>
+          </a:p>
+          <a:p>
+            <a:pPr algn="ctr"/>
+            <a:r>
+              <a:rPr lang="de-AT" dirty="0">
+                <a:solidFill>
+                  <a:srgbClr val="FF0000"/>
+                </a:solidFill>
+              </a:rPr>
+              <a:t>185°</a:t>
+            </a:r>
+            <a:endParaRPr lang="de-DE" dirty="0">
+              <a:solidFill>
+                <a:srgbClr val="FF0000"/>
+              </a:solidFill>
+            </a:endParaRPr>
+          </a:p>
+        </p:txBody>
+      </p:sp>
+      <p:sp>
+        <p:nvSpPr>
+          <p:cNvPr id="8" name="Rechteck 7">
+            <a:extLst>
+              <a:ext uri="{FF2B5EF4-FFF2-40B4-BE49-F238E27FC236}">
+                <a16:creationId xmlns:a16="http://schemas.microsoft.com/office/drawing/2014/main" id="{B2868CBA-FFC8-F8F3-8D17-B3F391B603AD}"/>
+              </a:ext>
+            </a:extLst>
+          </p:cNvPr>
+          <p:cNvSpPr/>
+          <p:nvPr/>
+        </p:nvSpPr>
+        <p:spPr>
+          <a:xfrm>
+            <a:off x="7035799" y="4169952"/>
+            <a:ext cx="1739895" cy="698499"/>
+          </a:xfrm>
+          <a:prstGeom prst="rect">
+            <a:avLst/>
+          </a:prstGeom>
+          <a:noFill/>
+          <a:ln>
+            <a:noFill/>
+          </a:ln>
+        </p:spPr>
+        <p:style>
+          <a:lnRef idx="0">
+            <a:scrgbClr r="0" g="0" b="0"/>
+          </a:lnRef>
+          <a:fillRef idx="0">
+            <a:scrgbClr r="0" g="0" b="0"/>
+          </a:fillRef>
+          <a:effectRef idx="0">
+            <a:scrgbClr r="0" g="0" b="0"/>
+          </a:effectRef>
+          <a:fontRef idx="minor">
+            <a:schemeClr val="dk1"/>
+          </a:fontRef>
+        </p:style>
+        <p:txBody>
+          <a:bodyPr rtlCol="0" anchor="ctr"/>
+          <a:lstStyle/>
+          <a:p>
+            <a:pPr algn="ctr"/>
+            <a:r>
+              <a:rPr lang="de-AT" dirty="0" err="1">
+                <a:solidFill>
+                  <a:srgbClr val="FF0000"/>
+                </a:solidFill>
+              </a:rPr>
+              <a:t>readout</a:t>
+            </a:r>
+            <a:endParaRPr lang="de-DE" dirty="0">
+              <a:solidFill>
+                <a:srgbClr val="FF0000"/>
+              </a:solidFill>
+            </a:endParaRPr>
+          </a:p>
+        </p:txBody>
+      </p:sp>
+    </p:spTree>
+    <p:extLst>
+      <p:ext uri="{BB962C8B-B14F-4D97-AF65-F5344CB8AC3E}">
+        <p14:creationId xmlns:p14="http://schemas.microsoft.com/office/powerpoint/2010/main" val="1249881280"/>
+      </p:ext>
+    </p:extLst>
+  </p:cSld>
+  <p:clrMapOvr>
+    <a:masterClrMapping/>
+  </p:clrMapOvr>
+</p:sld>
+</file>
+
+<file path=ppt/slides/slide21.xml><?xml version="1.0" encoding="utf-8"?>
+<p:sld xmlns:a="http://schemas.openxmlformats.org/drawingml/2006/main" xmlns:r="http://schemas.openxmlformats.org/officeDocument/2006/relationships" xmlns:p="http://schemas.openxmlformats.org/presentationml/2006/main">
+  <p:cSld>
+    <p:spTree>
+      <p:nvGrpSpPr>
+        <p:cNvPr id="1" name="">
+          <a:extLst>
+            <a:ext uri="{FF2B5EF4-FFF2-40B4-BE49-F238E27FC236}">
+              <a16:creationId xmlns:a16="http://schemas.microsoft.com/office/drawing/2014/main" id="{5DA965B4-2AAB-F978-361D-6484ABCC23EB}"/>
+            </a:ext>
+          </a:extLst>
+        </p:cNvPr>
+        <p:cNvGrpSpPr/>
+        <p:nvPr/>
+      </p:nvGrpSpPr>
+      <p:grpSpPr>
+        <a:xfrm>
+          <a:off x="0" y="0"/>
+          <a:ext cx="0" cy="0"/>
+          <a:chOff x="0" y="0"/>
+          <a:chExt cx="0" cy="0"/>
+        </a:xfrm>
+      </p:grpSpPr>
+      <p:pic>
+        <p:nvPicPr>
+          <p:cNvPr id="5" name="Grafik 4">
+            <a:extLst>
+              <a:ext uri="{FF2B5EF4-FFF2-40B4-BE49-F238E27FC236}">
+                <a16:creationId xmlns:a16="http://schemas.microsoft.com/office/drawing/2014/main" id="{77433D57-BAA1-D875-B728-90DDAD4D3970}"/>
+              </a:ext>
+            </a:extLst>
+          </p:cNvPr>
+          <p:cNvPicPr>
+            <a:picLocks noChangeAspect="1"/>
+          </p:cNvPicPr>
+          <p:nvPr/>
+        </p:nvPicPr>
+        <p:blipFill>
+          <a:blip r:embed="rId2">
+            <a:extLst>
+              <a:ext uri="{28A0092B-C50C-407E-A947-70E740481C1C}">
+                <a14:useLocalDpi xmlns:a14="http://schemas.microsoft.com/office/drawing/2010/main" val="0"/>
+              </a:ext>
+            </a:extLst>
+          </a:blip>
+          <a:stretch>
+            <a:fillRect/>
+          </a:stretch>
+        </p:blipFill>
+        <p:spPr>
+          <a:xfrm>
+            <a:off x="1524000" y="0"/>
+            <a:ext cx="9144000" cy="6858000"/>
+          </a:xfrm>
+          <a:prstGeom prst="rect">
+            <a:avLst/>
+          </a:prstGeom>
+          <a:noFill/>
+          <a:ln>
+            <a:noFill/>
+          </a:ln>
+        </p:spPr>
+      </p:pic>
+      <p:cxnSp>
+        <p:nvCxnSpPr>
+          <p:cNvPr id="61" name="Gerade Verbindung mit Pfeil 60">
+            <a:extLst>
+              <a:ext uri="{FF2B5EF4-FFF2-40B4-BE49-F238E27FC236}">
+                <a16:creationId xmlns:a16="http://schemas.microsoft.com/office/drawing/2014/main" id="{305310BC-BEE7-7173-5BBB-F653478A47C4}"/>
+              </a:ext>
+            </a:extLst>
+          </p:cNvPr>
+          <p:cNvCxnSpPr>
+            <a:cxnSpLocks/>
+          </p:cNvCxnSpPr>
+          <p:nvPr/>
+        </p:nvCxnSpPr>
+        <p:spPr>
+          <a:xfrm>
+            <a:off x="2292350" y="2063816"/>
+            <a:ext cx="0" cy="1561338"/>
+          </a:xfrm>
+          <a:prstGeom prst="straightConnector1">
+            <a:avLst/>
+          </a:prstGeom>
+          <a:ln w="38100">
+            <a:solidFill>
+              <a:srgbClr val="C00000"/>
+            </a:solidFill>
+            <a:tailEnd type="triangle"/>
+          </a:ln>
+          <a:scene3d>
+            <a:camera prst="orthographicFront"/>
+            <a:lightRig rig="threePt" dir="t"/>
+          </a:scene3d>
+          <a:sp3d contourW="12700">
+            <a:contourClr>
+              <a:schemeClr val="bg1"/>
+            </a:contourClr>
+          </a:sp3d>
+        </p:spPr>
+        <p:style>
+          <a:lnRef idx="2">
+            <a:schemeClr val="accent1"/>
+          </a:lnRef>
+          <a:fillRef idx="0">
+            <a:schemeClr val="accent1"/>
+          </a:fillRef>
+          <a:effectRef idx="1">
+            <a:schemeClr val="accent1"/>
+          </a:effectRef>
+          <a:fontRef idx="minor">
+            <a:schemeClr val="tx1"/>
+          </a:fontRef>
+        </p:style>
+      </p:cxnSp>
+      <p:cxnSp>
+        <p:nvCxnSpPr>
+          <p:cNvPr id="65" name="Gerade Verbindung mit Pfeil 64">
+            <a:extLst>
+              <a:ext uri="{FF2B5EF4-FFF2-40B4-BE49-F238E27FC236}">
+                <a16:creationId xmlns:a16="http://schemas.microsoft.com/office/drawing/2014/main" id="{43293377-4231-2A17-9E68-23ACB0211117}"/>
+              </a:ext>
+            </a:extLst>
+          </p:cNvPr>
+          <p:cNvCxnSpPr>
+            <a:cxnSpLocks/>
+          </p:cNvCxnSpPr>
+          <p:nvPr/>
+        </p:nvCxnSpPr>
+        <p:spPr>
+          <a:xfrm>
+            <a:off x="2003425" y="993078"/>
+            <a:ext cx="0" cy="2398672"/>
+          </a:xfrm>
+          <a:prstGeom prst="straightConnector1">
+            <a:avLst/>
+          </a:prstGeom>
+          <a:ln w="38100">
+            <a:solidFill>
+              <a:srgbClr val="C00000"/>
+            </a:solidFill>
+            <a:tailEnd type="triangle"/>
+          </a:ln>
+          <a:scene3d>
+            <a:camera prst="orthographicFront"/>
+            <a:lightRig rig="threePt" dir="t"/>
+          </a:scene3d>
+          <a:sp3d contourW="12700">
+            <a:contourClr>
+              <a:schemeClr val="bg1"/>
+            </a:contourClr>
+          </a:sp3d>
+        </p:spPr>
+        <p:style>
+          <a:lnRef idx="2">
+            <a:schemeClr val="accent1"/>
+          </a:lnRef>
+          <a:fillRef idx="0">
+            <a:schemeClr val="accent1"/>
+          </a:fillRef>
+          <a:effectRef idx="1">
+            <a:schemeClr val="accent1"/>
+          </a:effectRef>
+          <a:fontRef idx="minor">
+            <a:schemeClr val="tx1"/>
+          </a:fontRef>
+        </p:style>
+      </p:cxnSp>
+      <p:sp>
+        <p:nvSpPr>
+          <p:cNvPr id="6" name="Rechteck 5">
+            <a:extLst>
+              <a:ext uri="{FF2B5EF4-FFF2-40B4-BE49-F238E27FC236}">
+                <a16:creationId xmlns:a16="http://schemas.microsoft.com/office/drawing/2014/main" id="{CB9BDBFA-9F7F-9605-5F2F-E074CB7F6287}"/>
+              </a:ext>
+            </a:extLst>
+          </p:cNvPr>
+          <p:cNvSpPr/>
+          <p:nvPr/>
+        </p:nvSpPr>
+        <p:spPr>
+          <a:xfrm>
+            <a:off x="2616200" y="2334444"/>
+            <a:ext cx="1727200" cy="369332"/>
+          </a:xfrm>
+          <a:prstGeom prst="rect">
+            <a:avLst/>
+          </a:prstGeom>
+          <a:solidFill>
+            <a:srgbClr val="C00000"/>
+          </a:solidFill>
+          <a:ln>
+            <a:solidFill>
+              <a:srgbClr val="C00000"/>
+            </a:solidFill>
+          </a:ln>
+        </p:spPr>
+        <p:style>
+          <a:lnRef idx="0">
+            <a:scrgbClr r="0" g="0" b="0"/>
+          </a:lnRef>
+          <a:fillRef idx="0">
+            <a:scrgbClr r="0" g="0" b="0"/>
+          </a:fillRef>
+          <a:effectRef idx="0">
+            <a:scrgbClr r="0" g="0" b="0"/>
+          </a:effectRef>
+          <a:fontRef idx="minor">
+            <a:schemeClr val="lt1"/>
+          </a:fontRef>
+        </p:style>
+        <p:txBody>
+          <a:bodyPr rtlCol="0" anchor="ctr">
+            <a:spAutoFit/>
+          </a:bodyPr>
+          <a:lstStyle/>
+          <a:p>
+            <a:pPr algn="ctr"/>
+            <a:r>
+              <a:rPr lang="de-AT" b="1" dirty="0"/>
+              <a:t>Strain </a:t>
+            </a:r>
+            <a:r>
+              <a:rPr lang="de-AT" b="1" dirty="0" err="1"/>
+              <a:t>Gauges</a:t>
+            </a:r>
+            <a:endParaRPr lang="de-DE" b="1" dirty="0"/>
+          </a:p>
+        </p:txBody>
+      </p:sp>
+      <p:cxnSp>
+        <p:nvCxnSpPr>
+          <p:cNvPr id="8" name="Gerade Verbindung mit Pfeil 7">
+            <a:extLst>
+              <a:ext uri="{FF2B5EF4-FFF2-40B4-BE49-F238E27FC236}">
+                <a16:creationId xmlns:a16="http://schemas.microsoft.com/office/drawing/2014/main" id="{E3A7484B-E4C3-0873-A515-5B7FB2D597CA}"/>
+              </a:ext>
+            </a:extLst>
+          </p:cNvPr>
+          <p:cNvCxnSpPr>
+            <a:cxnSpLocks/>
+          </p:cNvCxnSpPr>
+          <p:nvPr/>
+        </p:nvCxnSpPr>
+        <p:spPr>
+          <a:xfrm>
+            <a:off x="2692400" y="2703776"/>
+            <a:ext cx="0" cy="864924"/>
+          </a:xfrm>
+          <a:prstGeom prst="straightConnector1">
+            <a:avLst/>
+          </a:prstGeom>
+          <a:ln w="38100">
+            <a:solidFill>
+              <a:srgbClr val="C00000"/>
+            </a:solidFill>
+            <a:tailEnd type="triangle"/>
+          </a:ln>
+          <a:scene3d>
+            <a:camera prst="orthographicFront"/>
+            <a:lightRig rig="threePt" dir="t"/>
+          </a:scene3d>
+          <a:sp3d contourW="12700">
+            <a:contourClr>
+              <a:schemeClr val="bg1"/>
+            </a:contourClr>
+          </a:sp3d>
+        </p:spPr>
+        <p:style>
+          <a:lnRef idx="2">
+            <a:schemeClr val="accent1"/>
+          </a:lnRef>
+          <a:fillRef idx="0">
+            <a:schemeClr val="accent1"/>
+          </a:fillRef>
+          <a:effectRef idx="1">
+            <a:schemeClr val="accent1"/>
+          </a:effectRef>
+          <a:fontRef idx="minor">
+            <a:schemeClr val="tx1"/>
+          </a:fontRef>
+        </p:style>
+      </p:cxnSp>
+      <p:sp>
+        <p:nvSpPr>
+          <p:cNvPr id="12" name="Rechteck 11">
+            <a:extLst>
+              <a:ext uri="{FF2B5EF4-FFF2-40B4-BE49-F238E27FC236}">
+                <a16:creationId xmlns:a16="http://schemas.microsoft.com/office/drawing/2014/main" id="{4A125D17-7A25-D31F-D1FC-E073C1427F49}"/>
+              </a:ext>
+            </a:extLst>
+          </p:cNvPr>
+          <p:cNvSpPr/>
+          <p:nvPr/>
+        </p:nvSpPr>
+        <p:spPr>
+          <a:xfrm>
+            <a:off x="2260600" y="4581184"/>
+            <a:ext cx="1168400" cy="646331"/>
+          </a:xfrm>
+          <a:prstGeom prst="rect">
+            <a:avLst/>
+          </a:prstGeom>
+          <a:solidFill>
+            <a:srgbClr val="C00000"/>
+          </a:solidFill>
+          <a:ln>
+            <a:solidFill>
+              <a:srgbClr val="C00000"/>
+            </a:solidFill>
+          </a:ln>
+        </p:spPr>
+        <p:style>
+          <a:lnRef idx="0">
+            <a:scrgbClr r="0" g="0" b="0"/>
+          </a:lnRef>
+          <a:fillRef idx="0">
+            <a:scrgbClr r="0" g="0" b="0"/>
+          </a:fillRef>
+          <a:effectRef idx="0">
+            <a:scrgbClr r="0" g="0" b="0"/>
+          </a:effectRef>
+          <a:fontRef idx="minor">
+            <a:schemeClr val="lt1"/>
+          </a:fontRef>
+        </p:style>
+        <p:txBody>
+          <a:bodyPr wrap="square" rtlCol="0" anchor="ctr">
+            <a:spAutoFit/>
+          </a:bodyPr>
+          <a:lstStyle/>
+          <a:p>
+            <a:pPr algn="ctr"/>
+            <a:r>
+              <a:rPr lang="de-AT" b="1" dirty="0"/>
+              <a:t>Lorentz </a:t>
+            </a:r>
+            <a:r>
+              <a:rPr lang="de-AT" b="1" dirty="0" err="1"/>
+              <a:t>Actuator</a:t>
+            </a:r>
+            <a:endParaRPr lang="de-DE" b="1" dirty="0"/>
+          </a:p>
+        </p:txBody>
+      </p:sp>
+      <p:cxnSp>
+        <p:nvCxnSpPr>
+          <p:cNvPr id="13" name="Gerade Verbindung mit Pfeil 12">
+            <a:extLst>
+              <a:ext uri="{FF2B5EF4-FFF2-40B4-BE49-F238E27FC236}">
+                <a16:creationId xmlns:a16="http://schemas.microsoft.com/office/drawing/2014/main" id="{3D634D50-8684-A240-5C07-027DC120CBAC}"/>
+              </a:ext>
+            </a:extLst>
+          </p:cNvPr>
+          <p:cNvCxnSpPr>
+            <a:cxnSpLocks/>
+            <a:stCxn id="12" idx="0"/>
+          </p:cNvCxnSpPr>
+          <p:nvPr/>
+        </p:nvCxnSpPr>
+        <p:spPr>
+          <a:xfrm flipV="1">
+            <a:off x="2844800" y="3810000"/>
+            <a:ext cx="219472" cy="771184"/>
+          </a:xfrm>
+          <a:prstGeom prst="straightConnector1">
+            <a:avLst/>
+          </a:prstGeom>
+          <a:ln w="38100">
+            <a:solidFill>
+              <a:srgbClr val="C00000"/>
+            </a:solidFill>
+            <a:tailEnd type="triangle"/>
+          </a:ln>
+          <a:scene3d>
+            <a:camera prst="orthographicFront"/>
+            <a:lightRig rig="threePt" dir="t"/>
+          </a:scene3d>
+          <a:sp3d contourW="12700">
+            <a:contourClr>
+              <a:schemeClr val="bg1"/>
+            </a:contourClr>
+          </a:sp3d>
+        </p:spPr>
+        <p:style>
+          <a:lnRef idx="2">
+            <a:schemeClr val="accent1"/>
+          </a:lnRef>
+          <a:fillRef idx="0">
+            <a:schemeClr val="accent1"/>
+          </a:fillRef>
+          <a:effectRef idx="1">
+            <a:schemeClr val="accent1"/>
+          </a:effectRef>
+          <a:fontRef idx="minor">
+            <a:schemeClr val="tx1"/>
+          </a:fontRef>
+        </p:style>
+      </p:cxnSp>
+      <p:sp>
+        <p:nvSpPr>
+          <p:cNvPr id="19" name="Rechteck 18">
+            <a:extLst>
+              <a:ext uri="{FF2B5EF4-FFF2-40B4-BE49-F238E27FC236}">
+                <a16:creationId xmlns:a16="http://schemas.microsoft.com/office/drawing/2014/main" id="{A9CCA973-0259-520F-A770-2E8E26097AF4}"/>
+              </a:ext>
+            </a:extLst>
+          </p:cNvPr>
+          <p:cNvSpPr/>
+          <p:nvPr/>
+        </p:nvSpPr>
+        <p:spPr>
+          <a:xfrm>
+            <a:off x="1739900" y="5422469"/>
+            <a:ext cx="2540000" cy="1200329"/>
+          </a:xfrm>
+          <a:prstGeom prst="rect">
+            <a:avLst/>
+          </a:prstGeom>
+          <a:solidFill>
+            <a:srgbClr val="C00000"/>
+          </a:solidFill>
+          <a:ln>
+            <a:solidFill>
+              <a:srgbClr val="C00000"/>
+            </a:solidFill>
+          </a:ln>
+        </p:spPr>
+        <p:style>
+          <a:lnRef idx="0">
+            <a:scrgbClr r="0" g="0" b="0"/>
+          </a:lnRef>
+          <a:fillRef idx="0">
+            <a:scrgbClr r="0" g="0" b="0"/>
+          </a:fillRef>
+          <a:effectRef idx="0">
+            <a:scrgbClr r="0" g="0" b="0"/>
+          </a:effectRef>
+          <a:fontRef idx="minor">
+            <a:schemeClr val="lt1"/>
+          </a:fontRef>
+        </p:style>
+        <p:txBody>
+          <a:bodyPr wrap="square" rtlCol="0" anchor="ctr">
+            <a:spAutoFit/>
+          </a:bodyPr>
+          <a:lstStyle/>
+          <a:p>
+            <a:pPr algn="ctr"/>
+            <a:r>
+              <a:rPr lang="de-AT" b="1" dirty="0" err="1"/>
+              <a:t>Deflection</a:t>
+            </a:r>
+            <a:r>
+              <a:rPr lang="de-AT" b="1" dirty="0"/>
+              <a:t> </a:t>
+            </a:r>
+            <a:r>
+              <a:rPr lang="de-AT" b="1" dirty="0" err="1"/>
+              <a:t>Readout</a:t>
+            </a:r>
+            <a:r>
+              <a:rPr lang="de-AT" b="1" dirty="0"/>
+              <a:t> Electronics,</a:t>
+            </a:r>
+          </a:p>
+          <a:p>
+            <a:pPr algn="ctr"/>
+            <a:r>
+              <a:rPr lang="de-AT" b="1" dirty="0"/>
+              <a:t>Offset </a:t>
+            </a:r>
+            <a:r>
+              <a:rPr lang="de-AT" b="1" dirty="0" err="1"/>
+              <a:t>Compensation</a:t>
+            </a:r>
+            <a:r>
+              <a:rPr lang="de-AT" b="1" dirty="0"/>
+              <a:t> Potentiometer</a:t>
+            </a:r>
+            <a:endParaRPr lang="de-DE" b="1" dirty="0"/>
+          </a:p>
+        </p:txBody>
+      </p:sp>
+      <p:cxnSp>
+        <p:nvCxnSpPr>
+          <p:cNvPr id="20" name="Gerade Verbindung mit Pfeil 19">
+            <a:extLst>
+              <a:ext uri="{FF2B5EF4-FFF2-40B4-BE49-F238E27FC236}">
+                <a16:creationId xmlns:a16="http://schemas.microsoft.com/office/drawing/2014/main" id="{AD29193A-EA03-6728-DB0C-951124EA9AE9}"/>
+              </a:ext>
+            </a:extLst>
+          </p:cNvPr>
+          <p:cNvCxnSpPr>
+            <a:cxnSpLocks/>
+            <a:stCxn id="37" idx="0"/>
+          </p:cNvCxnSpPr>
+          <p:nvPr/>
+        </p:nvCxnSpPr>
+        <p:spPr>
+          <a:xfrm flipH="1" flipV="1">
+            <a:off x="4213225" y="4172419"/>
+            <a:ext cx="1514475" cy="1774993"/>
+          </a:xfrm>
+          <a:prstGeom prst="straightConnector1">
+            <a:avLst/>
+          </a:prstGeom>
+          <a:ln w="38100">
+            <a:solidFill>
+              <a:srgbClr val="C00000"/>
+            </a:solidFill>
+            <a:tailEnd type="triangle"/>
+          </a:ln>
+          <a:scene3d>
+            <a:camera prst="orthographicFront"/>
+            <a:lightRig rig="threePt" dir="t"/>
+          </a:scene3d>
+          <a:sp3d contourW="12700">
+            <a:contourClr>
+              <a:schemeClr val="bg1"/>
+            </a:contourClr>
+          </a:sp3d>
+        </p:spPr>
+        <p:style>
+          <a:lnRef idx="2">
+            <a:schemeClr val="accent1"/>
+          </a:lnRef>
+          <a:fillRef idx="0">
+            <a:schemeClr val="accent1"/>
+          </a:fillRef>
+          <a:effectRef idx="1">
+            <a:schemeClr val="accent1"/>
+          </a:effectRef>
+          <a:fontRef idx="minor">
+            <a:schemeClr val="tx1"/>
+          </a:fontRef>
+        </p:style>
+      </p:cxnSp>
+      <p:sp>
+        <p:nvSpPr>
+          <p:cNvPr id="24" name="Rechteck 23">
+            <a:extLst>
+              <a:ext uri="{FF2B5EF4-FFF2-40B4-BE49-F238E27FC236}">
+                <a16:creationId xmlns:a16="http://schemas.microsoft.com/office/drawing/2014/main" id="{157B008C-2F2B-E0B8-9284-16B966E68C2E}"/>
+              </a:ext>
+            </a:extLst>
+          </p:cNvPr>
+          <p:cNvSpPr/>
+          <p:nvPr/>
+        </p:nvSpPr>
+        <p:spPr>
+          <a:xfrm>
+            <a:off x="5861050" y="4209618"/>
+            <a:ext cx="1066800" cy="923330"/>
+          </a:xfrm>
+          <a:prstGeom prst="rect">
+            <a:avLst/>
+          </a:prstGeom>
+          <a:solidFill>
+            <a:srgbClr val="C00000"/>
+          </a:solidFill>
+          <a:ln>
+            <a:solidFill>
+              <a:srgbClr val="C00000"/>
+            </a:solidFill>
+          </a:ln>
+        </p:spPr>
+        <p:style>
+          <a:lnRef idx="0">
+            <a:scrgbClr r="0" g="0" b="0"/>
+          </a:lnRef>
+          <a:fillRef idx="0">
+            <a:scrgbClr r="0" g="0" b="0"/>
+          </a:fillRef>
+          <a:effectRef idx="0">
+            <a:scrgbClr r="0" g="0" b="0"/>
+          </a:effectRef>
+          <a:fontRef idx="minor">
+            <a:schemeClr val="lt1"/>
+          </a:fontRef>
+        </p:style>
+        <p:txBody>
+          <a:bodyPr wrap="square" rtlCol="0" anchor="ctr">
+            <a:spAutoFit/>
+          </a:bodyPr>
+          <a:lstStyle/>
+          <a:p>
+            <a:pPr algn="ctr"/>
+            <a:r>
+              <a:rPr lang="de-AT" b="1" dirty="0"/>
+              <a:t>Power Supply (±10V)</a:t>
+            </a:r>
+            <a:endParaRPr lang="de-DE" b="1" dirty="0"/>
+          </a:p>
+        </p:txBody>
+      </p:sp>
+      <p:cxnSp>
+        <p:nvCxnSpPr>
+          <p:cNvPr id="25" name="Gerade Verbindung mit Pfeil 24">
+            <a:extLst>
+              <a:ext uri="{FF2B5EF4-FFF2-40B4-BE49-F238E27FC236}">
+                <a16:creationId xmlns:a16="http://schemas.microsoft.com/office/drawing/2014/main" id="{7BA93DEF-944A-5B70-E3DA-2F11240C9652}"/>
+              </a:ext>
+            </a:extLst>
+          </p:cNvPr>
+          <p:cNvCxnSpPr>
+            <a:cxnSpLocks/>
+            <a:stCxn id="24" idx="1"/>
+          </p:cNvCxnSpPr>
+          <p:nvPr/>
+        </p:nvCxnSpPr>
+        <p:spPr>
+          <a:xfrm flipH="1" flipV="1">
+            <a:off x="4970462" y="4172419"/>
+            <a:ext cx="890588" cy="498864"/>
+          </a:xfrm>
+          <a:prstGeom prst="straightConnector1">
+            <a:avLst/>
+          </a:prstGeom>
+          <a:ln w="38100">
+            <a:solidFill>
+              <a:srgbClr val="C00000"/>
+            </a:solidFill>
+            <a:tailEnd type="triangle"/>
+          </a:ln>
+          <a:effectLst/>
+          <a:scene3d>
+            <a:camera prst="orthographicFront"/>
+            <a:lightRig rig="threePt" dir="t"/>
+          </a:scene3d>
+          <a:sp3d contourW="12700">
+            <a:contourClr>
+              <a:schemeClr val="bg1"/>
+            </a:contourClr>
+          </a:sp3d>
+        </p:spPr>
+        <p:style>
+          <a:lnRef idx="2">
+            <a:schemeClr val="accent1"/>
+          </a:lnRef>
+          <a:fillRef idx="0">
+            <a:schemeClr val="accent1"/>
+          </a:fillRef>
+          <a:effectRef idx="1">
+            <a:schemeClr val="accent1"/>
+          </a:effectRef>
+          <a:fontRef idx="minor">
+            <a:schemeClr val="tx1"/>
+          </a:fontRef>
+        </p:style>
+      </p:cxnSp>
+      <p:cxnSp>
+        <p:nvCxnSpPr>
+          <p:cNvPr id="28" name="Gerade Verbindung mit Pfeil 27">
+            <a:extLst>
+              <a:ext uri="{FF2B5EF4-FFF2-40B4-BE49-F238E27FC236}">
+                <a16:creationId xmlns:a16="http://schemas.microsoft.com/office/drawing/2014/main" id="{7DDBE2F8-D040-D4BE-A3E8-617629B8113F}"/>
+              </a:ext>
+            </a:extLst>
+          </p:cNvPr>
+          <p:cNvCxnSpPr>
+            <a:cxnSpLocks/>
+          </p:cNvCxnSpPr>
+          <p:nvPr/>
+        </p:nvCxnSpPr>
+        <p:spPr>
+          <a:xfrm flipH="1" flipV="1">
+            <a:off x="3632200" y="4140200"/>
+            <a:ext cx="469900" cy="1282269"/>
+          </a:xfrm>
+          <a:prstGeom prst="straightConnector1">
+            <a:avLst/>
+          </a:prstGeom>
+          <a:ln w="38100">
+            <a:solidFill>
+              <a:srgbClr val="C00000"/>
+            </a:solidFill>
+            <a:tailEnd type="triangle"/>
+          </a:ln>
+          <a:scene3d>
+            <a:camera prst="orthographicFront"/>
+            <a:lightRig rig="threePt" dir="t"/>
+          </a:scene3d>
+          <a:sp3d contourW="12700">
+            <a:contourClr>
+              <a:schemeClr val="bg1"/>
+            </a:contourClr>
+          </a:sp3d>
+        </p:spPr>
+        <p:style>
+          <a:lnRef idx="2">
+            <a:schemeClr val="accent1"/>
+          </a:lnRef>
+          <a:fillRef idx="0">
+            <a:schemeClr val="accent1"/>
+          </a:fillRef>
+          <a:effectRef idx="1">
+            <a:schemeClr val="accent1"/>
+          </a:effectRef>
+          <a:fontRef idx="minor">
+            <a:schemeClr val="tx1"/>
+          </a:fontRef>
+        </p:style>
+      </p:cxnSp>
+      <p:sp>
+        <p:nvSpPr>
+          <p:cNvPr id="37" name="Rechteck 36">
+            <a:extLst>
+              <a:ext uri="{FF2B5EF4-FFF2-40B4-BE49-F238E27FC236}">
+                <a16:creationId xmlns:a16="http://schemas.microsoft.com/office/drawing/2014/main" id="{F1052166-F6FE-8928-DAAB-7E6397CAFAD2}"/>
+              </a:ext>
+            </a:extLst>
+          </p:cNvPr>
+          <p:cNvSpPr/>
+          <p:nvPr/>
+        </p:nvSpPr>
+        <p:spPr>
+          <a:xfrm>
+            <a:off x="4457700" y="5947412"/>
+            <a:ext cx="2540000" cy="646331"/>
+          </a:xfrm>
+          <a:prstGeom prst="rect">
+            <a:avLst/>
+          </a:prstGeom>
+          <a:solidFill>
+            <a:srgbClr val="C00000"/>
+          </a:solidFill>
+          <a:ln>
+            <a:solidFill>
+              <a:srgbClr val="C00000"/>
+            </a:solidFill>
+          </a:ln>
+        </p:spPr>
+        <p:style>
+          <a:lnRef idx="0">
+            <a:scrgbClr r="0" g="0" b="0"/>
+          </a:lnRef>
+          <a:fillRef idx="0">
+            <a:scrgbClr r="0" g="0" b="0"/>
+          </a:fillRef>
+          <a:effectRef idx="0">
+            <a:scrgbClr r="0" g="0" b="0"/>
+          </a:effectRef>
+          <a:fontRef idx="minor">
+            <a:schemeClr val="lt1"/>
+          </a:fontRef>
+        </p:style>
+        <p:txBody>
+          <a:bodyPr wrap="square" rtlCol="0" anchor="ctr">
+            <a:spAutoFit/>
+          </a:bodyPr>
+          <a:lstStyle/>
+          <a:p>
+            <a:pPr algn="ctr"/>
+            <a:r>
+              <a:rPr lang="de-AT" b="1" dirty="0" err="1"/>
+              <a:t>Deflection</a:t>
+            </a:r>
+            <a:r>
+              <a:rPr lang="de-AT" b="1" dirty="0"/>
+              <a:t> </a:t>
+            </a:r>
+            <a:r>
+              <a:rPr lang="de-AT" b="1" dirty="0" err="1"/>
+              <a:t>Readout</a:t>
+            </a:r>
+            <a:r>
+              <a:rPr lang="de-AT" b="1" dirty="0"/>
+              <a:t> Signal</a:t>
+            </a:r>
+            <a:endParaRPr lang="de-DE" b="1" dirty="0"/>
+          </a:p>
+        </p:txBody>
+      </p:sp>
+      <p:sp>
+        <p:nvSpPr>
+          <p:cNvPr id="45" name="Rechteck 44">
+            <a:extLst>
+              <a:ext uri="{FF2B5EF4-FFF2-40B4-BE49-F238E27FC236}">
+                <a16:creationId xmlns:a16="http://schemas.microsoft.com/office/drawing/2014/main" id="{4C75A7ED-DC21-9E66-BAD6-7FB57348AEDC}"/>
+              </a:ext>
+            </a:extLst>
+          </p:cNvPr>
+          <p:cNvSpPr/>
+          <p:nvPr/>
+        </p:nvSpPr>
+        <p:spPr>
+          <a:xfrm>
+            <a:off x="2168525" y="1417485"/>
+            <a:ext cx="1352550" cy="646331"/>
+          </a:xfrm>
+          <a:prstGeom prst="rect">
+            <a:avLst/>
+          </a:prstGeom>
+          <a:solidFill>
+            <a:srgbClr val="C00000"/>
+          </a:solidFill>
+          <a:ln>
+            <a:solidFill>
+              <a:srgbClr val="C00000"/>
+            </a:solidFill>
+          </a:ln>
+        </p:spPr>
+        <p:style>
+          <a:lnRef idx="0">
+            <a:scrgbClr r="0" g="0" b="0"/>
+          </a:lnRef>
+          <a:fillRef idx="0">
+            <a:scrgbClr r="0" g="0" b="0"/>
+          </a:fillRef>
+          <a:effectRef idx="0">
+            <a:scrgbClr r="0" g="0" b="0"/>
+          </a:effectRef>
+          <a:fontRef idx="minor">
+            <a:schemeClr val="lt1"/>
+          </a:fontRef>
+        </p:style>
+        <p:txBody>
+          <a:bodyPr wrap="square" rtlCol="0" anchor="ctr">
+            <a:spAutoFit/>
+          </a:bodyPr>
+          <a:lstStyle/>
+          <a:p>
+            <a:pPr algn="ctr"/>
+            <a:r>
+              <a:rPr lang="de-AT" b="1" dirty="0"/>
+              <a:t>AFM Cantilever</a:t>
+            </a:r>
+            <a:endParaRPr lang="de-DE" b="1" dirty="0"/>
+          </a:p>
+        </p:txBody>
+      </p:sp>
+      <p:sp>
+        <p:nvSpPr>
+          <p:cNvPr id="47" name="Rechteck 46">
+            <a:extLst>
+              <a:ext uri="{FF2B5EF4-FFF2-40B4-BE49-F238E27FC236}">
+                <a16:creationId xmlns:a16="http://schemas.microsoft.com/office/drawing/2014/main" id="{B4B159DF-C4D6-19B0-C6D2-BD83F47E7B3E}"/>
+              </a:ext>
+            </a:extLst>
+          </p:cNvPr>
+          <p:cNvSpPr/>
+          <p:nvPr/>
+        </p:nvSpPr>
+        <p:spPr>
+          <a:xfrm>
+            <a:off x="5162550" y="264257"/>
+            <a:ext cx="1765300" cy="646331"/>
+          </a:xfrm>
+          <a:prstGeom prst="rect">
+            <a:avLst/>
+          </a:prstGeom>
+          <a:solidFill>
+            <a:srgbClr val="C00000"/>
+          </a:solidFill>
+          <a:ln>
+            <a:solidFill>
+              <a:srgbClr val="C00000"/>
+            </a:solidFill>
+          </a:ln>
+        </p:spPr>
+        <p:style>
+          <a:lnRef idx="0">
+            <a:scrgbClr r="0" g="0" b="0"/>
+          </a:lnRef>
+          <a:fillRef idx="0">
+            <a:scrgbClr r="0" g="0" b="0"/>
+          </a:fillRef>
+          <a:effectRef idx="0">
+            <a:scrgbClr r="0" g="0" b="0"/>
+          </a:effectRef>
+          <a:fontRef idx="minor">
+            <a:schemeClr val="lt1"/>
+          </a:fontRef>
+        </p:style>
+        <p:txBody>
+          <a:bodyPr wrap="square" rtlCol="0" anchor="ctr">
+            <a:spAutoFit/>
+          </a:bodyPr>
+          <a:lstStyle/>
+          <a:p>
+            <a:pPr algn="ctr"/>
+            <a:r>
+              <a:rPr lang="de-AT" b="1" dirty="0" err="1"/>
+              <a:t>Lowpass</a:t>
+            </a:r>
+            <a:r>
+              <a:rPr lang="de-AT" b="1" dirty="0"/>
+              <a:t> Filter (not </a:t>
+            </a:r>
+            <a:r>
+              <a:rPr lang="de-AT" b="1" dirty="0" err="1"/>
+              <a:t>shown</a:t>
+            </a:r>
+            <a:r>
+              <a:rPr lang="de-AT" b="1" dirty="0"/>
+              <a:t>)</a:t>
+            </a:r>
+            <a:endParaRPr lang="de-DE" b="1" dirty="0"/>
+          </a:p>
+        </p:txBody>
+      </p:sp>
+      <p:cxnSp>
+        <p:nvCxnSpPr>
+          <p:cNvPr id="51" name="Verbinder: gewinkelt 50">
+            <a:extLst>
+              <a:ext uri="{FF2B5EF4-FFF2-40B4-BE49-F238E27FC236}">
+                <a16:creationId xmlns:a16="http://schemas.microsoft.com/office/drawing/2014/main" id="{2EDF06AF-5C0B-FAE1-A6FF-3B9A6A99B6BD}"/>
+              </a:ext>
+            </a:extLst>
+          </p:cNvPr>
+          <p:cNvCxnSpPr>
+            <a:cxnSpLocks/>
+          </p:cNvCxnSpPr>
+          <p:nvPr/>
+        </p:nvCxnSpPr>
+        <p:spPr>
+          <a:xfrm rot="5400000" flipH="1" flipV="1">
+            <a:off x="6884964" y="42886"/>
+            <a:ext cx="587422" cy="501650"/>
+          </a:xfrm>
+          <a:prstGeom prst="bentConnector3">
+            <a:avLst>
+              <a:gd name="adj1" fmla="val 274"/>
+            </a:avLst>
+          </a:prstGeom>
+          <a:ln w="38100">
+            <a:solidFill>
+              <a:srgbClr val="C00000"/>
+            </a:solidFill>
+            <a:tailEnd type="triangle"/>
+          </a:ln>
+          <a:effectLst/>
+          <a:scene3d>
+            <a:camera prst="orthographicFront"/>
+            <a:lightRig rig="threePt" dir="t"/>
+          </a:scene3d>
+          <a:sp3d contourW="12700">
+            <a:contourClr>
+              <a:schemeClr val="bg1"/>
+            </a:contourClr>
+          </a:sp3d>
+        </p:spPr>
+        <p:style>
+          <a:lnRef idx="2">
+            <a:schemeClr val="accent1"/>
+          </a:lnRef>
+          <a:fillRef idx="0">
+            <a:schemeClr val="accent1"/>
+          </a:fillRef>
+          <a:effectRef idx="1">
+            <a:schemeClr val="accent1"/>
+          </a:effectRef>
+          <a:fontRef idx="minor">
+            <a:schemeClr val="tx1"/>
+          </a:fontRef>
+        </p:style>
+      </p:cxnSp>
+      <p:sp>
+        <p:nvSpPr>
+          <p:cNvPr id="64" name="Rechteck 63">
+            <a:extLst>
+              <a:ext uri="{FF2B5EF4-FFF2-40B4-BE49-F238E27FC236}">
+                <a16:creationId xmlns:a16="http://schemas.microsoft.com/office/drawing/2014/main" id="{37269C7A-E5B7-26F3-3DDB-767D3B2F031F}"/>
+              </a:ext>
+            </a:extLst>
+          </p:cNvPr>
+          <p:cNvSpPr/>
+          <p:nvPr/>
+        </p:nvSpPr>
+        <p:spPr>
+          <a:xfrm>
+            <a:off x="1784350" y="623746"/>
+            <a:ext cx="1352550" cy="369332"/>
+          </a:xfrm>
+          <a:prstGeom prst="rect">
+            <a:avLst/>
+          </a:prstGeom>
+          <a:solidFill>
+            <a:srgbClr val="C00000"/>
+          </a:solidFill>
+          <a:ln>
+            <a:solidFill>
+              <a:srgbClr val="C00000"/>
+            </a:solidFill>
+          </a:ln>
+        </p:spPr>
+        <p:style>
+          <a:lnRef idx="0">
+            <a:scrgbClr r="0" g="0" b="0"/>
+          </a:lnRef>
+          <a:fillRef idx="0">
+            <a:scrgbClr r="0" g="0" b="0"/>
+          </a:fillRef>
+          <a:effectRef idx="0">
+            <a:scrgbClr r="0" g="0" b="0"/>
+          </a:effectRef>
+          <a:fontRef idx="minor">
+            <a:schemeClr val="lt1"/>
+          </a:fontRef>
+        </p:style>
+        <p:txBody>
+          <a:bodyPr wrap="square" rtlCol="0" anchor="ctr">
+            <a:spAutoFit/>
+          </a:bodyPr>
+          <a:lstStyle/>
+          <a:p>
+            <a:pPr algn="ctr"/>
+            <a:r>
+              <a:rPr lang="de-AT" b="1" dirty="0"/>
+              <a:t>Sample</a:t>
+            </a:r>
+            <a:endParaRPr lang="de-DE" b="1" dirty="0"/>
+          </a:p>
+        </p:txBody>
+      </p:sp>
+      <p:cxnSp>
+        <p:nvCxnSpPr>
+          <p:cNvPr id="72" name="Gerade Verbindung mit Pfeil 71">
+            <a:extLst>
+              <a:ext uri="{FF2B5EF4-FFF2-40B4-BE49-F238E27FC236}">
+                <a16:creationId xmlns:a16="http://schemas.microsoft.com/office/drawing/2014/main" id="{82ACCA0A-44D7-2063-7C30-CA0E71B4DDB2}"/>
+              </a:ext>
+            </a:extLst>
+          </p:cNvPr>
+          <p:cNvCxnSpPr>
+            <a:cxnSpLocks/>
+            <a:stCxn id="73" idx="2"/>
+          </p:cNvCxnSpPr>
+          <p:nvPr/>
+        </p:nvCxnSpPr>
+        <p:spPr>
+          <a:xfrm>
+            <a:off x="7970837" y="3026941"/>
+            <a:ext cx="484187" cy="1182677"/>
+          </a:xfrm>
+          <a:prstGeom prst="straightConnector1">
+            <a:avLst/>
+          </a:prstGeom>
+          <a:ln w="38100">
+            <a:solidFill>
+              <a:srgbClr val="C00000"/>
+            </a:solidFill>
+            <a:tailEnd type="triangle"/>
+          </a:ln>
+          <a:scene3d>
+            <a:camera prst="orthographicFront"/>
+            <a:lightRig rig="threePt" dir="t"/>
+          </a:scene3d>
+          <a:sp3d contourW="12700">
+            <a:contourClr>
+              <a:schemeClr val="bg1"/>
+            </a:contourClr>
+          </a:sp3d>
+        </p:spPr>
+        <p:style>
+          <a:lnRef idx="2">
+            <a:schemeClr val="accent1"/>
+          </a:lnRef>
+          <a:fillRef idx="0">
+            <a:schemeClr val="accent1"/>
+          </a:fillRef>
+          <a:effectRef idx="1">
+            <a:schemeClr val="accent1"/>
+          </a:effectRef>
+          <a:fontRef idx="minor">
+            <a:schemeClr val="tx1"/>
+          </a:fontRef>
+        </p:style>
+      </p:cxnSp>
+      <p:sp>
+        <p:nvSpPr>
+          <p:cNvPr id="73" name="Rechteck 72">
+            <a:extLst>
+              <a:ext uri="{FF2B5EF4-FFF2-40B4-BE49-F238E27FC236}">
+                <a16:creationId xmlns:a16="http://schemas.microsoft.com/office/drawing/2014/main" id="{50BD2E67-3D75-C651-3094-3B93CB8A6543}"/>
+              </a:ext>
+            </a:extLst>
+          </p:cNvPr>
+          <p:cNvSpPr/>
+          <p:nvPr/>
+        </p:nvSpPr>
+        <p:spPr>
+          <a:xfrm>
+            <a:off x="7242175" y="2380610"/>
+            <a:ext cx="1457324" cy="646331"/>
+          </a:xfrm>
+          <a:prstGeom prst="rect">
+            <a:avLst/>
+          </a:prstGeom>
+          <a:solidFill>
+            <a:srgbClr val="C00000"/>
+          </a:solidFill>
+          <a:ln>
+            <a:solidFill>
+              <a:srgbClr val="C00000"/>
+            </a:solidFill>
+          </a:ln>
+        </p:spPr>
+        <p:style>
+          <a:lnRef idx="0">
+            <a:scrgbClr r="0" g="0" b="0"/>
+          </a:lnRef>
+          <a:fillRef idx="0">
+            <a:scrgbClr r="0" g="0" b="0"/>
+          </a:fillRef>
+          <a:effectRef idx="0">
+            <a:scrgbClr r="0" g="0" b="0"/>
+          </a:effectRef>
+          <a:fontRef idx="minor">
+            <a:schemeClr val="lt1"/>
+          </a:fontRef>
+        </p:style>
+        <p:txBody>
+          <a:bodyPr wrap="square" rtlCol="0" anchor="ctr">
+            <a:spAutoFit/>
+          </a:bodyPr>
+          <a:lstStyle/>
+          <a:p>
+            <a:pPr algn="ctr"/>
+            <a:r>
+              <a:rPr lang="de-AT" b="1" dirty="0"/>
+              <a:t>Integral Controller</a:t>
+            </a:r>
+            <a:endParaRPr lang="de-DE" b="1" dirty="0"/>
+          </a:p>
+        </p:txBody>
+      </p:sp>
+      <p:cxnSp>
+        <p:nvCxnSpPr>
+          <p:cNvPr id="77" name="Gerade Verbindung mit Pfeil 76">
+            <a:extLst>
+              <a:ext uri="{FF2B5EF4-FFF2-40B4-BE49-F238E27FC236}">
+                <a16:creationId xmlns:a16="http://schemas.microsoft.com/office/drawing/2014/main" id="{BEB692C4-982F-7173-E8EF-53959FF735AA}"/>
+              </a:ext>
+            </a:extLst>
+          </p:cNvPr>
+          <p:cNvCxnSpPr>
+            <a:cxnSpLocks/>
+            <a:stCxn id="78" idx="2"/>
+          </p:cNvCxnSpPr>
+          <p:nvPr/>
+        </p:nvCxnSpPr>
+        <p:spPr>
+          <a:xfrm flipH="1">
+            <a:off x="9037637" y="3026941"/>
+            <a:ext cx="571500" cy="973559"/>
+          </a:xfrm>
+          <a:prstGeom prst="straightConnector1">
+            <a:avLst/>
+          </a:prstGeom>
+          <a:ln w="38100">
+            <a:solidFill>
+              <a:srgbClr val="C00000"/>
+            </a:solidFill>
+            <a:tailEnd type="triangle"/>
+          </a:ln>
+          <a:scene3d>
+            <a:camera prst="orthographicFront"/>
+            <a:lightRig rig="threePt" dir="t"/>
+          </a:scene3d>
+          <a:sp3d contourW="12700">
+            <a:contourClr>
+              <a:schemeClr val="bg1"/>
+            </a:contourClr>
+          </a:sp3d>
+        </p:spPr>
+        <p:style>
+          <a:lnRef idx="2">
+            <a:schemeClr val="accent1"/>
+          </a:lnRef>
+          <a:fillRef idx="0">
+            <a:schemeClr val="accent1"/>
+          </a:fillRef>
+          <a:effectRef idx="1">
+            <a:schemeClr val="accent1"/>
+          </a:effectRef>
+          <a:fontRef idx="minor">
+            <a:schemeClr val="tx1"/>
+          </a:fontRef>
+        </p:style>
+      </p:cxnSp>
+      <p:sp>
+        <p:nvSpPr>
+          <p:cNvPr id="78" name="Rechteck 77">
+            <a:extLst>
+              <a:ext uri="{FF2B5EF4-FFF2-40B4-BE49-F238E27FC236}">
+                <a16:creationId xmlns:a16="http://schemas.microsoft.com/office/drawing/2014/main" id="{755D3184-FC77-6EC7-FAA4-1A74874F7D99}"/>
+              </a:ext>
+            </a:extLst>
+          </p:cNvPr>
+          <p:cNvSpPr/>
+          <p:nvPr/>
+        </p:nvSpPr>
+        <p:spPr>
+          <a:xfrm>
+            <a:off x="8880475" y="2380610"/>
+            <a:ext cx="1457324" cy="646331"/>
+          </a:xfrm>
+          <a:prstGeom prst="rect">
+            <a:avLst/>
+          </a:prstGeom>
+          <a:solidFill>
+            <a:srgbClr val="C00000"/>
+          </a:solidFill>
+          <a:ln>
+            <a:solidFill>
+              <a:srgbClr val="C00000"/>
+            </a:solidFill>
+          </a:ln>
+        </p:spPr>
+        <p:style>
+          <a:lnRef idx="0">
+            <a:scrgbClr r="0" g="0" b="0"/>
+          </a:lnRef>
+          <a:fillRef idx="0">
+            <a:scrgbClr r="0" g="0" b="0"/>
+          </a:fillRef>
+          <a:effectRef idx="0">
+            <a:scrgbClr r="0" g="0" b="0"/>
+          </a:effectRef>
+          <a:fontRef idx="minor">
+            <a:schemeClr val="lt1"/>
+          </a:fontRef>
+        </p:style>
+        <p:txBody>
+          <a:bodyPr wrap="square" rtlCol="0" anchor="ctr">
+            <a:spAutoFit/>
+          </a:bodyPr>
+          <a:lstStyle/>
+          <a:p>
+            <a:pPr algn="ctr"/>
+            <a:r>
+              <a:rPr lang="de-AT" b="1" dirty="0" err="1"/>
+              <a:t>Setpoint</a:t>
+            </a:r>
+            <a:r>
+              <a:rPr lang="de-AT" b="1" dirty="0"/>
+              <a:t> Signal</a:t>
+            </a:r>
+            <a:endParaRPr lang="de-DE" b="1" dirty="0"/>
+          </a:p>
+        </p:txBody>
+      </p:sp>
+      <p:cxnSp>
+        <p:nvCxnSpPr>
+          <p:cNvPr id="80" name="Gerade Verbindung mit Pfeil 79">
+            <a:extLst>
+              <a:ext uri="{FF2B5EF4-FFF2-40B4-BE49-F238E27FC236}">
+                <a16:creationId xmlns:a16="http://schemas.microsoft.com/office/drawing/2014/main" id="{9CD17614-2605-AEA9-89B3-828C9B200212}"/>
+              </a:ext>
+            </a:extLst>
+          </p:cNvPr>
+          <p:cNvCxnSpPr>
+            <a:cxnSpLocks/>
+            <a:stCxn id="81" idx="0"/>
+          </p:cNvCxnSpPr>
+          <p:nvPr/>
+        </p:nvCxnSpPr>
+        <p:spPr>
+          <a:xfrm flipH="1" flipV="1">
+            <a:off x="9013825" y="4581184"/>
+            <a:ext cx="595312" cy="551764"/>
+          </a:xfrm>
+          <a:prstGeom prst="straightConnector1">
+            <a:avLst/>
+          </a:prstGeom>
+          <a:ln w="38100">
+            <a:solidFill>
+              <a:srgbClr val="C00000"/>
+            </a:solidFill>
+            <a:tailEnd type="triangle"/>
+          </a:ln>
+          <a:scene3d>
+            <a:camera prst="orthographicFront"/>
+            <a:lightRig rig="threePt" dir="t"/>
+          </a:scene3d>
+          <a:sp3d contourW="12700">
+            <a:contourClr>
+              <a:schemeClr val="bg1"/>
+            </a:contourClr>
+          </a:sp3d>
+        </p:spPr>
+        <p:style>
+          <a:lnRef idx="2">
+            <a:schemeClr val="accent1"/>
+          </a:lnRef>
+          <a:fillRef idx="0">
+            <a:schemeClr val="accent1"/>
+          </a:fillRef>
+          <a:effectRef idx="1">
+            <a:schemeClr val="accent1"/>
+          </a:effectRef>
+          <a:fontRef idx="minor">
+            <a:schemeClr val="tx1"/>
+          </a:fontRef>
+        </p:style>
+      </p:cxnSp>
+      <p:sp>
+        <p:nvSpPr>
+          <p:cNvPr id="81" name="Rechteck 80">
+            <a:extLst>
+              <a:ext uri="{FF2B5EF4-FFF2-40B4-BE49-F238E27FC236}">
+                <a16:creationId xmlns:a16="http://schemas.microsoft.com/office/drawing/2014/main" id="{F9A52E5E-9F18-45A9-B71B-D73CEF12A92B}"/>
+              </a:ext>
+            </a:extLst>
+          </p:cNvPr>
+          <p:cNvSpPr/>
+          <p:nvPr/>
+        </p:nvSpPr>
+        <p:spPr>
+          <a:xfrm>
+            <a:off x="8880475" y="5132948"/>
+            <a:ext cx="1457324" cy="646331"/>
+          </a:xfrm>
+          <a:prstGeom prst="rect">
+            <a:avLst/>
+          </a:prstGeom>
+          <a:solidFill>
+            <a:srgbClr val="C00000"/>
+          </a:solidFill>
+          <a:ln>
+            <a:solidFill>
+              <a:srgbClr val="C00000"/>
+            </a:solidFill>
+          </a:ln>
+        </p:spPr>
+        <p:style>
+          <a:lnRef idx="0">
+            <a:scrgbClr r="0" g="0" b="0"/>
+          </a:lnRef>
+          <a:fillRef idx="0">
+            <a:scrgbClr r="0" g="0" b="0"/>
+          </a:fillRef>
+          <a:effectRef idx="0">
+            <a:scrgbClr r="0" g="0" b="0"/>
+          </a:effectRef>
+          <a:fontRef idx="minor">
+            <a:schemeClr val="lt1"/>
+          </a:fontRef>
+        </p:style>
+        <p:txBody>
+          <a:bodyPr wrap="square" rtlCol="0" anchor="ctr">
+            <a:spAutoFit/>
+          </a:bodyPr>
+          <a:lstStyle/>
+          <a:p>
+            <a:pPr algn="ctr"/>
+            <a:r>
+              <a:rPr lang="de-AT" b="1" dirty="0"/>
+              <a:t>Controller </a:t>
+            </a:r>
+            <a:r>
+              <a:rPr lang="de-AT" b="1" dirty="0" err="1"/>
+              <a:t>Reset</a:t>
+            </a:r>
+            <a:endParaRPr lang="de-DE" b="1" dirty="0"/>
+          </a:p>
+        </p:txBody>
+      </p:sp>
+      <p:sp>
+        <p:nvSpPr>
+          <p:cNvPr id="85" name="Rechteck 84">
+            <a:extLst>
+              <a:ext uri="{FF2B5EF4-FFF2-40B4-BE49-F238E27FC236}">
+                <a16:creationId xmlns:a16="http://schemas.microsoft.com/office/drawing/2014/main" id="{71811085-D344-0832-4657-468F5C1666D8}"/>
+              </a:ext>
+            </a:extLst>
+          </p:cNvPr>
+          <p:cNvSpPr/>
+          <p:nvPr/>
+        </p:nvSpPr>
+        <p:spPr>
+          <a:xfrm>
+            <a:off x="5713412" y="3077170"/>
+            <a:ext cx="1371600" cy="923330"/>
+          </a:xfrm>
+          <a:prstGeom prst="rect">
+            <a:avLst/>
+          </a:prstGeom>
+          <a:solidFill>
+            <a:srgbClr val="C00000"/>
+          </a:solidFill>
+          <a:ln>
+            <a:solidFill>
+              <a:srgbClr val="C00000"/>
+            </a:solidFill>
+          </a:ln>
+        </p:spPr>
+        <p:style>
+          <a:lnRef idx="0">
+            <a:scrgbClr r="0" g="0" b="0"/>
+          </a:lnRef>
+          <a:fillRef idx="0">
+            <a:scrgbClr r="0" g="0" b="0"/>
+          </a:fillRef>
+          <a:effectRef idx="0">
+            <a:scrgbClr r="0" g="0" b="0"/>
+          </a:effectRef>
+          <a:fontRef idx="minor">
+            <a:schemeClr val="lt1"/>
+          </a:fontRef>
+        </p:style>
+        <p:txBody>
+          <a:bodyPr wrap="square" rtlCol="0" anchor="ctr">
+            <a:spAutoFit/>
+          </a:bodyPr>
+          <a:lstStyle/>
+          <a:p>
+            <a:pPr algn="ctr"/>
+            <a:r>
+              <a:rPr lang="de-AT" b="1" dirty="0"/>
+              <a:t>Lorentz </a:t>
+            </a:r>
+            <a:r>
+              <a:rPr lang="de-AT" b="1" dirty="0" err="1"/>
+              <a:t>Actuator</a:t>
+            </a:r>
+            <a:r>
+              <a:rPr lang="de-AT" b="1" dirty="0"/>
+              <a:t> Electronics</a:t>
+            </a:r>
+            <a:endParaRPr lang="de-DE" b="1" dirty="0"/>
+          </a:p>
+        </p:txBody>
+      </p:sp>
+      <p:cxnSp>
+        <p:nvCxnSpPr>
+          <p:cNvPr id="86" name="Gerade Verbindung mit Pfeil 85">
+            <a:extLst>
+              <a:ext uri="{FF2B5EF4-FFF2-40B4-BE49-F238E27FC236}">
+                <a16:creationId xmlns:a16="http://schemas.microsoft.com/office/drawing/2014/main" id="{EB4B82EB-9698-13E5-B1B4-E801EFF5C713}"/>
+              </a:ext>
+            </a:extLst>
+          </p:cNvPr>
+          <p:cNvCxnSpPr>
+            <a:cxnSpLocks/>
+            <a:stCxn id="85" idx="1"/>
+          </p:cNvCxnSpPr>
+          <p:nvPr/>
+        </p:nvCxnSpPr>
+        <p:spPr>
+          <a:xfrm flipH="1" flipV="1">
+            <a:off x="4813299" y="3312058"/>
+            <a:ext cx="900113" cy="226777"/>
+          </a:xfrm>
+          <a:prstGeom prst="straightConnector1">
+            <a:avLst/>
+          </a:prstGeom>
+          <a:ln w="38100">
+            <a:solidFill>
+              <a:srgbClr val="C00000"/>
+            </a:solidFill>
+            <a:tailEnd type="triangle"/>
+          </a:ln>
+          <a:effectLst/>
+          <a:scene3d>
+            <a:camera prst="orthographicFront"/>
+            <a:lightRig rig="threePt" dir="t"/>
+          </a:scene3d>
+          <a:sp3d contourW="12700">
+            <a:contourClr>
+              <a:schemeClr val="bg1"/>
+            </a:contourClr>
+          </a:sp3d>
+        </p:spPr>
+        <p:style>
+          <a:lnRef idx="2">
+            <a:schemeClr val="accent1"/>
+          </a:lnRef>
+          <a:fillRef idx="0">
+            <a:schemeClr val="accent1"/>
+          </a:fillRef>
+          <a:effectRef idx="1">
+            <a:schemeClr val="accent1"/>
+          </a:effectRef>
+          <a:fontRef idx="minor">
+            <a:schemeClr val="tx1"/>
+          </a:fontRef>
+        </p:style>
+      </p:cxnSp>
+    </p:spTree>
+    <p:extLst>
+      <p:ext uri="{BB962C8B-B14F-4D97-AF65-F5344CB8AC3E}">
+        <p14:creationId xmlns:p14="http://schemas.microsoft.com/office/powerpoint/2010/main" val="2539604840"/>
+      </p:ext>
+    </p:extLst>
+  </p:cSld>
+  <p:clrMapOvr>
+    <a:masterClrMapping/>
+  </p:clrMapOvr>
+</p:sld>
+</file>
+
+<file path=ppt/slides/slide22.xml><?xml version="1.0" encoding="utf-8"?>
+<p:sld xmlns:a="http://schemas.openxmlformats.org/drawingml/2006/main" xmlns:r="http://schemas.openxmlformats.org/officeDocument/2006/relationships" xmlns:p="http://schemas.openxmlformats.org/presentationml/2006/main">
+  <p:cSld>
+    <p:spTree>
+      <p:nvGrpSpPr>
+        <p:cNvPr id="1" name="">
+          <a:extLst>
+            <a:ext uri="{FF2B5EF4-FFF2-40B4-BE49-F238E27FC236}">
+              <a16:creationId xmlns:a16="http://schemas.microsoft.com/office/drawing/2014/main" id="{1B4A1D37-8F2B-4F1E-CF29-3C7CCF77565E}"/>
+            </a:ext>
+          </a:extLst>
+        </p:cNvPr>
+        <p:cNvGrpSpPr/>
+        <p:nvPr/>
+      </p:nvGrpSpPr>
+      <p:grpSpPr>
+        <a:xfrm>
+          <a:off x="0" y="0"/>
+          <a:ext cx="0" cy="0"/>
+          <a:chOff x="0" y="0"/>
+          <a:chExt cx="0" cy="0"/>
+        </a:xfrm>
+      </p:grpSpPr>
+      <p:sp>
+        <p:nvSpPr>
+          <p:cNvPr id="4" name="Textfeld 3">
+            <a:extLst>
+              <a:ext uri="{FF2B5EF4-FFF2-40B4-BE49-F238E27FC236}">
+                <a16:creationId xmlns:a16="http://schemas.microsoft.com/office/drawing/2014/main" id="{326C0644-66EF-DADF-449D-469F36F0EACF}"/>
+              </a:ext>
+            </a:extLst>
+          </p:cNvPr>
+          <p:cNvSpPr txBox="1"/>
+          <p:nvPr/>
+        </p:nvSpPr>
+        <p:spPr>
+          <a:xfrm>
+            <a:off x="1614311" y="1614919"/>
+            <a:ext cx="1397000" cy="680050"/>
+          </a:xfrm>
+          <a:prstGeom prst="rect">
+            <a:avLst/>
+          </a:prstGeom>
+        </p:spPr>
+        <p:style>
+          <a:lnRef idx="2">
+            <a:schemeClr val="dk1"/>
+          </a:lnRef>
+          <a:fillRef idx="1">
+            <a:schemeClr val="lt1"/>
+          </a:fillRef>
+          <a:effectRef idx="0">
+            <a:schemeClr val="dk1"/>
+          </a:effectRef>
+          <a:fontRef idx="minor">
+            <a:schemeClr val="dk1"/>
+          </a:fontRef>
+        </p:style>
+        <p:txBody>
+          <a:bodyPr wrap="square" rtlCol="0" anchor="ctr">
+            <a:noAutofit/>
+          </a:bodyPr>
+          <a:lstStyle/>
+          <a:p>
+            <a:pPr algn="ctr"/>
+            <a:r>
+              <a:rPr lang="de-AT" dirty="0"/>
+              <a:t>Strain </a:t>
+            </a:r>
+            <a:r>
+              <a:rPr lang="de-AT" dirty="0" err="1"/>
+              <a:t>Gauges</a:t>
+            </a:r>
+            <a:endParaRPr lang="de-DE" dirty="0"/>
+          </a:p>
+        </p:txBody>
+      </p:sp>
+      <p:sp>
+        <p:nvSpPr>
+          <p:cNvPr id="5" name="Textfeld 4">
+            <a:extLst>
+              <a:ext uri="{FF2B5EF4-FFF2-40B4-BE49-F238E27FC236}">
+                <a16:creationId xmlns:a16="http://schemas.microsoft.com/office/drawing/2014/main" id="{2998CA4A-40E1-C887-7363-360A00B56F6A}"/>
+              </a:ext>
+            </a:extLst>
+          </p:cNvPr>
+          <p:cNvSpPr txBox="1"/>
+          <p:nvPr/>
+        </p:nvSpPr>
+        <p:spPr>
+          <a:xfrm>
+            <a:off x="4074937" y="1383015"/>
+            <a:ext cx="1614664" cy="1131500"/>
+          </a:xfrm>
+          <a:prstGeom prst="rect">
+            <a:avLst/>
+          </a:prstGeom>
+        </p:spPr>
+        <p:style>
+          <a:lnRef idx="2">
+            <a:schemeClr val="dk1"/>
+          </a:lnRef>
+          <a:fillRef idx="1">
+            <a:schemeClr val="lt1"/>
+          </a:fillRef>
+          <a:effectRef idx="0">
+            <a:schemeClr val="dk1"/>
+          </a:effectRef>
+          <a:fontRef idx="minor">
+            <a:schemeClr val="dk1"/>
+          </a:fontRef>
+        </p:style>
+        <p:txBody>
+          <a:bodyPr wrap="square" rtlCol="0" anchor="ctr">
+            <a:noAutofit/>
+          </a:bodyPr>
+          <a:lstStyle/>
+          <a:p>
+            <a:pPr algn="ctr"/>
+            <a:r>
+              <a:rPr lang="de-AT" dirty="0" err="1"/>
+              <a:t>Deflection</a:t>
+            </a:r>
+            <a:r>
+              <a:rPr lang="de-AT" dirty="0"/>
+              <a:t> </a:t>
+            </a:r>
+            <a:r>
+              <a:rPr lang="de-AT" dirty="0" err="1"/>
+              <a:t>Readout</a:t>
+            </a:r>
+            <a:r>
+              <a:rPr lang="de-AT" dirty="0"/>
+              <a:t> Electronics</a:t>
+            </a:r>
+            <a:endParaRPr lang="de-DE" dirty="0"/>
+          </a:p>
+        </p:txBody>
+      </p:sp>
+      <p:cxnSp>
+        <p:nvCxnSpPr>
+          <p:cNvPr id="9" name="Gerade Verbindung mit Pfeil 8">
+            <a:extLst>
+              <a:ext uri="{FF2B5EF4-FFF2-40B4-BE49-F238E27FC236}">
+                <a16:creationId xmlns:a16="http://schemas.microsoft.com/office/drawing/2014/main" id="{9D5A4779-B1BC-A2B4-822A-A97EAE139721}"/>
+              </a:ext>
+            </a:extLst>
+          </p:cNvPr>
+          <p:cNvCxnSpPr>
+            <a:cxnSpLocks/>
+            <a:stCxn id="5" idx="3"/>
+            <a:endCxn id="10" idx="2"/>
+          </p:cNvCxnSpPr>
+          <p:nvPr/>
+        </p:nvCxnSpPr>
+        <p:spPr>
+          <a:xfrm>
+            <a:off x="5689601" y="1948765"/>
+            <a:ext cx="533399" cy="0"/>
+          </a:xfrm>
+          <a:prstGeom prst="straightConnector1">
+            <a:avLst/>
+          </a:prstGeom>
+          <a:ln>
+            <a:tailEnd type="triangle"/>
+          </a:ln>
+        </p:spPr>
+        <p:style>
+          <a:lnRef idx="2">
+            <a:schemeClr val="dk1"/>
+          </a:lnRef>
+          <a:fillRef idx="0">
+            <a:schemeClr val="dk1"/>
+          </a:fillRef>
+          <a:effectRef idx="1">
+            <a:schemeClr val="dk1"/>
+          </a:effectRef>
+          <a:fontRef idx="minor">
+            <a:schemeClr val="tx1"/>
+          </a:fontRef>
+        </p:style>
+      </p:cxnSp>
+      <p:sp>
+        <p:nvSpPr>
+          <p:cNvPr id="10" name="Ellipse 9">
+            <a:extLst>
+              <a:ext uri="{FF2B5EF4-FFF2-40B4-BE49-F238E27FC236}">
+                <a16:creationId xmlns:a16="http://schemas.microsoft.com/office/drawing/2014/main" id="{D87483DC-6163-1D9E-11F8-C5D78CB08A07}"/>
+              </a:ext>
+            </a:extLst>
+          </p:cNvPr>
+          <p:cNvSpPr/>
+          <p:nvPr/>
+        </p:nvSpPr>
+        <p:spPr>
+          <a:xfrm>
+            <a:off x="6223000" y="1834465"/>
+            <a:ext cx="228600" cy="228600"/>
+          </a:xfrm>
+          <a:prstGeom prst="ellipse">
+            <a:avLst/>
+          </a:prstGeom>
+        </p:spPr>
+        <p:style>
+          <a:lnRef idx="2">
+            <a:schemeClr val="dk1"/>
+          </a:lnRef>
+          <a:fillRef idx="1">
+            <a:schemeClr val="lt1"/>
+          </a:fillRef>
+          <a:effectRef idx="0">
+            <a:schemeClr val="dk1"/>
+          </a:effectRef>
+          <a:fontRef idx="minor">
+            <a:schemeClr val="dk1"/>
+          </a:fontRef>
+        </p:style>
+        <p:txBody>
+          <a:bodyPr rtlCol="0" anchor="ctr"/>
+          <a:lstStyle/>
+          <a:p>
+            <a:pPr algn="ctr"/>
+            <a:endParaRPr lang="de-DE"/>
+          </a:p>
+        </p:txBody>
+      </p:sp>
+      <p:cxnSp>
+        <p:nvCxnSpPr>
+          <p:cNvPr id="11" name="Gerade Verbindung mit Pfeil 10">
+            <a:extLst>
+              <a:ext uri="{FF2B5EF4-FFF2-40B4-BE49-F238E27FC236}">
+                <a16:creationId xmlns:a16="http://schemas.microsoft.com/office/drawing/2014/main" id="{36CAF9F9-6101-D308-31DF-3F063DD7D97D}"/>
+              </a:ext>
+            </a:extLst>
+          </p:cNvPr>
+          <p:cNvCxnSpPr>
+            <a:cxnSpLocks/>
+            <a:stCxn id="4" idx="3"/>
+            <a:endCxn id="5" idx="1"/>
+          </p:cNvCxnSpPr>
+          <p:nvPr/>
+        </p:nvCxnSpPr>
+        <p:spPr>
+          <a:xfrm flipV="1">
+            <a:off x="3011311" y="1948765"/>
+            <a:ext cx="1063626" cy="6179"/>
+          </a:xfrm>
+          <a:prstGeom prst="straightConnector1">
+            <a:avLst/>
+          </a:prstGeom>
+          <a:ln>
+            <a:tailEnd type="triangle"/>
+          </a:ln>
+        </p:spPr>
+        <p:style>
+          <a:lnRef idx="2">
+            <a:schemeClr val="dk1"/>
+          </a:lnRef>
+          <a:fillRef idx="0">
+            <a:schemeClr val="dk1"/>
+          </a:fillRef>
+          <a:effectRef idx="1">
+            <a:schemeClr val="dk1"/>
+          </a:effectRef>
+          <a:fontRef idx="minor">
+            <a:schemeClr val="tx1"/>
+          </a:fontRef>
+        </p:style>
+      </p:cxnSp>
+      <p:cxnSp>
+        <p:nvCxnSpPr>
+          <p:cNvPr id="18" name="Gerade Verbindung mit Pfeil 17">
+            <a:extLst>
+              <a:ext uri="{FF2B5EF4-FFF2-40B4-BE49-F238E27FC236}">
+                <a16:creationId xmlns:a16="http://schemas.microsoft.com/office/drawing/2014/main" id="{0487003B-0A2C-4784-1811-685A61758073}"/>
+              </a:ext>
+            </a:extLst>
+          </p:cNvPr>
+          <p:cNvCxnSpPr>
+            <a:endCxn id="10" idx="0"/>
+          </p:cNvCxnSpPr>
+          <p:nvPr/>
+        </p:nvCxnSpPr>
+        <p:spPr>
+          <a:xfrm>
+            <a:off x="6337300" y="1206500"/>
+            <a:ext cx="0" cy="627965"/>
+          </a:xfrm>
+          <a:prstGeom prst="straightConnector1">
+            <a:avLst/>
+          </a:prstGeom>
+          <a:ln>
+            <a:tailEnd type="triangle"/>
+          </a:ln>
+        </p:spPr>
+        <p:style>
+          <a:lnRef idx="2">
+            <a:schemeClr val="dk1"/>
+          </a:lnRef>
+          <a:fillRef idx="0">
+            <a:schemeClr val="dk1"/>
+          </a:fillRef>
+          <a:effectRef idx="1">
+            <a:schemeClr val="dk1"/>
+          </a:effectRef>
+          <a:fontRef idx="minor">
+            <a:schemeClr val="tx1"/>
+          </a:fontRef>
+        </p:style>
+      </p:cxnSp>
+      <p:sp>
+        <p:nvSpPr>
+          <p:cNvPr id="19" name="Rechteck 18">
+            <a:extLst>
+              <a:ext uri="{FF2B5EF4-FFF2-40B4-BE49-F238E27FC236}">
+                <a16:creationId xmlns:a16="http://schemas.microsoft.com/office/drawing/2014/main" id="{0B41AAB3-3B6D-5933-2C4E-58EE2D630D67}"/>
+              </a:ext>
+            </a:extLst>
+          </p:cNvPr>
+          <p:cNvSpPr/>
+          <p:nvPr/>
+        </p:nvSpPr>
+        <p:spPr>
+          <a:xfrm>
+            <a:off x="5467352" y="370533"/>
+            <a:ext cx="1739895" cy="698499"/>
+          </a:xfrm>
+          <a:prstGeom prst="rect">
+            <a:avLst/>
+          </a:prstGeom>
+          <a:noFill/>
+          <a:ln>
+            <a:noFill/>
+          </a:ln>
+        </p:spPr>
+        <p:style>
+          <a:lnRef idx="0">
+            <a:scrgbClr r="0" g="0" b="0"/>
+          </a:lnRef>
+          <a:fillRef idx="0">
+            <a:scrgbClr r="0" g="0" b="0"/>
+          </a:fillRef>
+          <a:effectRef idx="0">
+            <a:scrgbClr r="0" g="0" b="0"/>
+          </a:effectRef>
+          <a:fontRef idx="minor">
+            <a:schemeClr val="dk1"/>
+          </a:fontRef>
+        </p:style>
+        <p:txBody>
+          <a:bodyPr rtlCol="0" anchor="ctr"/>
+          <a:lstStyle/>
+          <a:p>
+            <a:pPr algn="ctr"/>
+            <a:r>
+              <a:rPr lang="de-AT" dirty="0"/>
+              <a:t>Offset </a:t>
+            </a:r>
+            <a:r>
+              <a:rPr lang="de-AT" dirty="0" err="1"/>
+              <a:t>Compensation</a:t>
+            </a:r>
+            <a:endParaRPr lang="de-DE" dirty="0"/>
+          </a:p>
+        </p:txBody>
+      </p:sp>
+      <p:sp>
+        <p:nvSpPr>
+          <p:cNvPr id="20" name="Rechteck 19">
+            <a:extLst>
+              <a:ext uri="{FF2B5EF4-FFF2-40B4-BE49-F238E27FC236}">
+                <a16:creationId xmlns:a16="http://schemas.microsoft.com/office/drawing/2014/main" id="{7958FC71-A143-83FA-74EC-9717DD6D17F6}"/>
+              </a:ext>
+            </a:extLst>
+          </p:cNvPr>
+          <p:cNvSpPr/>
+          <p:nvPr/>
+        </p:nvSpPr>
+        <p:spPr>
+          <a:xfrm>
+            <a:off x="5854701" y="1596470"/>
+            <a:ext cx="431799" cy="313983"/>
+          </a:xfrm>
+          <a:prstGeom prst="rect">
+            <a:avLst/>
+          </a:prstGeom>
+          <a:noFill/>
+          <a:ln>
+            <a:noFill/>
+          </a:ln>
+        </p:spPr>
+        <p:style>
+          <a:lnRef idx="0">
+            <a:scrgbClr r="0" g="0" b="0"/>
+          </a:lnRef>
+          <a:fillRef idx="0">
+            <a:scrgbClr r="0" g="0" b="0"/>
+          </a:fillRef>
+          <a:effectRef idx="0">
+            <a:scrgbClr r="0" g="0" b="0"/>
+          </a:effectRef>
+          <a:fontRef idx="minor">
+            <a:schemeClr val="dk1"/>
+          </a:fontRef>
+        </p:style>
+        <p:txBody>
+          <a:bodyPr rtlCol="0" anchor="ctr"/>
+          <a:lstStyle/>
+          <a:p>
+            <a:pPr algn="ctr"/>
+            <a:r>
+              <a:rPr lang="de-AT" dirty="0"/>
+              <a:t>+</a:t>
+            </a:r>
+            <a:endParaRPr lang="de-DE" dirty="0"/>
+          </a:p>
+        </p:txBody>
+      </p:sp>
+      <p:sp>
+        <p:nvSpPr>
+          <p:cNvPr id="21" name="Textfeld 20">
+            <a:extLst>
+              <a:ext uri="{FF2B5EF4-FFF2-40B4-BE49-F238E27FC236}">
+                <a16:creationId xmlns:a16="http://schemas.microsoft.com/office/drawing/2014/main" id="{A6589CFE-5345-8381-FBFF-1F503E55EC43}"/>
+              </a:ext>
+            </a:extLst>
+          </p:cNvPr>
+          <p:cNvSpPr txBox="1"/>
+          <p:nvPr/>
+        </p:nvSpPr>
+        <p:spPr>
+          <a:xfrm>
+            <a:off x="7207247" y="4286761"/>
+            <a:ext cx="1397000" cy="698498"/>
+          </a:xfrm>
+          <a:prstGeom prst="rect">
+            <a:avLst/>
+          </a:prstGeom>
+        </p:spPr>
+        <p:style>
+          <a:lnRef idx="2">
+            <a:schemeClr val="dk1"/>
+          </a:lnRef>
+          <a:fillRef idx="1">
+            <a:schemeClr val="lt1"/>
+          </a:fillRef>
+          <a:effectRef idx="0">
+            <a:schemeClr val="dk1"/>
+          </a:effectRef>
+          <a:fontRef idx="minor">
+            <a:schemeClr val="dk1"/>
+          </a:fontRef>
+        </p:style>
+        <p:txBody>
+          <a:bodyPr wrap="square" rtlCol="0" anchor="ctr">
+            <a:noAutofit/>
+          </a:bodyPr>
+          <a:lstStyle/>
+          <a:p>
+            <a:pPr algn="ctr"/>
+            <a:r>
+              <a:rPr lang="de-AT" dirty="0"/>
+              <a:t>Integral Controller</a:t>
+            </a:r>
+            <a:endParaRPr lang="de-DE" dirty="0"/>
+          </a:p>
+        </p:txBody>
+      </p:sp>
+      <p:cxnSp>
+        <p:nvCxnSpPr>
+          <p:cNvPr id="23" name="Gerade Verbindung mit Pfeil 22">
+            <a:extLst>
+              <a:ext uri="{FF2B5EF4-FFF2-40B4-BE49-F238E27FC236}">
+                <a16:creationId xmlns:a16="http://schemas.microsoft.com/office/drawing/2014/main" id="{E273A54D-0A52-4EF0-9EEB-6922ADBD1F0F}"/>
+              </a:ext>
+            </a:extLst>
+          </p:cNvPr>
+          <p:cNvCxnSpPr>
+            <a:cxnSpLocks/>
+            <a:stCxn id="10" idx="6"/>
+          </p:cNvCxnSpPr>
+          <p:nvPr/>
+        </p:nvCxnSpPr>
+        <p:spPr>
+          <a:xfrm>
+            <a:off x="6451600" y="1948765"/>
+            <a:ext cx="2406647" cy="0"/>
+          </a:xfrm>
+          <a:prstGeom prst="straightConnector1">
+            <a:avLst/>
+          </a:prstGeom>
+          <a:ln>
+            <a:tailEnd type="triangle"/>
+          </a:ln>
+        </p:spPr>
+        <p:style>
+          <a:lnRef idx="2">
+            <a:schemeClr val="dk1"/>
+          </a:lnRef>
+          <a:fillRef idx="0">
+            <a:schemeClr val="dk1"/>
+          </a:fillRef>
+          <a:effectRef idx="1">
+            <a:schemeClr val="dk1"/>
+          </a:effectRef>
+          <a:fontRef idx="minor">
+            <a:schemeClr val="tx1"/>
+          </a:fontRef>
+        </p:style>
+      </p:cxnSp>
+      <p:sp>
+        <p:nvSpPr>
+          <p:cNvPr id="26" name="Rechteck 25">
+            <a:extLst>
+              <a:ext uri="{FF2B5EF4-FFF2-40B4-BE49-F238E27FC236}">
+                <a16:creationId xmlns:a16="http://schemas.microsoft.com/office/drawing/2014/main" id="{456491E0-8F48-332B-2711-2AE89F668966}"/>
+              </a:ext>
+            </a:extLst>
+          </p:cNvPr>
+          <p:cNvSpPr/>
+          <p:nvPr/>
+        </p:nvSpPr>
+        <p:spPr>
+          <a:xfrm>
+            <a:off x="8896352" y="1596470"/>
+            <a:ext cx="1739895" cy="698499"/>
+          </a:xfrm>
+          <a:prstGeom prst="rect">
+            <a:avLst/>
+          </a:prstGeom>
+          <a:noFill/>
+          <a:ln>
+            <a:noFill/>
+          </a:ln>
+        </p:spPr>
+        <p:style>
+          <a:lnRef idx="0">
+            <a:scrgbClr r="0" g="0" b="0"/>
+          </a:lnRef>
+          <a:fillRef idx="0">
+            <a:scrgbClr r="0" g="0" b="0"/>
+          </a:fillRef>
+          <a:effectRef idx="0">
+            <a:scrgbClr r="0" g="0" b="0"/>
+          </a:effectRef>
+          <a:fontRef idx="minor">
+            <a:schemeClr val="dk1"/>
+          </a:fontRef>
+        </p:style>
+        <p:txBody>
+          <a:bodyPr rtlCol="0" anchor="ctr"/>
+          <a:lstStyle/>
+          <a:p>
+            <a:pPr algn="ctr"/>
+            <a:r>
+              <a:rPr lang="de-AT" dirty="0"/>
+              <a:t>Sensor Output</a:t>
+            </a:r>
+            <a:endParaRPr lang="de-DE" dirty="0"/>
+          </a:p>
+        </p:txBody>
+      </p:sp>
+      <p:sp>
+        <p:nvSpPr>
+          <p:cNvPr id="28" name="Textfeld 27">
+            <a:extLst>
+              <a:ext uri="{FF2B5EF4-FFF2-40B4-BE49-F238E27FC236}">
+                <a16:creationId xmlns:a16="http://schemas.microsoft.com/office/drawing/2014/main" id="{BB57041D-1B6C-3F8E-3EFC-AA34AFB70411}"/>
+              </a:ext>
+            </a:extLst>
+          </p:cNvPr>
+          <p:cNvSpPr txBox="1"/>
+          <p:nvPr/>
+        </p:nvSpPr>
+        <p:spPr>
+          <a:xfrm>
+            <a:off x="7207247" y="2768515"/>
+            <a:ext cx="1397000" cy="698497"/>
+          </a:xfrm>
+          <a:prstGeom prst="rect">
+            <a:avLst/>
+          </a:prstGeom>
+        </p:spPr>
+        <p:style>
+          <a:lnRef idx="2">
+            <a:schemeClr val="dk1"/>
+          </a:lnRef>
+          <a:fillRef idx="1">
+            <a:schemeClr val="lt1"/>
+          </a:fillRef>
+          <a:effectRef idx="0">
+            <a:schemeClr val="dk1"/>
+          </a:effectRef>
+          <a:fontRef idx="minor">
+            <a:schemeClr val="dk1"/>
+          </a:fontRef>
+        </p:style>
+        <p:txBody>
+          <a:bodyPr wrap="square" rtlCol="0" anchor="ctr">
+            <a:noAutofit/>
+          </a:bodyPr>
+          <a:lstStyle/>
+          <a:p>
+            <a:pPr algn="ctr"/>
+            <a:r>
+              <a:rPr lang="de-AT" dirty="0" err="1"/>
+              <a:t>Lowpass</a:t>
+            </a:r>
+            <a:r>
+              <a:rPr lang="de-AT" dirty="0"/>
+              <a:t> Filter</a:t>
+            </a:r>
+            <a:endParaRPr lang="de-DE" dirty="0"/>
+          </a:p>
+        </p:txBody>
+      </p:sp>
+      <p:cxnSp>
+        <p:nvCxnSpPr>
+          <p:cNvPr id="32" name="Gerade Verbindung mit Pfeil 31">
+            <a:extLst>
+              <a:ext uri="{FF2B5EF4-FFF2-40B4-BE49-F238E27FC236}">
+                <a16:creationId xmlns:a16="http://schemas.microsoft.com/office/drawing/2014/main" id="{A21CB0B4-9B52-17DE-081C-ECC8603941A7}"/>
+              </a:ext>
+            </a:extLst>
+          </p:cNvPr>
+          <p:cNvCxnSpPr>
+            <a:endCxn id="28" idx="0"/>
+          </p:cNvCxnSpPr>
+          <p:nvPr/>
+        </p:nvCxnSpPr>
+        <p:spPr>
+          <a:xfrm>
+            <a:off x="7905747" y="1948765"/>
+            <a:ext cx="0" cy="819750"/>
+          </a:xfrm>
+          <a:prstGeom prst="straightConnector1">
+            <a:avLst/>
+          </a:prstGeom>
+          <a:ln>
+            <a:tailEnd type="triangle"/>
+          </a:ln>
+        </p:spPr>
+        <p:style>
+          <a:lnRef idx="2">
+            <a:schemeClr val="dk1"/>
+          </a:lnRef>
+          <a:fillRef idx="0">
+            <a:schemeClr val="dk1"/>
+          </a:fillRef>
+          <a:effectRef idx="1">
+            <a:schemeClr val="dk1"/>
+          </a:effectRef>
+          <a:fontRef idx="minor">
+            <a:schemeClr val="tx1"/>
+          </a:fontRef>
+        </p:style>
+      </p:cxnSp>
+      <p:cxnSp>
+        <p:nvCxnSpPr>
+          <p:cNvPr id="33" name="Gerade Verbindung mit Pfeil 32">
+            <a:extLst>
+              <a:ext uri="{FF2B5EF4-FFF2-40B4-BE49-F238E27FC236}">
+                <a16:creationId xmlns:a16="http://schemas.microsoft.com/office/drawing/2014/main" id="{CC6E9014-A7AA-A5C3-1031-5E294D83DE4A}"/>
+              </a:ext>
+            </a:extLst>
+          </p:cNvPr>
+          <p:cNvCxnSpPr>
+            <a:cxnSpLocks/>
+            <a:stCxn id="38" idx="4"/>
+            <a:endCxn id="21" idx="0"/>
+          </p:cNvCxnSpPr>
+          <p:nvPr/>
+        </p:nvCxnSpPr>
+        <p:spPr>
+          <a:xfrm>
+            <a:off x="7905747" y="3962315"/>
+            <a:ext cx="0" cy="324446"/>
+          </a:xfrm>
+          <a:prstGeom prst="straightConnector1">
+            <a:avLst/>
+          </a:prstGeom>
+          <a:ln>
+            <a:tailEnd type="triangle"/>
+          </a:ln>
+        </p:spPr>
+        <p:style>
+          <a:lnRef idx="2">
+            <a:schemeClr val="dk1"/>
+          </a:lnRef>
+          <a:fillRef idx="0">
+            <a:schemeClr val="dk1"/>
+          </a:fillRef>
+          <a:effectRef idx="1">
+            <a:schemeClr val="dk1"/>
+          </a:effectRef>
+          <a:fontRef idx="minor">
+            <a:schemeClr val="tx1"/>
+          </a:fontRef>
+        </p:style>
+      </p:cxnSp>
+      <p:sp>
+        <p:nvSpPr>
+          <p:cNvPr id="38" name="Ellipse 37">
+            <a:extLst>
+              <a:ext uri="{FF2B5EF4-FFF2-40B4-BE49-F238E27FC236}">
+                <a16:creationId xmlns:a16="http://schemas.microsoft.com/office/drawing/2014/main" id="{9B688425-60FD-7DC1-DA8B-927A0E88BAC4}"/>
+              </a:ext>
+            </a:extLst>
+          </p:cNvPr>
+          <p:cNvSpPr/>
+          <p:nvPr/>
+        </p:nvSpPr>
+        <p:spPr>
+          <a:xfrm>
+            <a:off x="7791447" y="3733715"/>
+            <a:ext cx="228600" cy="228600"/>
+          </a:xfrm>
+          <a:prstGeom prst="ellipse">
+            <a:avLst/>
+          </a:prstGeom>
+        </p:spPr>
+        <p:style>
+          <a:lnRef idx="2">
+            <a:schemeClr val="dk1"/>
+          </a:lnRef>
+          <a:fillRef idx="1">
+            <a:schemeClr val="lt1"/>
+          </a:fillRef>
+          <a:effectRef idx="0">
+            <a:schemeClr val="dk1"/>
+          </a:effectRef>
+          <a:fontRef idx="minor">
+            <a:schemeClr val="dk1"/>
+          </a:fontRef>
+        </p:style>
+        <p:txBody>
+          <a:bodyPr rtlCol="0" anchor="ctr"/>
+          <a:lstStyle/>
+          <a:p>
+            <a:pPr algn="ctr"/>
+            <a:endParaRPr lang="de-DE"/>
+          </a:p>
+        </p:txBody>
+      </p:sp>
+      <p:cxnSp>
+        <p:nvCxnSpPr>
+          <p:cNvPr id="40" name="Gerade Verbindung mit Pfeil 39">
+            <a:extLst>
+              <a:ext uri="{FF2B5EF4-FFF2-40B4-BE49-F238E27FC236}">
+                <a16:creationId xmlns:a16="http://schemas.microsoft.com/office/drawing/2014/main" id="{CD7B3BDC-2F6D-86E4-50F5-51E2FD0A60BF}"/>
+              </a:ext>
+            </a:extLst>
+          </p:cNvPr>
+          <p:cNvCxnSpPr>
+            <a:cxnSpLocks/>
+            <a:stCxn id="28" idx="2"/>
+            <a:endCxn id="38" idx="0"/>
+          </p:cNvCxnSpPr>
+          <p:nvPr/>
+        </p:nvCxnSpPr>
+        <p:spPr>
+          <a:xfrm>
+            <a:off x="7905747" y="3467012"/>
+            <a:ext cx="0" cy="266703"/>
+          </a:xfrm>
+          <a:prstGeom prst="straightConnector1">
+            <a:avLst/>
+          </a:prstGeom>
+          <a:ln>
+            <a:tailEnd type="triangle"/>
+          </a:ln>
+        </p:spPr>
+        <p:style>
+          <a:lnRef idx="2">
+            <a:schemeClr val="dk1"/>
+          </a:lnRef>
+          <a:fillRef idx="0">
+            <a:schemeClr val="dk1"/>
+          </a:fillRef>
+          <a:effectRef idx="1">
+            <a:schemeClr val="dk1"/>
+          </a:effectRef>
+          <a:fontRef idx="minor">
+            <a:schemeClr val="tx1"/>
+          </a:fontRef>
+        </p:style>
+      </p:cxnSp>
+      <p:sp>
+        <p:nvSpPr>
+          <p:cNvPr id="43" name="Rechteck 42">
+            <a:extLst>
+              <a:ext uri="{FF2B5EF4-FFF2-40B4-BE49-F238E27FC236}">
+                <a16:creationId xmlns:a16="http://schemas.microsoft.com/office/drawing/2014/main" id="{4D1F5488-5C52-01F0-8DE3-5A14358DD3F6}"/>
+              </a:ext>
+            </a:extLst>
+          </p:cNvPr>
+          <p:cNvSpPr/>
+          <p:nvPr/>
+        </p:nvSpPr>
+        <p:spPr>
+          <a:xfrm>
+            <a:off x="8896352" y="3565484"/>
+            <a:ext cx="1098552" cy="565061"/>
+          </a:xfrm>
+          <a:prstGeom prst="rect">
+            <a:avLst/>
+          </a:prstGeom>
+          <a:noFill/>
+          <a:ln>
+            <a:noFill/>
+          </a:ln>
+        </p:spPr>
+        <p:style>
+          <a:lnRef idx="0">
+            <a:scrgbClr r="0" g="0" b="0"/>
+          </a:lnRef>
+          <a:fillRef idx="0">
+            <a:scrgbClr r="0" g="0" b="0"/>
+          </a:fillRef>
+          <a:effectRef idx="0">
+            <a:scrgbClr r="0" g="0" b="0"/>
+          </a:effectRef>
+          <a:fontRef idx="minor">
+            <a:schemeClr val="dk1"/>
+          </a:fontRef>
+        </p:style>
+        <p:txBody>
+          <a:bodyPr rtlCol="0" anchor="ctr"/>
+          <a:lstStyle/>
+          <a:p>
+            <a:pPr algn="ctr"/>
+            <a:r>
+              <a:rPr lang="de-AT" dirty="0"/>
+              <a:t>Set </a:t>
+            </a:r>
+            <a:r>
+              <a:rPr lang="de-AT" dirty="0" err="1"/>
+              <a:t>point</a:t>
+            </a:r>
+            <a:endParaRPr lang="de-DE" dirty="0"/>
+          </a:p>
+        </p:txBody>
+      </p:sp>
+      <p:cxnSp>
+        <p:nvCxnSpPr>
+          <p:cNvPr id="45" name="Gerade Verbindung mit Pfeil 44">
+            <a:extLst>
+              <a:ext uri="{FF2B5EF4-FFF2-40B4-BE49-F238E27FC236}">
+                <a16:creationId xmlns:a16="http://schemas.microsoft.com/office/drawing/2014/main" id="{9463E2CC-F47F-8F20-F2BD-81093B87F007}"/>
+              </a:ext>
+            </a:extLst>
+          </p:cNvPr>
+          <p:cNvCxnSpPr>
+            <a:stCxn id="43" idx="1"/>
+            <a:endCxn id="38" idx="6"/>
+          </p:cNvCxnSpPr>
+          <p:nvPr/>
+        </p:nvCxnSpPr>
+        <p:spPr>
+          <a:xfrm flipH="1">
+            <a:off x="8020047" y="3848015"/>
+            <a:ext cx="876305" cy="0"/>
+          </a:xfrm>
+          <a:prstGeom prst="straightConnector1">
+            <a:avLst/>
+          </a:prstGeom>
+          <a:ln>
+            <a:tailEnd type="triangle"/>
+          </a:ln>
+        </p:spPr>
+        <p:style>
+          <a:lnRef idx="2">
+            <a:schemeClr val="dk1"/>
+          </a:lnRef>
+          <a:fillRef idx="0">
+            <a:schemeClr val="dk1"/>
+          </a:fillRef>
+          <a:effectRef idx="1">
+            <a:schemeClr val="dk1"/>
+          </a:effectRef>
+          <a:fontRef idx="minor">
+            <a:schemeClr val="tx1"/>
+          </a:fontRef>
+        </p:style>
+      </p:cxnSp>
+      <p:sp>
+        <p:nvSpPr>
+          <p:cNvPr id="47" name="Rechteck 46">
+            <a:extLst>
+              <a:ext uri="{FF2B5EF4-FFF2-40B4-BE49-F238E27FC236}">
+                <a16:creationId xmlns:a16="http://schemas.microsoft.com/office/drawing/2014/main" id="{7C4F24E5-8FE5-9A99-6228-65211935224A}"/>
+              </a:ext>
+            </a:extLst>
+          </p:cNvPr>
+          <p:cNvSpPr/>
+          <p:nvPr/>
+        </p:nvSpPr>
+        <p:spPr>
+          <a:xfrm>
+            <a:off x="7969250" y="3534031"/>
+            <a:ext cx="431799" cy="313983"/>
+          </a:xfrm>
+          <a:prstGeom prst="rect">
+            <a:avLst/>
+          </a:prstGeom>
+          <a:noFill/>
+          <a:ln>
+            <a:noFill/>
+          </a:ln>
+        </p:spPr>
+        <p:style>
+          <a:lnRef idx="0">
+            <a:scrgbClr r="0" g="0" b="0"/>
+          </a:lnRef>
+          <a:fillRef idx="0">
+            <a:scrgbClr r="0" g="0" b="0"/>
+          </a:fillRef>
+          <a:effectRef idx="0">
+            <a:scrgbClr r="0" g="0" b="0"/>
+          </a:effectRef>
+          <a:fontRef idx="minor">
+            <a:schemeClr val="dk1"/>
+          </a:fontRef>
+        </p:style>
+        <p:txBody>
+          <a:bodyPr rtlCol="0" anchor="ctr"/>
+          <a:lstStyle/>
+          <a:p>
+            <a:pPr algn="ctr"/>
+            <a:r>
+              <a:rPr lang="de-AT" dirty="0"/>
+              <a:t>+</a:t>
+            </a:r>
+            <a:endParaRPr lang="de-DE" dirty="0"/>
+          </a:p>
+        </p:txBody>
+      </p:sp>
+      <p:sp>
+        <p:nvSpPr>
+          <p:cNvPr id="48" name="Textfeld 47">
+            <a:extLst>
+              <a:ext uri="{FF2B5EF4-FFF2-40B4-BE49-F238E27FC236}">
+                <a16:creationId xmlns:a16="http://schemas.microsoft.com/office/drawing/2014/main" id="{F4AB266A-4B36-C560-99A3-40027633B8F4}"/>
+              </a:ext>
+            </a:extLst>
+          </p:cNvPr>
+          <p:cNvSpPr txBox="1"/>
+          <p:nvPr/>
+        </p:nvSpPr>
+        <p:spPr>
+          <a:xfrm>
+            <a:off x="4183769" y="4286761"/>
+            <a:ext cx="1397000" cy="698499"/>
+          </a:xfrm>
+          <a:prstGeom prst="rect">
+            <a:avLst/>
+          </a:prstGeom>
+        </p:spPr>
+        <p:style>
+          <a:lnRef idx="2">
+            <a:schemeClr val="dk1"/>
+          </a:lnRef>
+          <a:fillRef idx="1">
+            <a:schemeClr val="lt1"/>
+          </a:fillRef>
+          <a:effectRef idx="0">
+            <a:schemeClr val="dk1"/>
+          </a:effectRef>
+          <a:fontRef idx="minor">
+            <a:schemeClr val="dk1"/>
+          </a:fontRef>
+        </p:style>
+        <p:txBody>
+          <a:bodyPr wrap="square" rtlCol="0" anchor="ctr">
+            <a:noAutofit/>
+          </a:bodyPr>
+          <a:lstStyle/>
+          <a:p>
+            <a:pPr algn="ctr"/>
+            <a:r>
+              <a:rPr lang="de-AT" dirty="0"/>
+              <a:t>Lorentz </a:t>
+            </a:r>
+            <a:r>
+              <a:rPr lang="de-AT" dirty="0" err="1"/>
+              <a:t>Actuator</a:t>
+            </a:r>
+            <a:endParaRPr lang="de-DE" dirty="0"/>
+          </a:p>
+        </p:txBody>
+      </p:sp>
+      <p:sp>
+        <p:nvSpPr>
+          <p:cNvPr id="49" name="Ellipse 48">
+            <a:extLst>
+              <a:ext uri="{FF2B5EF4-FFF2-40B4-BE49-F238E27FC236}">
+                <a16:creationId xmlns:a16="http://schemas.microsoft.com/office/drawing/2014/main" id="{BB387073-2E4F-9702-7BB8-7AD2DFCACF70}"/>
+              </a:ext>
+            </a:extLst>
+          </p:cNvPr>
+          <p:cNvSpPr/>
+          <p:nvPr/>
+        </p:nvSpPr>
+        <p:spPr>
+          <a:xfrm>
+            <a:off x="6292850" y="4523643"/>
+            <a:ext cx="228600" cy="228600"/>
+          </a:xfrm>
+          <a:prstGeom prst="ellipse">
+            <a:avLst/>
+          </a:prstGeom>
+        </p:spPr>
+        <p:style>
+          <a:lnRef idx="2">
+            <a:schemeClr val="dk1"/>
+          </a:lnRef>
+          <a:fillRef idx="1">
+            <a:schemeClr val="lt1"/>
+          </a:fillRef>
+          <a:effectRef idx="0">
+            <a:schemeClr val="dk1"/>
+          </a:effectRef>
+          <a:fontRef idx="minor">
+            <a:schemeClr val="dk1"/>
+          </a:fontRef>
+        </p:style>
+        <p:txBody>
+          <a:bodyPr rtlCol="0" anchor="ctr"/>
+          <a:lstStyle/>
+          <a:p>
+            <a:pPr algn="ctr"/>
+            <a:endParaRPr lang="de-DE"/>
+          </a:p>
+        </p:txBody>
+      </p:sp>
+      <p:cxnSp>
+        <p:nvCxnSpPr>
+          <p:cNvPr id="50" name="Gerade Verbindung mit Pfeil 49">
+            <a:extLst>
+              <a:ext uri="{FF2B5EF4-FFF2-40B4-BE49-F238E27FC236}">
+                <a16:creationId xmlns:a16="http://schemas.microsoft.com/office/drawing/2014/main" id="{AB28872B-DE0C-F82B-C841-EC5372ADDED3}"/>
+              </a:ext>
+            </a:extLst>
+          </p:cNvPr>
+          <p:cNvCxnSpPr>
+            <a:cxnSpLocks/>
+            <a:stCxn id="21" idx="1"/>
+            <a:endCxn id="49" idx="6"/>
+          </p:cNvCxnSpPr>
+          <p:nvPr/>
+        </p:nvCxnSpPr>
+        <p:spPr>
+          <a:xfrm flipH="1">
+            <a:off x="6521450" y="4636010"/>
+            <a:ext cx="685797" cy="1933"/>
+          </a:xfrm>
+          <a:prstGeom prst="straightConnector1">
+            <a:avLst/>
+          </a:prstGeom>
+          <a:ln>
+            <a:tailEnd type="triangle"/>
+          </a:ln>
+        </p:spPr>
+        <p:style>
+          <a:lnRef idx="2">
+            <a:schemeClr val="dk1"/>
+          </a:lnRef>
+          <a:fillRef idx="0">
+            <a:schemeClr val="dk1"/>
+          </a:fillRef>
+          <a:effectRef idx="1">
+            <a:schemeClr val="dk1"/>
+          </a:effectRef>
+          <a:fontRef idx="minor">
+            <a:schemeClr val="tx1"/>
+          </a:fontRef>
+        </p:style>
+      </p:cxnSp>
+      <p:sp>
+        <p:nvSpPr>
+          <p:cNvPr id="51" name="Rechteck 50">
+            <a:extLst>
+              <a:ext uri="{FF2B5EF4-FFF2-40B4-BE49-F238E27FC236}">
+                <a16:creationId xmlns:a16="http://schemas.microsoft.com/office/drawing/2014/main" id="{38B21DCC-B797-70E1-355D-11A560FDF578}"/>
+              </a:ext>
+            </a:extLst>
+          </p:cNvPr>
+          <p:cNvSpPr/>
+          <p:nvPr/>
+        </p:nvSpPr>
+        <p:spPr>
+          <a:xfrm>
+            <a:off x="6407150" y="4707618"/>
+            <a:ext cx="431799" cy="313983"/>
+          </a:xfrm>
+          <a:prstGeom prst="rect">
+            <a:avLst/>
+          </a:prstGeom>
+          <a:noFill/>
+          <a:ln>
+            <a:noFill/>
+          </a:ln>
+        </p:spPr>
+        <p:style>
+          <a:lnRef idx="0">
+            <a:scrgbClr r="0" g="0" b="0"/>
+          </a:lnRef>
+          <a:fillRef idx="0">
+            <a:scrgbClr r="0" g="0" b="0"/>
+          </a:fillRef>
+          <a:effectRef idx="0">
+            <a:scrgbClr r="0" g="0" b="0"/>
+          </a:effectRef>
+          <a:fontRef idx="minor">
+            <a:schemeClr val="dk1"/>
+          </a:fontRef>
+        </p:style>
+        <p:txBody>
+          <a:bodyPr rtlCol="0" anchor="ctr"/>
+          <a:lstStyle/>
+          <a:p>
+            <a:pPr algn="ctr"/>
+            <a:r>
+              <a:rPr lang="de-AT" dirty="0"/>
+              <a:t>+</a:t>
+            </a:r>
+            <a:endParaRPr lang="de-DE" dirty="0"/>
+          </a:p>
+        </p:txBody>
+      </p:sp>
+      <p:cxnSp>
+        <p:nvCxnSpPr>
+          <p:cNvPr id="54" name="Gerade Verbindung mit Pfeil 53">
+            <a:extLst>
+              <a:ext uri="{FF2B5EF4-FFF2-40B4-BE49-F238E27FC236}">
+                <a16:creationId xmlns:a16="http://schemas.microsoft.com/office/drawing/2014/main" id="{6B73DBE3-86E0-7139-CCCC-0DF769F5B65E}"/>
+              </a:ext>
+            </a:extLst>
+          </p:cNvPr>
+          <p:cNvCxnSpPr>
+            <a:cxnSpLocks/>
+            <a:stCxn id="49" idx="2"/>
+            <a:endCxn id="48" idx="3"/>
+          </p:cNvCxnSpPr>
+          <p:nvPr/>
+        </p:nvCxnSpPr>
+        <p:spPr>
+          <a:xfrm flipH="1" flipV="1">
+            <a:off x="5580769" y="4636011"/>
+            <a:ext cx="712081" cy="1932"/>
+          </a:xfrm>
+          <a:prstGeom prst="straightConnector1">
+            <a:avLst/>
+          </a:prstGeom>
+          <a:ln>
+            <a:tailEnd type="triangle"/>
+          </a:ln>
+        </p:spPr>
+        <p:style>
+          <a:lnRef idx="2">
+            <a:schemeClr val="dk1"/>
+          </a:lnRef>
+          <a:fillRef idx="0">
+            <a:schemeClr val="dk1"/>
+          </a:fillRef>
+          <a:effectRef idx="1">
+            <a:schemeClr val="dk1"/>
+          </a:effectRef>
+          <a:fontRef idx="minor">
+            <a:schemeClr val="tx1"/>
+          </a:fontRef>
+        </p:style>
+      </p:cxnSp>
+      <p:cxnSp>
+        <p:nvCxnSpPr>
+          <p:cNvPr id="57" name="Gerade Verbindung mit Pfeil 56">
+            <a:extLst>
+              <a:ext uri="{FF2B5EF4-FFF2-40B4-BE49-F238E27FC236}">
+                <a16:creationId xmlns:a16="http://schemas.microsoft.com/office/drawing/2014/main" id="{934C1EC6-56DE-0379-C8A1-610BD512B5C5}"/>
+              </a:ext>
+            </a:extLst>
+          </p:cNvPr>
+          <p:cNvCxnSpPr>
+            <a:cxnSpLocks/>
+            <a:endCxn id="49" idx="4"/>
+          </p:cNvCxnSpPr>
+          <p:nvPr/>
+        </p:nvCxnSpPr>
+        <p:spPr>
+          <a:xfrm flipV="1">
+            <a:off x="6407150" y="4752243"/>
+            <a:ext cx="0" cy="509287"/>
+          </a:xfrm>
+          <a:prstGeom prst="straightConnector1">
+            <a:avLst/>
+          </a:prstGeom>
+          <a:ln>
+            <a:tailEnd type="triangle"/>
+          </a:ln>
+        </p:spPr>
+        <p:style>
+          <a:lnRef idx="2">
+            <a:schemeClr val="dk1"/>
+          </a:lnRef>
+          <a:fillRef idx="0">
+            <a:schemeClr val="dk1"/>
+          </a:fillRef>
+          <a:effectRef idx="1">
+            <a:schemeClr val="dk1"/>
+          </a:effectRef>
+          <a:fontRef idx="minor">
+            <a:schemeClr val="tx1"/>
+          </a:fontRef>
+        </p:style>
+      </p:cxnSp>
+      <p:sp>
+        <p:nvSpPr>
+          <p:cNvPr id="60" name="Rechteck 59">
+            <a:extLst>
+              <a:ext uri="{FF2B5EF4-FFF2-40B4-BE49-F238E27FC236}">
+                <a16:creationId xmlns:a16="http://schemas.microsoft.com/office/drawing/2014/main" id="{4920B0EB-CD40-A36D-EAA9-2A95D0C8BE83}"/>
+              </a:ext>
+            </a:extLst>
+          </p:cNvPr>
+          <p:cNvSpPr/>
+          <p:nvPr/>
+        </p:nvSpPr>
+        <p:spPr>
+          <a:xfrm>
+            <a:off x="5537202" y="5235949"/>
+            <a:ext cx="1739895" cy="698499"/>
+          </a:xfrm>
+          <a:prstGeom prst="rect">
+            <a:avLst/>
+          </a:prstGeom>
+          <a:noFill/>
+          <a:ln>
+            <a:noFill/>
+          </a:ln>
+        </p:spPr>
+        <p:style>
+          <a:lnRef idx="0">
+            <a:scrgbClr r="0" g="0" b="0"/>
+          </a:lnRef>
+          <a:fillRef idx="0">
+            <a:scrgbClr r="0" g="0" b="0"/>
+          </a:fillRef>
+          <a:effectRef idx="0">
+            <a:scrgbClr r="0" g="0" b="0"/>
+          </a:effectRef>
+          <a:fontRef idx="minor">
+            <a:schemeClr val="dk1"/>
+          </a:fontRef>
+        </p:style>
+        <p:txBody>
+          <a:bodyPr rtlCol="0" anchor="ctr"/>
+          <a:lstStyle/>
+          <a:p>
+            <a:pPr algn="ctr"/>
+            <a:r>
+              <a:rPr lang="de-AT" dirty="0" err="1"/>
+              <a:t>Actuation</a:t>
+            </a:r>
+            <a:r>
+              <a:rPr lang="de-AT" dirty="0"/>
+              <a:t> Signal</a:t>
+            </a:r>
+            <a:endParaRPr lang="de-DE" dirty="0"/>
+          </a:p>
+        </p:txBody>
+      </p:sp>
+      <p:sp>
+        <p:nvSpPr>
+          <p:cNvPr id="62" name="Ellipse 61">
+            <a:extLst>
+              <a:ext uri="{FF2B5EF4-FFF2-40B4-BE49-F238E27FC236}">
+                <a16:creationId xmlns:a16="http://schemas.microsoft.com/office/drawing/2014/main" id="{E545F835-10D7-B9E9-F0C2-80B0A3F54952}"/>
+              </a:ext>
+            </a:extLst>
+          </p:cNvPr>
+          <p:cNvSpPr/>
+          <p:nvPr/>
+        </p:nvSpPr>
+        <p:spPr>
+          <a:xfrm>
+            <a:off x="2196226" y="4523643"/>
+            <a:ext cx="228600" cy="228600"/>
+          </a:xfrm>
+          <a:prstGeom prst="ellipse">
+            <a:avLst/>
+          </a:prstGeom>
+        </p:spPr>
+        <p:style>
+          <a:lnRef idx="2">
+            <a:schemeClr val="dk1"/>
+          </a:lnRef>
+          <a:fillRef idx="1">
+            <a:schemeClr val="lt1"/>
+          </a:fillRef>
+          <a:effectRef idx="0">
+            <a:schemeClr val="dk1"/>
+          </a:effectRef>
+          <a:fontRef idx="minor">
+            <a:schemeClr val="dk1"/>
+          </a:fontRef>
+        </p:style>
+        <p:txBody>
+          <a:bodyPr rtlCol="0" anchor="ctr"/>
+          <a:lstStyle/>
+          <a:p>
+            <a:pPr algn="ctr"/>
+            <a:endParaRPr lang="de-DE"/>
+          </a:p>
+        </p:txBody>
+      </p:sp>
+      <p:sp>
+        <p:nvSpPr>
+          <p:cNvPr id="63" name="Rechteck 62">
+            <a:extLst>
+              <a:ext uri="{FF2B5EF4-FFF2-40B4-BE49-F238E27FC236}">
+                <a16:creationId xmlns:a16="http://schemas.microsoft.com/office/drawing/2014/main" id="{A60B1273-DEEB-D651-6351-29C5DCAACD28}"/>
+              </a:ext>
+            </a:extLst>
+          </p:cNvPr>
+          <p:cNvSpPr/>
+          <p:nvPr/>
+        </p:nvSpPr>
+        <p:spPr>
+          <a:xfrm>
+            <a:off x="2310526" y="4707618"/>
+            <a:ext cx="431799" cy="313983"/>
+          </a:xfrm>
+          <a:prstGeom prst="rect">
+            <a:avLst/>
+          </a:prstGeom>
+          <a:noFill/>
+          <a:ln>
+            <a:noFill/>
+          </a:ln>
+        </p:spPr>
+        <p:style>
+          <a:lnRef idx="0">
+            <a:scrgbClr r="0" g="0" b="0"/>
+          </a:lnRef>
+          <a:fillRef idx="0">
+            <a:scrgbClr r="0" g="0" b="0"/>
+          </a:fillRef>
+          <a:effectRef idx="0">
+            <a:scrgbClr r="0" g="0" b="0"/>
+          </a:effectRef>
+          <a:fontRef idx="minor">
+            <a:schemeClr val="dk1"/>
+          </a:fontRef>
+        </p:style>
+        <p:txBody>
+          <a:bodyPr rtlCol="0" anchor="ctr"/>
+          <a:lstStyle/>
+          <a:p>
+            <a:pPr algn="ctr"/>
+            <a:r>
+              <a:rPr lang="de-AT" dirty="0"/>
+              <a:t>+</a:t>
+            </a:r>
+            <a:endParaRPr lang="de-DE" dirty="0"/>
+          </a:p>
+        </p:txBody>
+      </p:sp>
+      <p:cxnSp>
+        <p:nvCxnSpPr>
+          <p:cNvPr id="64" name="Gerade Verbindung mit Pfeil 63">
+            <a:extLst>
+              <a:ext uri="{FF2B5EF4-FFF2-40B4-BE49-F238E27FC236}">
+                <a16:creationId xmlns:a16="http://schemas.microsoft.com/office/drawing/2014/main" id="{CE821A4F-0ED3-CFD2-A923-B9C188FE5FF4}"/>
+              </a:ext>
+            </a:extLst>
+          </p:cNvPr>
+          <p:cNvCxnSpPr>
+            <a:cxnSpLocks/>
+            <a:endCxn id="62" idx="4"/>
+          </p:cNvCxnSpPr>
+          <p:nvPr/>
+        </p:nvCxnSpPr>
+        <p:spPr>
+          <a:xfrm flipV="1">
+            <a:off x="2310526" y="4752243"/>
+            <a:ext cx="0" cy="509287"/>
+          </a:xfrm>
+          <a:prstGeom prst="straightConnector1">
+            <a:avLst/>
+          </a:prstGeom>
+          <a:ln>
+            <a:tailEnd type="triangle"/>
+          </a:ln>
+        </p:spPr>
+        <p:style>
+          <a:lnRef idx="2">
+            <a:schemeClr val="dk1"/>
+          </a:lnRef>
+          <a:fillRef idx="0">
+            <a:schemeClr val="dk1"/>
+          </a:fillRef>
+          <a:effectRef idx="1">
+            <a:schemeClr val="dk1"/>
+          </a:effectRef>
+          <a:fontRef idx="minor">
+            <a:schemeClr val="tx1"/>
+          </a:fontRef>
+        </p:style>
+      </p:cxnSp>
+      <p:sp>
+        <p:nvSpPr>
+          <p:cNvPr id="65" name="Rechteck 64">
+            <a:extLst>
+              <a:ext uri="{FF2B5EF4-FFF2-40B4-BE49-F238E27FC236}">
+                <a16:creationId xmlns:a16="http://schemas.microsoft.com/office/drawing/2014/main" id="{1A846A42-39AC-E481-28EF-5331E1FE57E0}"/>
+              </a:ext>
+            </a:extLst>
+          </p:cNvPr>
+          <p:cNvSpPr/>
+          <p:nvPr/>
+        </p:nvSpPr>
+        <p:spPr>
+          <a:xfrm>
+            <a:off x="1440578" y="5235949"/>
+            <a:ext cx="1739895" cy="698499"/>
+          </a:xfrm>
+          <a:prstGeom prst="rect">
+            <a:avLst/>
+          </a:prstGeom>
+          <a:noFill/>
+          <a:ln>
+            <a:noFill/>
+          </a:ln>
+        </p:spPr>
+        <p:style>
+          <a:lnRef idx="0">
+            <a:scrgbClr r="0" g="0" b="0"/>
+          </a:lnRef>
+          <a:fillRef idx="0">
+            <a:scrgbClr r="0" g="0" b="0"/>
+          </a:fillRef>
+          <a:effectRef idx="0">
+            <a:scrgbClr r="0" g="0" b="0"/>
+          </a:effectRef>
+          <a:fontRef idx="minor">
+            <a:schemeClr val="dk1"/>
+          </a:fontRef>
+        </p:style>
+        <p:txBody>
+          <a:bodyPr rtlCol="0" anchor="ctr"/>
+          <a:lstStyle/>
+          <a:p>
+            <a:pPr algn="ctr"/>
+            <a:r>
+              <a:rPr lang="de-AT" dirty="0"/>
+              <a:t>Sample </a:t>
+            </a:r>
+            <a:r>
+              <a:rPr lang="de-AT" dirty="0" err="1"/>
+              <a:t>Topography</a:t>
+            </a:r>
+            <a:endParaRPr lang="de-DE" dirty="0"/>
+          </a:p>
+        </p:txBody>
+      </p:sp>
+      <p:cxnSp>
+        <p:nvCxnSpPr>
+          <p:cNvPr id="66" name="Gerade Verbindung mit Pfeil 65">
+            <a:extLst>
+              <a:ext uri="{FF2B5EF4-FFF2-40B4-BE49-F238E27FC236}">
+                <a16:creationId xmlns:a16="http://schemas.microsoft.com/office/drawing/2014/main" id="{3E48498C-94FA-57DA-9E34-8D16867720FC}"/>
+              </a:ext>
+            </a:extLst>
+          </p:cNvPr>
+          <p:cNvCxnSpPr>
+            <a:cxnSpLocks/>
+            <a:stCxn id="48" idx="1"/>
+            <a:endCxn id="62" idx="6"/>
+          </p:cNvCxnSpPr>
+          <p:nvPr/>
+        </p:nvCxnSpPr>
+        <p:spPr>
+          <a:xfrm flipH="1">
+            <a:off x="2424826" y="4636011"/>
+            <a:ext cx="1758943" cy="1932"/>
+          </a:xfrm>
+          <a:prstGeom prst="straightConnector1">
+            <a:avLst/>
+          </a:prstGeom>
+          <a:ln>
+            <a:tailEnd type="triangle"/>
+          </a:ln>
+        </p:spPr>
+        <p:style>
+          <a:lnRef idx="2">
+            <a:schemeClr val="dk1"/>
+          </a:lnRef>
+          <a:fillRef idx="0">
+            <a:schemeClr val="dk1"/>
+          </a:fillRef>
+          <a:effectRef idx="1">
+            <a:schemeClr val="dk1"/>
+          </a:effectRef>
+          <a:fontRef idx="minor">
+            <a:schemeClr val="tx1"/>
+          </a:fontRef>
+        </p:style>
+      </p:cxnSp>
+      <p:cxnSp>
+        <p:nvCxnSpPr>
+          <p:cNvPr id="69" name="Gerade Verbindung mit Pfeil 68">
+            <a:extLst>
+              <a:ext uri="{FF2B5EF4-FFF2-40B4-BE49-F238E27FC236}">
+                <a16:creationId xmlns:a16="http://schemas.microsoft.com/office/drawing/2014/main" id="{EB05C512-2506-84BB-D24E-A7F5B7AA7E36}"/>
+              </a:ext>
+            </a:extLst>
+          </p:cNvPr>
+          <p:cNvCxnSpPr>
+            <a:cxnSpLocks/>
+            <a:stCxn id="62" idx="0"/>
+            <a:endCxn id="73" idx="2"/>
+          </p:cNvCxnSpPr>
+          <p:nvPr/>
+        </p:nvCxnSpPr>
+        <p:spPr>
+          <a:xfrm flipV="1">
+            <a:off x="2310526" y="3816261"/>
+            <a:ext cx="2285" cy="707382"/>
+          </a:xfrm>
+          <a:prstGeom prst="straightConnector1">
+            <a:avLst/>
+          </a:prstGeom>
+          <a:ln>
+            <a:tailEnd type="triangle"/>
+          </a:ln>
+        </p:spPr>
+        <p:style>
+          <a:lnRef idx="2">
+            <a:schemeClr val="dk1"/>
+          </a:lnRef>
+          <a:fillRef idx="0">
+            <a:schemeClr val="dk1"/>
+          </a:fillRef>
+          <a:effectRef idx="1">
+            <a:schemeClr val="dk1"/>
+          </a:effectRef>
+          <a:fontRef idx="minor">
+            <a:schemeClr val="tx1"/>
+          </a:fontRef>
+        </p:style>
+      </p:cxnSp>
+      <p:sp>
+        <p:nvSpPr>
+          <p:cNvPr id="73" name="Textfeld 72">
+            <a:extLst>
+              <a:ext uri="{FF2B5EF4-FFF2-40B4-BE49-F238E27FC236}">
+                <a16:creationId xmlns:a16="http://schemas.microsoft.com/office/drawing/2014/main" id="{5DA7CDFC-8CE4-F431-A963-9CCACC04FBD1}"/>
+              </a:ext>
+            </a:extLst>
+          </p:cNvPr>
+          <p:cNvSpPr txBox="1"/>
+          <p:nvPr/>
+        </p:nvSpPr>
+        <p:spPr>
+          <a:xfrm>
+            <a:off x="1614311" y="3117762"/>
+            <a:ext cx="1397000" cy="698499"/>
+          </a:xfrm>
+          <a:prstGeom prst="rect">
+            <a:avLst/>
+          </a:prstGeom>
+        </p:spPr>
+        <p:style>
+          <a:lnRef idx="2">
+            <a:schemeClr val="dk1"/>
+          </a:lnRef>
+          <a:fillRef idx="1">
+            <a:schemeClr val="lt1"/>
+          </a:fillRef>
+          <a:effectRef idx="0">
+            <a:schemeClr val="dk1"/>
+          </a:effectRef>
+          <a:fontRef idx="minor">
+            <a:schemeClr val="dk1"/>
+          </a:fontRef>
+        </p:style>
+        <p:txBody>
+          <a:bodyPr wrap="square" rtlCol="0" anchor="ctr">
+            <a:noAutofit/>
+          </a:bodyPr>
+          <a:lstStyle/>
+          <a:p>
+            <a:pPr algn="ctr"/>
+            <a:r>
+              <a:rPr lang="de-AT" dirty="0"/>
+              <a:t>AFM </a:t>
+            </a:r>
+            <a:r>
+              <a:rPr lang="de-AT" dirty="0" err="1"/>
+              <a:t>Mechanics</a:t>
+            </a:r>
+            <a:endParaRPr lang="de-DE" dirty="0"/>
+          </a:p>
+        </p:txBody>
+      </p:sp>
+      <p:cxnSp>
+        <p:nvCxnSpPr>
+          <p:cNvPr id="75" name="Gerade Verbindung mit Pfeil 74">
+            <a:extLst>
+              <a:ext uri="{FF2B5EF4-FFF2-40B4-BE49-F238E27FC236}">
+                <a16:creationId xmlns:a16="http://schemas.microsoft.com/office/drawing/2014/main" id="{19753826-D3A9-955D-FCDC-85F3ED0F8469}"/>
+              </a:ext>
+            </a:extLst>
+          </p:cNvPr>
+          <p:cNvCxnSpPr>
+            <a:cxnSpLocks/>
+            <a:stCxn id="73" idx="0"/>
+            <a:endCxn id="4" idx="2"/>
+          </p:cNvCxnSpPr>
+          <p:nvPr/>
+        </p:nvCxnSpPr>
+        <p:spPr>
+          <a:xfrm flipV="1">
+            <a:off x="2312811" y="2294969"/>
+            <a:ext cx="0" cy="822793"/>
+          </a:xfrm>
+          <a:prstGeom prst="straightConnector1">
+            <a:avLst/>
+          </a:prstGeom>
+          <a:ln>
+            <a:tailEnd type="triangle"/>
+          </a:ln>
+        </p:spPr>
+        <p:style>
+          <a:lnRef idx="2">
+            <a:schemeClr val="dk1"/>
+          </a:lnRef>
+          <a:fillRef idx="0">
+            <a:schemeClr val="dk1"/>
+          </a:fillRef>
+          <a:effectRef idx="1">
+            <a:schemeClr val="dk1"/>
+          </a:effectRef>
+          <a:fontRef idx="minor">
+            <a:schemeClr val="tx1"/>
+          </a:fontRef>
+        </p:style>
+      </p:cxnSp>
+      <p:sp>
+        <p:nvSpPr>
+          <p:cNvPr id="2" name="Rechteck 1">
+            <a:extLst>
+              <a:ext uri="{FF2B5EF4-FFF2-40B4-BE49-F238E27FC236}">
+                <a16:creationId xmlns:a16="http://schemas.microsoft.com/office/drawing/2014/main" id="{3D38A1A2-3887-8488-D542-0AE9F85F4A88}"/>
+              </a:ext>
+            </a:extLst>
+          </p:cNvPr>
+          <p:cNvSpPr/>
+          <p:nvPr/>
+        </p:nvSpPr>
+        <p:spPr>
+          <a:xfrm>
+            <a:off x="5547606" y="5788968"/>
+            <a:ext cx="1739895" cy="698499"/>
+          </a:xfrm>
+          <a:prstGeom prst="rect">
+            <a:avLst/>
+          </a:prstGeom>
+          <a:noFill/>
+          <a:ln>
+            <a:noFill/>
+          </a:ln>
+        </p:spPr>
+        <p:style>
+          <a:lnRef idx="0">
+            <a:scrgbClr r="0" g="0" b="0"/>
+          </a:lnRef>
+          <a:fillRef idx="0">
+            <a:scrgbClr r="0" g="0" b="0"/>
+          </a:fillRef>
+          <a:effectRef idx="0">
+            <a:scrgbClr r="0" g="0" b="0"/>
+          </a:effectRef>
+          <a:fontRef idx="minor">
+            <a:schemeClr val="dk1"/>
+          </a:fontRef>
+        </p:style>
+        <p:txBody>
+          <a:bodyPr rtlCol="0" anchor="ctr"/>
+          <a:lstStyle/>
+          <a:p>
+            <a:pPr algn="ctr"/>
+            <a:r>
+              <a:rPr lang="de-AT" dirty="0">
+                <a:solidFill>
+                  <a:srgbClr val="FF0000"/>
+                </a:solidFill>
+              </a:rPr>
+              <a:t>20.4 Hz</a:t>
+            </a:r>
+            <a:endParaRPr lang="de-DE" dirty="0">
+              <a:solidFill>
+                <a:srgbClr val="FF0000"/>
+              </a:solidFill>
+            </a:endParaRPr>
+          </a:p>
+        </p:txBody>
+      </p:sp>
+      <p:sp>
+        <p:nvSpPr>
+          <p:cNvPr id="3" name="Rechteck 2">
+            <a:extLst>
+              <a:ext uri="{FF2B5EF4-FFF2-40B4-BE49-F238E27FC236}">
+                <a16:creationId xmlns:a16="http://schemas.microsoft.com/office/drawing/2014/main" id="{C317D126-BBB3-FB49-C8AE-3904AAD3D13B}"/>
+              </a:ext>
+            </a:extLst>
+          </p:cNvPr>
+          <p:cNvSpPr/>
+          <p:nvPr/>
+        </p:nvSpPr>
+        <p:spPr>
+          <a:xfrm>
+            <a:off x="8687651" y="2722243"/>
+            <a:ext cx="876304" cy="698499"/>
+          </a:xfrm>
+          <a:prstGeom prst="rect">
+            <a:avLst/>
+          </a:prstGeom>
+          <a:noFill/>
+          <a:ln>
+            <a:noFill/>
+          </a:ln>
+        </p:spPr>
+        <p:style>
+          <a:lnRef idx="0">
+            <a:scrgbClr r="0" g="0" b="0"/>
+          </a:lnRef>
+          <a:fillRef idx="0">
+            <a:scrgbClr r="0" g="0" b="0"/>
+          </a:fillRef>
+          <a:effectRef idx="0">
+            <a:scrgbClr r="0" g="0" b="0"/>
+          </a:effectRef>
+          <a:fontRef idx="minor">
+            <a:schemeClr val="dk1"/>
+          </a:fontRef>
+        </p:style>
+        <p:txBody>
+          <a:bodyPr rtlCol="0" anchor="ctr"/>
+          <a:lstStyle/>
+          <a:p>
+            <a:pPr algn="ctr"/>
+            <a:r>
+              <a:rPr lang="de-AT" dirty="0">
+                <a:solidFill>
+                  <a:srgbClr val="FF0000"/>
+                </a:solidFill>
+              </a:rPr>
+              <a:t>14 Hz</a:t>
+            </a:r>
+          </a:p>
+          <a:p>
+            <a:pPr algn="ctr"/>
+            <a:r>
+              <a:rPr lang="de-AT" dirty="0">
+                <a:solidFill>
+                  <a:srgbClr val="FF0000"/>
+                </a:solidFill>
+              </a:rPr>
+              <a:t>0 dB</a:t>
+            </a:r>
+            <a:endParaRPr lang="de-DE" dirty="0">
+              <a:solidFill>
+                <a:srgbClr val="FF0000"/>
+              </a:solidFill>
+            </a:endParaRPr>
+          </a:p>
+        </p:txBody>
+      </p:sp>
+      <p:sp>
+        <p:nvSpPr>
+          <p:cNvPr id="6" name="Rechteck 5">
+            <a:extLst>
+              <a:ext uri="{FF2B5EF4-FFF2-40B4-BE49-F238E27FC236}">
+                <a16:creationId xmlns:a16="http://schemas.microsoft.com/office/drawing/2014/main" id="{78F152B2-0EE9-AEA3-4E81-39D46F3F5E47}"/>
+              </a:ext>
+            </a:extLst>
+          </p:cNvPr>
+          <p:cNvSpPr/>
+          <p:nvPr/>
+        </p:nvSpPr>
+        <p:spPr>
+          <a:xfrm>
+            <a:off x="5524061" y="3936124"/>
+            <a:ext cx="1739895" cy="698499"/>
+          </a:xfrm>
+          <a:prstGeom prst="rect">
+            <a:avLst/>
+          </a:prstGeom>
+          <a:noFill/>
+          <a:ln>
+            <a:noFill/>
+          </a:ln>
+        </p:spPr>
+        <p:style>
+          <a:lnRef idx="0">
+            <a:scrgbClr r="0" g="0" b="0"/>
+          </a:lnRef>
+          <a:fillRef idx="0">
+            <a:scrgbClr r="0" g="0" b="0"/>
+          </a:fillRef>
+          <a:effectRef idx="0">
+            <a:scrgbClr r="0" g="0" b="0"/>
+          </a:effectRef>
+          <a:fontRef idx="minor">
+            <a:schemeClr val="dk1"/>
+          </a:fontRef>
+        </p:style>
+        <p:txBody>
+          <a:bodyPr rtlCol="0" anchor="ctr"/>
+          <a:lstStyle/>
+          <a:p>
+            <a:pPr algn="ctr"/>
+            <a:r>
+              <a:rPr lang="de-AT" dirty="0" err="1">
+                <a:solidFill>
+                  <a:srgbClr val="FF0000"/>
+                </a:solidFill>
+              </a:rPr>
+              <a:t>Adder</a:t>
+            </a:r>
+            <a:endParaRPr lang="de-DE" dirty="0">
+              <a:solidFill>
+                <a:srgbClr val="FF0000"/>
+              </a:solidFill>
+            </a:endParaRPr>
+          </a:p>
+        </p:txBody>
+      </p:sp>
+      <p:sp>
+        <p:nvSpPr>
+          <p:cNvPr id="7" name="Rechteck 6">
+            <a:extLst>
+              <a:ext uri="{FF2B5EF4-FFF2-40B4-BE49-F238E27FC236}">
+                <a16:creationId xmlns:a16="http://schemas.microsoft.com/office/drawing/2014/main" id="{131044E2-64A8-64C1-B72C-20912AAD8037}"/>
+              </a:ext>
+            </a:extLst>
+          </p:cNvPr>
+          <p:cNvSpPr/>
+          <p:nvPr/>
+        </p:nvSpPr>
+        <p:spPr>
+          <a:xfrm>
+            <a:off x="1439695" y="854273"/>
+            <a:ext cx="1739895" cy="698499"/>
+          </a:xfrm>
+          <a:prstGeom prst="rect">
+            <a:avLst/>
+          </a:prstGeom>
+          <a:noFill/>
+          <a:ln>
+            <a:noFill/>
+          </a:ln>
+        </p:spPr>
+        <p:style>
+          <a:lnRef idx="0">
+            <a:scrgbClr r="0" g="0" b="0"/>
+          </a:lnRef>
+          <a:fillRef idx="0">
+            <a:scrgbClr r="0" g="0" b="0"/>
+          </a:fillRef>
+          <a:effectRef idx="0">
+            <a:scrgbClr r="0" g="0" b="0"/>
+          </a:effectRef>
+          <a:fontRef idx="minor">
+            <a:schemeClr val="dk1"/>
+          </a:fontRef>
+        </p:style>
+        <p:txBody>
+          <a:bodyPr rtlCol="0" anchor="ctr"/>
+          <a:lstStyle/>
+          <a:p>
+            <a:pPr algn="ctr"/>
+            <a:r>
+              <a:rPr lang="de-AT" dirty="0">
+                <a:solidFill>
+                  <a:srgbClr val="FF0000"/>
+                </a:solidFill>
+              </a:rPr>
+              <a:t>20.4 Hz</a:t>
+            </a:r>
+          </a:p>
+          <a:p>
+            <a:pPr algn="ctr"/>
+            <a:r>
+              <a:rPr lang="de-AT" dirty="0">
+                <a:solidFill>
+                  <a:srgbClr val="FF0000"/>
+                </a:solidFill>
+              </a:rPr>
+              <a:t>185°</a:t>
+            </a:r>
+            <a:endParaRPr lang="de-DE" dirty="0">
+              <a:solidFill>
+                <a:srgbClr val="FF0000"/>
+              </a:solidFill>
+            </a:endParaRPr>
+          </a:p>
+        </p:txBody>
+      </p:sp>
+    </p:spTree>
+    <p:extLst>
+      <p:ext uri="{BB962C8B-B14F-4D97-AF65-F5344CB8AC3E}">
+        <p14:creationId xmlns:p14="http://schemas.microsoft.com/office/powerpoint/2010/main" val="1973995004"/>
       </p:ext>
     </p:extLst>
   </p:cSld>
